--- a/מסכים.pptx
+++ b/מסכים.pptx
@@ -2,18 +2,22 @@
 <file path=ppt/presentation.xml><?xml version="1.0" encoding="utf-8"?>
 <p:presentation xmlns:a="http://schemas.openxmlformats.org/drawingml/2006/main" xmlns:r="http://schemas.openxmlformats.org/officeDocument/2006/relationships" xmlns:p="http://schemas.openxmlformats.org/presentationml/2006/main" rtl="1" saveSubsetFonts="1">
   <p:sldMasterIdLst>
-    <p:sldMasterId id="2147483648" r:id="rId1"/>
+    <p:sldMasterId id="2147483660" r:id="rId1"/>
   </p:sldMasterIdLst>
   <p:sldIdLst>
     <p:sldId id="256" r:id="rId2"/>
+    <p:sldId id="259" r:id="rId3"/>
+    <p:sldId id="257" r:id="rId4"/>
+    <p:sldId id="258" r:id="rId5"/>
+    <p:sldId id="260" r:id="rId6"/>
   </p:sldIdLst>
   <p:sldSz cx="12192000" cy="6858000"/>
   <p:notesSz cx="6858000" cy="9144000"/>
   <p:defaultTextStyle>
     <a:defPPr>
-      <a:defRPr lang="he-IL"/>
+      <a:defRPr lang="en-US"/>
     </a:defPPr>
-    <a:lvl1pPr marL="0" algn="r" defTabSz="914400" rtl="1" eaLnBrk="1" latinLnBrk="0" hangingPunct="1">
+    <a:lvl1pPr marL="0" algn="l" defTabSz="457200" rtl="0" eaLnBrk="1" latinLnBrk="0" hangingPunct="1">
       <a:defRPr sz="1800" kern="1200">
         <a:solidFill>
           <a:schemeClr val="tx1"/>
@@ -23,7 +27,7 @@
         <a:cs typeface="+mn-cs"/>
       </a:defRPr>
     </a:lvl1pPr>
-    <a:lvl2pPr marL="457200" algn="r" defTabSz="914400" rtl="1" eaLnBrk="1" latinLnBrk="0" hangingPunct="1">
+    <a:lvl2pPr marL="457200" algn="l" defTabSz="457200" rtl="0" eaLnBrk="1" latinLnBrk="0" hangingPunct="1">
       <a:defRPr sz="1800" kern="1200">
         <a:solidFill>
           <a:schemeClr val="tx1"/>
@@ -33,7 +37,7 @@
         <a:cs typeface="+mn-cs"/>
       </a:defRPr>
     </a:lvl2pPr>
-    <a:lvl3pPr marL="914400" algn="r" defTabSz="914400" rtl="1" eaLnBrk="1" latinLnBrk="0" hangingPunct="1">
+    <a:lvl3pPr marL="914400" algn="l" defTabSz="457200" rtl="0" eaLnBrk="1" latinLnBrk="0" hangingPunct="1">
       <a:defRPr sz="1800" kern="1200">
         <a:solidFill>
           <a:schemeClr val="tx1"/>
@@ -43,7 +47,7 @@
         <a:cs typeface="+mn-cs"/>
       </a:defRPr>
     </a:lvl3pPr>
-    <a:lvl4pPr marL="1371600" algn="r" defTabSz="914400" rtl="1" eaLnBrk="1" latinLnBrk="0" hangingPunct="1">
+    <a:lvl4pPr marL="1371600" algn="l" defTabSz="457200" rtl="0" eaLnBrk="1" latinLnBrk="0" hangingPunct="1">
       <a:defRPr sz="1800" kern="1200">
         <a:solidFill>
           <a:schemeClr val="tx1"/>
@@ -53,7 +57,7 @@
         <a:cs typeface="+mn-cs"/>
       </a:defRPr>
     </a:lvl4pPr>
-    <a:lvl5pPr marL="1828800" algn="r" defTabSz="914400" rtl="1" eaLnBrk="1" latinLnBrk="0" hangingPunct="1">
+    <a:lvl5pPr marL="1828800" algn="l" defTabSz="457200" rtl="0" eaLnBrk="1" latinLnBrk="0" hangingPunct="1">
       <a:defRPr sz="1800" kern="1200">
         <a:solidFill>
           <a:schemeClr val="tx1"/>
@@ -63,7 +67,7 @@
         <a:cs typeface="+mn-cs"/>
       </a:defRPr>
     </a:lvl5pPr>
-    <a:lvl6pPr marL="2286000" algn="r" defTabSz="914400" rtl="1" eaLnBrk="1" latinLnBrk="0" hangingPunct="1">
+    <a:lvl6pPr marL="2286000" algn="l" defTabSz="457200" rtl="0" eaLnBrk="1" latinLnBrk="0" hangingPunct="1">
       <a:defRPr sz="1800" kern="1200">
         <a:solidFill>
           <a:schemeClr val="tx1"/>
@@ -73,7 +77,7 @@
         <a:cs typeface="+mn-cs"/>
       </a:defRPr>
     </a:lvl6pPr>
-    <a:lvl7pPr marL="2743200" algn="r" defTabSz="914400" rtl="1" eaLnBrk="1" latinLnBrk="0" hangingPunct="1">
+    <a:lvl7pPr marL="2743200" algn="l" defTabSz="457200" rtl="0" eaLnBrk="1" latinLnBrk="0" hangingPunct="1">
       <a:defRPr sz="1800" kern="1200">
         <a:solidFill>
           <a:schemeClr val="tx1"/>
@@ -83,7 +87,7 @@
         <a:cs typeface="+mn-cs"/>
       </a:defRPr>
     </a:lvl7pPr>
-    <a:lvl8pPr marL="3200400" algn="r" defTabSz="914400" rtl="1" eaLnBrk="1" latinLnBrk="0" hangingPunct="1">
+    <a:lvl8pPr marL="3200400" algn="l" defTabSz="457200" rtl="0" eaLnBrk="1" latinLnBrk="0" hangingPunct="1">
       <a:defRPr sz="1800" kern="1200">
         <a:solidFill>
           <a:schemeClr val="tx1"/>
@@ -93,7 +97,7 @@
         <a:cs typeface="+mn-cs"/>
       </a:defRPr>
     </a:lvl8pPr>
-    <a:lvl9pPr marL="3657600" algn="r" defTabSz="914400" rtl="1" eaLnBrk="1" latinLnBrk="0" hangingPunct="1">
+    <a:lvl9pPr marL="3657600" algn="l" defTabSz="457200" rtl="0" eaLnBrk="1" latinLnBrk="0" hangingPunct="1">
       <a:defRPr sz="1800" kern="1200">
         <a:solidFill>
           <a:schemeClr val="tx1"/>
@@ -104,11 +108,16 @@
       </a:defRPr>
     </a:lvl9pPr>
   </p:defaultTextStyle>
+  <p:extLst>
+    <p:ext uri="{EFAFB233-063F-42B5-8137-9DF3F51BA10A}">
+      <p15:sldGuideLst xmlns:p15="http://schemas.microsoft.com/office/powerpoint/2012/main"/>
+    </p:ext>
+  </p:extLst>
 </p:presentation>
 </file>
 
 <file path=ppt/slideLayouts/slideLayout1.xml><?xml version="1.0" encoding="utf-8"?>
-<p:sldLayout xmlns:a="http://schemas.openxmlformats.org/drawingml/2006/main" xmlns:r="http://schemas.openxmlformats.org/officeDocument/2006/relationships" xmlns:p="http://schemas.openxmlformats.org/presentationml/2006/main" type="title" preserve="1">
+<p:sldLayout xmlns:a="http://schemas.openxmlformats.org/drawingml/2006/main" xmlns:r="http://schemas.openxmlformats.org/officeDocument/2006/relationships" xmlns:p="http://schemas.openxmlformats.org/presentationml/2006/main" showMasterSp="0" type="title" preserve="1">
   <p:cSld name="שקופית כותרת">
     <p:spTree>
       <p:nvGrpSpPr>
@@ -124,15 +133,146 @@
           <a:chExt cx="0" cy="0"/>
         </a:xfrm>
       </p:grpSpPr>
-      <p:sp>
-        <p:nvSpPr>
-          <p:cNvPr id="2" name="כותרת 1">
-            <a:extLst>
-              <a:ext uri="{FF2B5EF4-FFF2-40B4-BE49-F238E27FC236}">
-                <a16:creationId xmlns:a16="http://schemas.microsoft.com/office/drawing/2014/main" id="{E9D7F37B-26DE-4838-A49C-EC8118EFC8C8}"/>
-              </a:ext>
-            </a:extLst>
-          </p:cNvPr>
+      <p:grpSp>
+        <p:nvGrpSpPr>
+          <p:cNvPr id="7" name="Group 6"/>
+          <p:cNvGrpSpPr/>
+          <p:nvPr/>
+        </p:nvGrpSpPr>
+        <p:grpSpPr>
+          <a:xfrm>
+            <a:off x="-16934" y="0"/>
+            <a:ext cx="12231160" cy="6856214"/>
+            <a:chOff x="-16934" y="0"/>
+            <a:chExt cx="12231160" cy="6856214"/>
+          </a:xfrm>
+        </p:grpSpPr>
+        <p:pic>
+          <p:nvPicPr>
+            <p:cNvPr id="16" name="Picture 15" descr="HD-PanelTitleR1.png"/>
+            <p:cNvPicPr>
+              <a:picLocks noChangeAspect="1"/>
+            </p:cNvPicPr>
+            <p:nvPr/>
+          </p:nvPicPr>
+          <p:blipFill>
+            <a:blip r:embed="rId2">
+              <a:extLst>
+                <a:ext uri="{28A0092B-C50C-407E-A947-70E740481C1C}">
+                  <a14:useLocalDpi xmlns:a14="http://schemas.microsoft.com/office/drawing/2010/main" val="0"/>
+                </a:ext>
+              </a:extLst>
+            </a:blip>
+            <a:stretch>
+              <a:fillRect/>
+            </a:stretch>
+          </p:blipFill>
+          <p:spPr>
+            <a:xfrm>
+              <a:off x="0" y="0"/>
+              <a:ext cx="12188825" cy="6856214"/>
+            </a:xfrm>
+            <a:prstGeom prst="rect">
+              <a:avLst/>
+            </a:prstGeom>
+          </p:spPr>
+        </p:pic>
+        <p:sp>
+          <p:nvSpPr>
+            <p:cNvPr id="26" name="Rectangle 25"/>
+            <p:cNvSpPr/>
+            <p:nvPr/>
+          </p:nvSpPr>
+          <p:spPr>
+            <a:xfrm>
+              <a:off x="2328332" y="1540931"/>
+              <a:ext cx="7543802" cy="3835401"/>
+            </a:xfrm>
+            <a:prstGeom prst="rect">
+              <a:avLst/>
+            </a:prstGeom>
+            <a:noFill/>
+            <a:ln w="15875">
+              <a:miter lim="800000"/>
+            </a:ln>
+          </p:spPr>
+          <p:style>
+            <a:lnRef idx="1">
+              <a:schemeClr val="accent1"/>
+            </a:lnRef>
+            <a:fillRef idx="3">
+              <a:schemeClr val="accent1"/>
+            </a:fillRef>
+            <a:effectRef idx="2">
+              <a:schemeClr val="accent1"/>
+            </a:effectRef>
+            <a:fontRef idx="minor">
+              <a:schemeClr val="lt1"/>
+            </a:fontRef>
+          </p:style>
+        </p:sp>
+        <p:pic>
+          <p:nvPicPr>
+            <p:cNvPr id="17" name="Picture 16" descr="HDRibbonTitle-UniformTrim.png"/>
+            <p:cNvPicPr>
+              <a:picLocks noChangeAspect="1"/>
+            </p:cNvPicPr>
+            <p:nvPr/>
+          </p:nvPicPr>
+          <p:blipFill rotWithShape="1">
+            <a:blip r:embed="rId3">
+              <a:extLst>
+                <a:ext uri="{28A0092B-C50C-407E-A947-70E740481C1C}">
+                  <a14:useLocalDpi xmlns:a14="http://schemas.microsoft.com/office/drawing/2010/main" val="0"/>
+                </a:ext>
+              </a:extLst>
+            </a:blip>
+            <a:srcRect/>
+            <a:stretch/>
+          </p:blipFill>
+          <p:spPr>
+            <a:xfrm>
+              <a:off x="-16934" y="3147609"/>
+              <a:ext cx="2478024" cy="612648"/>
+            </a:xfrm>
+            <a:prstGeom prst="rect">
+              <a:avLst/>
+            </a:prstGeom>
+          </p:spPr>
+        </p:pic>
+        <p:pic>
+          <p:nvPicPr>
+            <p:cNvPr id="20" name="Picture 19" descr="HDRibbonTitle-UniformTrim.png"/>
+            <p:cNvPicPr>
+              <a:picLocks noChangeAspect="1"/>
+            </p:cNvPicPr>
+            <p:nvPr/>
+          </p:nvPicPr>
+          <p:blipFill rotWithShape="1">
+            <a:blip r:embed="rId3">
+              <a:extLst>
+                <a:ext uri="{28A0092B-C50C-407E-A947-70E740481C1C}">
+                  <a14:useLocalDpi xmlns:a14="http://schemas.microsoft.com/office/drawing/2010/main" val="0"/>
+                </a:ext>
+              </a:extLst>
+            </a:blip>
+            <a:srcRect/>
+            <a:stretch/>
+          </p:blipFill>
+          <p:spPr>
+            <a:xfrm>
+              <a:off x="9736202" y="3147609"/>
+              <a:ext cx="2478024" cy="612648"/>
+            </a:xfrm>
+            <a:prstGeom prst="rect">
+              <a:avLst/>
+            </a:prstGeom>
+          </p:spPr>
+        </p:pic>
+      </p:grpSp>
+      <p:sp>
+        <p:nvSpPr>
+          <p:cNvPr id="2" name="Title 1"/>
           <p:cNvSpPr>
             <a:spLocks noGrp="1"/>
           </p:cNvSpPr>
@@ -142,15 +282,19 @@
         </p:nvSpPr>
         <p:spPr>
           <a:xfrm>
-            <a:off x="1524000" y="1122363"/>
-            <a:ext cx="9144000" cy="2387600"/>
+            <a:off x="2692398" y="1871131"/>
+            <a:ext cx="6815669" cy="1515533"/>
           </a:xfrm>
         </p:spPr>
         <p:txBody>
-          <a:bodyPr anchor="b"/>
+          <a:bodyPr anchor="b">
+            <a:noAutofit/>
+          </a:bodyPr>
           <a:lstStyle>
             <a:lvl1pPr algn="ctr">
-              <a:defRPr sz="6000"/>
+              <a:defRPr sz="5400">
+                <a:effectLst/>
+              </a:defRPr>
             </a:lvl1pPr>
           </a:lstStyle>
           <a:p>
@@ -158,18 +302,13 @@
               <a:rPr lang="he-IL"/>
               <a:t>לחץ כדי לערוך סגנון כותרת של תבנית בסיס</a:t>
             </a:r>
-          </a:p>
-        </p:txBody>
-      </p:sp>
-      <p:sp>
-        <p:nvSpPr>
-          <p:cNvPr id="3" name="כותרת משנה 2">
-            <a:extLst>
-              <a:ext uri="{FF2B5EF4-FFF2-40B4-BE49-F238E27FC236}">
-                <a16:creationId xmlns:a16="http://schemas.microsoft.com/office/drawing/2014/main" id="{BACB88BE-81A6-454F-8BBA-7D8114637228}"/>
-              </a:ext>
-            </a:extLst>
-          </p:cNvPr>
+            <a:endParaRPr lang="en-US" dirty="0"/>
+          </a:p>
+        </p:txBody>
+      </p:sp>
+      <p:sp>
+        <p:nvSpPr>
+          <p:cNvPr id="3" name="Subtitle 2"/>
           <p:cNvSpPr>
             <a:spLocks noGrp="1"/>
           </p:cNvSpPr>
@@ -179,48 +318,102 @@
         </p:nvSpPr>
         <p:spPr>
           <a:xfrm>
-            <a:off x="1524000" y="3602038"/>
-            <a:ext cx="9144000" cy="1655762"/>
+            <a:off x="2692398" y="3657597"/>
+            <a:ext cx="6815669" cy="1320802"/>
           </a:xfrm>
         </p:spPr>
         <p:txBody>
-          <a:bodyPr/>
+          <a:bodyPr anchor="t">
+            <a:normAutofit/>
+          </a:bodyPr>
           <a:lstStyle>
             <a:lvl1pPr marL="0" indent="0" algn="ctr">
               <a:buNone/>
-              <a:defRPr sz="2400"/>
+              <a:defRPr sz="2100">
+                <a:solidFill>
+                  <a:schemeClr val="tx1"/>
+                </a:solidFill>
+              </a:defRPr>
             </a:lvl1pPr>
             <a:lvl2pPr marL="457200" indent="0" algn="ctr">
               <a:buNone/>
-              <a:defRPr sz="2000"/>
+              <a:defRPr>
+                <a:solidFill>
+                  <a:schemeClr val="tx1">
+                    <a:tint val="75000"/>
+                  </a:schemeClr>
+                </a:solidFill>
+              </a:defRPr>
             </a:lvl2pPr>
             <a:lvl3pPr marL="914400" indent="0" algn="ctr">
               <a:buNone/>
-              <a:defRPr sz="1800"/>
+              <a:defRPr>
+                <a:solidFill>
+                  <a:schemeClr val="tx1">
+                    <a:tint val="75000"/>
+                  </a:schemeClr>
+                </a:solidFill>
+              </a:defRPr>
             </a:lvl3pPr>
             <a:lvl4pPr marL="1371600" indent="0" algn="ctr">
               <a:buNone/>
-              <a:defRPr sz="1600"/>
+              <a:defRPr>
+                <a:solidFill>
+                  <a:schemeClr val="tx1">
+                    <a:tint val="75000"/>
+                  </a:schemeClr>
+                </a:solidFill>
+              </a:defRPr>
             </a:lvl4pPr>
             <a:lvl5pPr marL="1828800" indent="0" algn="ctr">
               <a:buNone/>
-              <a:defRPr sz="1600"/>
+              <a:defRPr>
+                <a:solidFill>
+                  <a:schemeClr val="tx1">
+                    <a:tint val="75000"/>
+                  </a:schemeClr>
+                </a:solidFill>
+              </a:defRPr>
             </a:lvl5pPr>
             <a:lvl6pPr marL="2286000" indent="0" algn="ctr">
               <a:buNone/>
-              <a:defRPr sz="1600"/>
+              <a:defRPr>
+                <a:solidFill>
+                  <a:schemeClr val="tx1">
+                    <a:tint val="75000"/>
+                  </a:schemeClr>
+                </a:solidFill>
+              </a:defRPr>
             </a:lvl6pPr>
             <a:lvl7pPr marL="2743200" indent="0" algn="ctr">
               <a:buNone/>
-              <a:defRPr sz="1600"/>
+              <a:defRPr>
+                <a:solidFill>
+                  <a:schemeClr val="tx1">
+                    <a:tint val="75000"/>
+                  </a:schemeClr>
+                </a:solidFill>
+              </a:defRPr>
             </a:lvl7pPr>
             <a:lvl8pPr marL="3200400" indent="0" algn="ctr">
               <a:buNone/>
-              <a:defRPr sz="1600"/>
+              <a:defRPr>
+                <a:solidFill>
+                  <a:schemeClr val="tx1">
+                    <a:tint val="75000"/>
+                  </a:schemeClr>
+                </a:solidFill>
+              </a:defRPr>
             </a:lvl8pPr>
             <a:lvl9pPr marL="3657600" indent="0" algn="ctr">
               <a:buNone/>
-              <a:defRPr sz="1600"/>
+              <a:defRPr>
+                <a:solidFill>
+                  <a:schemeClr val="tx1">
+                    <a:tint val="75000"/>
+                  </a:schemeClr>
+                </a:solidFill>
+              </a:defRPr>
             </a:lvl9pPr>
           </a:lstStyle>
           <a:p>
@@ -228,18 +421,13 @@
               <a:rPr lang="he-IL"/>
               <a:t>לחץ כדי לערוך סגנון כותרת משנה של תבנית בסיס</a:t>
             </a:r>
-          </a:p>
-        </p:txBody>
-      </p:sp>
-      <p:sp>
-        <p:nvSpPr>
-          <p:cNvPr id="4" name="מציין מיקום של תאריך 3">
-            <a:extLst>
-              <a:ext uri="{FF2B5EF4-FFF2-40B4-BE49-F238E27FC236}">
-                <a16:creationId xmlns:a16="http://schemas.microsoft.com/office/drawing/2014/main" id="{3CC4EBEB-13D7-49E7-80D5-7307C5229FFD}"/>
-              </a:ext>
-            </a:extLst>
-          </p:cNvPr>
+            <a:endParaRPr lang="en-US" dirty="0"/>
+          </a:p>
+        </p:txBody>
+      </p:sp>
+      <p:sp>
+        <p:nvSpPr>
+          <p:cNvPr id="4" name="Date Placeholder 3"/>
           <p:cNvSpPr>
             <a:spLocks noGrp="1"/>
           </p:cNvSpPr>
@@ -247,14 +435,19 @@
             <p:ph type="dt" sz="half" idx="10"/>
           </p:nvPr>
         </p:nvSpPr>
-        <p:spPr/>
+        <p:spPr>
+          <a:xfrm>
+            <a:off x="7983232" y="5037663"/>
+            <a:ext cx="897467" cy="279400"/>
+          </a:xfrm>
+        </p:spPr>
         <p:txBody>
           <a:bodyPr/>
           <a:lstStyle/>
           <a:p>
             <a:fld id="{FF244A5C-CBE4-4F0F-A48D-FEE452A0549D}" type="datetimeFigureOut">
               <a:rPr lang="he-IL" smtClean="0"/>
-              <a:t>י'/שבט/תשפ"ו</a:t>
+              <a:t>י"ד/שבט/תשפ"ו</a:t>
             </a:fld>
             <a:endParaRPr lang="he-IL"/>
           </a:p>
@@ -262,13 +455,7 @@
       </p:sp>
       <p:sp>
         <p:nvSpPr>
-          <p:cNvPr id="5" name="מציין מיקום של כותרת תחתונה 4">
-            <a:extLst>
-              <a:ext uri="{FF2B5EF4-FFF2-40B4-BE49-F238E27FC236}">
-                <a16:creationId xmlns:a16="http://schemas.microsoft.com/office/drawing/2014/main" id="{DAD69E1D-2570-4ACB-8074-C8A07D81F2F1}"/>
-              </a:ext>
-            </a:extLst>
-          </p:cNvPr>
+          <p:cNvPr id="5" name="Footer Placeholder 4"/>
           <p:cNvSpPr>
             <a:spLocks noGrp="1"/>
           </p:cNvSpPr>
@@ -276,7 +463,12 @@
             <p:ph type="ftr" sz="quarter" idx="11"/>
           </p:nvPr>
         </p:nvSpPr>
-        <p:spPr/>
+        <p:spPr>
+          <a:xfrm>
+            <a:off x="2692397" y="5037663"/>
+            <a:ext cx="5214635" cy="279400"/>
+          </a:xfrm>
+        </p:spPr>
         <p:txBody>
           <a:bodyPr/>
           <a:lstStyle/>
@@ -287,13 +479,7 @@
       </p:sp>
       <p:sp>
         <p:nvSpPr>
-          <p:cNvPr id="6" name="מציין מיקום של מספר שקופית 5">
-            <a:extLst>
-              <a:ext uri="{FF2B5EF4-FFF2-40B4-BE49-F238E27FC236}">
-                <a16:creationId xmlns:a16="http://schemas.microsoft.com/office/drawing/2014/main" id="{7695B3A8-4962-4243-8FF1-8BF2B9B300D8}"/>
-              </a:ext>
-            </a:extLst>
-          </p:cNvPr>
+          <p:cNvPr id="6" name="Slide Number Placeholder 5"/>
           <p:cNvSpPr>
             <a:spLocks noGrp="1"/>
           </p:cNvSpPr>
@@ -301,7 +487,12 @@
             <p:ph type="sldNum" sz="quarter" idx="12"/>
           </p:nvPr>
         </p:nvSpPr>
-        <p:spPr/>
+        <p:spPr>
+          <a:xfrm>
+            <a:off x="8956900" y="5037663"/>
+            <a:ext cx="551167" cy="279400"/>
+          </a:xfrm>
+        </p:spPr>
         <p:txBody>
           <a:bodyPr/>
           <a:lstStyle/>
@@ -314,10 +505,40 @@
           </a:p>
         </p:txBody>
       </p:sp>
+      <p:cxnSp>
+        <p:nvCxnSpPr>
+          <p:cNvPr id="15" name="Straight Connector 14"/>
+          <p:cNvCxnSpPr/>
+          <p:nvPr/>
+        </p:nvCxnSpPr>
+        <p:spPr>
+          <a:xfrm>
+            <a:off x="2692399" y="3522131"/>
+            <a:ext cx="6815668" cy="0"/>
+          </a:xfrm>
+          <a:prstGeom prst="line">
+            <a:avLst/>
+          </a:prstGeom>
+        </p:spPr>
+        <p:style>
+          <a:lnRef idx="2">
+            <a:schemeClr val="accent1"/>
+          </a:lnRef>
+          <a:fillRef idx="0">
+            <a:schemeClr val="accent1"/>
+          </a:fillRef>
+          <a:effectRef idx="1">
+            <a:schemeClr val="accent1"/>
+          </a:effectRef>
+          <a:fontRef idx="minor">
+            <a:schemeClr val="tx1"/>
+          </a:fontRef>
+        </p:style>
+      </p:cxnSp>
     </p:spTree>
     <p:extLst>
       <p:ext uri="{BB962C8B-B14F-4D97-AF65-F5344CB8AC3E}">
-        <p14:creationId xmlns:p14="http://schemas.microsoft.com/office/powerpoint/2010/main" val="3553813615"/>
+        <p14:creationId xmlns:p14="http://schemas.microsoft.com/office/powerpoint/2010/main" val="1949129231"/>
       </p:ext>
     </p:extLst>
   </p:cSld>
@@ -328,6 +549,2099 @@
 </file>
 
 <file path=ppt/slideLayouts/slideLayout10.xml><?xml version="1.0" encoding="utf-8"?>
+<p:sldLayout xmlns:a="http://schemas.openxmlformats.org/drawingml/2006/main" xmlns:r="http://schemas.openxmlformats.org/officeDocument/2006/relationships" xmlns:p="http://schemas.openxmlformats.org/presentationml/2006/main" preserve="1">
+  <p:cSld name="תמונה פנורמית עם כיתוב">
+    <p:spTree>
+      <p:nvGrpSpPr>
+        <p:cNvPr id="1" name=""/>
+        <p:cNvGrpSpPr/>
+        <p:nvPr/>
+      </p:nvGrpSpPr>
+      <p:grpSpPr>
+        <a:xfrm>
+          <a:off x="0" y="0"/>
+          <a:ext cx="0" cy="0"/>
+          <a:chOff x="0" y="0"/>
+          <a:chExt cx="0" cy="0"/>
+        </a:xfrm>
+      </p:grpSpPr>
+      <p:sp>
+        <p:nvSpPr>
+          <p:cNvPr id="2" name="Title 1"/>
+          <p:cNvSpPr>
+            <a:spLocks noGrp="1"/>
+          </p:cNvSpPr>
+          <p:nvPr>
+            <p:ph type="title"/>
+          </p:nvPr>
+        </p:nvSpPr>
+        <p:spPr>
+          <a:xfrm>
+            <a:off x="1295401" y="4815415"/>
+            <a:ext cx="9609666" cy="566738"/>
+          </a:xfrm>
+        </p:spPr>
+        <p:txBody>
+          <a:bodyPr anchor="b">
+            <a:normAutofit/>
+          </a:bodyPr>
+          <a:lstStyle>
+            <a:lvl1pPr algn="ctr">
+              <a:defRPr sz="2400" b="0"/>
+            </a:lvl1pPr>
+          </a:lstStyle>
+          <a:p>
+            <a:r>
+              <a:rPr lang="he-IL"/>
+              <a:t>לחץ כדי לערוך סגנון כותרת של תבנית בסיס</a:t>
+            </a:r>
+            <a:endParaRPr lang="en-US" dirty="0"/>
+          </a:p>
+        </p:txBody>
+      </p:sp>
+      <p:sp>
+        <p:nvSpPr>
+          <p:cNvPr id="3" name="Picture Placeholder 2"/>
+          <p:cNvSpPr>
+            <a:spLocks noGrp="1" noChangeAspect="1"/>
+          </p:cNvSpPr>
+          <p:nvPr>
+            <p:ph type="pic" idx="1"/>
+          </p:nvPr>
+        </p:nvSpPr>
+        <p:spPr>
+          <a:xfrm>
+            <a:off x="1041427" y="1041399"/>
+            <a:ext cx="10105972" cy="3335869"/>
+          </a:xfrm>
+          <a:prstGeom prst="roundRect">
+            <a:avLst>
+              <a:gd name="adj" fmla="val 0"/>
+            </a:avLst>
+          </a:prstGeom>
+          <a:ln w="57150" cmpd="thickThin">
+            <a:solidFill>
+              <a:schemeClr val="tx1">
+                <a:lumMod val="50000"/>
+                <a:lumOff val="50000"/>
+              </a:schemeClr>
+            </a:solidFill>
+            <a:miter lim="800000"/>
+          </a:ln>
+          <a:effectLst>
+            <a:innerShdw blurRad="57150" dist="38100" dir="14460000">
+              <a:srgbClr val="000000">
+                <a:alpha val="70000"/>
+              </a:srgbClr>
+            </a:innerShdw>
+          </a:effectLst>
+        </p:spPr>
+        <p:txBody>
+          <a:bodyPr anchor="t">
+            <a:normAutofit/>
+          </a:bodyPr>
+          <a:lstStyle>
+            <a:lvl1pPr marL="0" indent="0" algn="ctr">
+              <a:buNone/>
+              <a:defRPr sz="1600"/>
+            </a:lvl1pPr>
+            <a:lvl2pPr marL="457200" indent="0">
+              <a:buNone/>
+              <a:defRPr sz="1600"/>
+            </a:lvl2pPr>
+            <a:lvl3pPr marL="914400" indent="0">
+              <a:buNone/>
+              <a:defRPr sz="1600"/>
+            </a:lvl3pPr>
+            <a:lvl4pPr marL="1371600" indent="0">
+              <a:buNone/>
+              <a:defRPr sz="1600"/>
+            </a:lvl4pPr>
+            <a:lvl5pPr marL="1828800" indent="0">
+              <a:buNone/>
+              <a:defRPr sz="1600"/>
+            </a:lvl5pPr>
+            <a:lvl6pPr marL="2286000" indent="0">
+              <a:buNone/>
+              <a:defRPr sz="1600"/>
+            </a:lvl6pPr>
+            <a:lvl7pPr marL="2743200" indent="0">
+              <a:buNone/>
+              <a:defRPr sz="1600"/>
+            </a:lvl7pPr>
+            <a:lvl8pPr marL="3200400" indent="0">
+              <a:buNone/>
+              <a:defRPr sz="1600"/>
+            </a:lvl8pPr>
+            <a:lvl9pPr marL="3657600" indent="0">
+              <a:buNone/>
+              <a:defRPr sz="1600"/>
+            </a:lvl9pPr>
+          </a:lstStyle>
+          <a:p>
+            <a:r>
+              <a:rPr lang="he-IL"/>
+              <a:t>לחץ על הסמל כדי להוסיף תמונה</a:t>
+            </a:r>
+            <a:endParaRPr lang="en-US" dirty="0"/>
+          </a:p>
+        </p:txBody>
+      </p:sp>
+      <p:sp>
+        <p:nvSpPr>
+          <p:cNvPr id="4" name="Text Placeholder 3"/>
+          <p:cNvSpPr>
+            <a:spLocks noGrp="1"/>
+          </p:cNvSpPr>
+          <p:nvPr>
+            <p:ph type="body" sz="half" idx="2"/>
+          </p:nvPr>
+        </p:nvSpPr>
+        <p:spPr>
+          <a:xfrm>
+            <a:off x="1295401" y="5382153"/>
+            <a:ext cx="9609666" cy="493712"/>
+          </a:xfrm>
+        </p:spPr>
+        <p:txBody>
+          <a:bodyPr>
+            <a:normAutofit/>
+          </a:bodyPr>
+          <a:lstStyle>
+            <a:lvl1pPr marL="0" indent="0" algn="ctr">
+              <a:buNone/>
+              <a:defRPr sz="1400"/>
+            </a:lvl1pPr>
+            <a:lvl2pPr marL="457200" indent="0">
+              <a:buNone/>
+              <a:defRPr sz="1200"/>
+            </a:lvl2pPr>
+            <a:lvl3pPr marL="914400" indent="0">
+              <a:buNone/>
+              <a:defRPr sz="1000"/>
+            </a:lvl3pPr>
+            <a:lvl4pPr marL="1371600" indent="0">
+              <a:buNone/>
+              <a:defRPr sz="900"/>
+            </a:lvl4pPr>
+            <a:lvl5pPr marL="1828800" indent="0">
+              <a:buNone/>
+              <a:defRPr sz="900"/>
+            </a:lvl5pPr>
+            <a:lvl6pPr marL="2286000" indent="0">
+              <a:buNone/>
+              <a:defRPr sz="900"/>
+            </a:lvl6pPr>
+            <a:lvl7pPr marL="2743200" indent="0">
+              <a:buNone/>
+              <a:defRPr sz="900"/>
+            </a:lvl7pPr>
+            <a:lvl8pPr marL="3200400" indent="0">
+              <a:buNone/>
+              <a:defRPr sz="900"/>
+            </a:lvl8pPr>
+            <a:lvl9pPr marL="3657600" indent="0">
+              <a:buNone/>
+              <a:defRPr sz="900"/>
+            </a:lvl9pPr>
+          </a:lstStyle>
+          <a:p>
+            <a:pPr lvl="0"/>
+            <a:r>
+              <a:rPr lang="he-IL"/>
+              <a:t>לחץ כדי לערוך סגנונות טקסט של תבנית בסיס</a:t>
+            </a:r>
+          </a:p>
+        </p:txBody>
+      </p:sp>
+      <p:sp>
+        <p:nvSpPr>
+          <p:cNvPr id="5" name="Date Placeholder 4"/>
+          <p:cNvSpPr>
+            <a:spLocks noGrp="1"/>
+          </p:cNvSpPr>
+          <p:nvPr>
+            <p:ph type="dt" sz="half" idx="10"/>
+          </p:nvPr>
+        </p:nvSpPr>
+        <p:spPr/>
+        <p:txBody>
+          <a:bodyPr/>
+          <a:lstStyle/>
+          <a:p>
+            <a:fld id="{FF244A5C-CBE4-4F0F-A48D-FEE452A0549D}" type="datetimeFigureOut">
+              <a:rPr lang="he-IL" smtClean="0"/>
+              <a:t>י"ד/שבט/תשפ"ו</a:t>
+            </a:fld>
+            <a:endParaRPr lang="he-IL"/>
+          </a:p>
+        </p:txBody>
+      </p:sp>
+      <p:sp>
+        <p:nvSpPr>
+          <p:cNvPr id="6" name="Footer Placeholder 5"/>
+          <p:cNvSpPr>
+            <a:spLocks noGrp="1"/>
+          </p:cNvSpPr>
+          <p:nvPr>
+            <p:ph type="ftr" sz="quarter" idx="11"/>
+          </p:nvPr>
+        </p:nvSpPr>
+        <p:spPr/>
+        <p:txBody>
+          <a:bodyPr/>
+          <a:lstStyle/>
+          <a:p>
+            <a:endParaRPr lang="he-IL"/>
+          </a:p>
+        </p:txBody>
+      </p:sp>
+      <p:sp>
+        <p:nvSpPr>
+          <p:cNvPr id="7" name="Slide Number Placeholder 6"/>
+          <p:cNvSpPr>
+            <a:spLocks noGrp="1"/>
+          </p:cNvSpPr>
+          <p:nvPr>
+            <p:ph type="sldNum" sz="quarter" idx="12"/>
+          </p:nvPr>
+        </p:nvSpPr>
+        <p:spPr/>
+        <p:txBody>
+          <a:bodyPr/>
+          <a:lstStyle/>
+          <a:p>
+            <a:fld id="{81C96FA1-7971-41AC-B0F2-A8ADA31D3A87}" type="slidenum">
+              <a:rPr lang="he-IL" smtClean="0"/>
+              <a:t>‹#›</a:t>
+            </a:fld>
+            <a:endParaRPr lang="he-IL"/>
+          </a:p>
+        </p:txBody>
+      </p:sp>
+    </p:spTree>
+    <p:extLst>
+      <p:ext uri="{BB962C8B-B14F-4D97-AF65-F5344CB8AC3E}">
+        <p14:creationId xmlns:p14="http://schemas.microsoft.com/office/powerpoint/2010/main" val="2880227157"/>
+      </p:ext>
+    </p:extLst>
+  </p:cSld>
+  <p:clrMapOvr>
+    <a:masterClrMapping/>
+  </p:clrMapOvr>
+</p:sldLayout>
+</file>
+
+<file path=ppt/slideLayouts/slideLayout11.xml><?xml version="1.0" encoding="utf-8"?>
+<p:sldLayout xmlns:a="http://schemas.openxmlformats.org/drawingml/2006/main" xmlns:r="http://schemas.openxmlformats.org/officeDocument/2006/relationships" xmlns:p="http://schemas.openxmlformats.org/presentationml/2006/main" preserve="1">
+  <p:cSld name="כותרת וכיתוב">
+    <p:spTree>
+      <p:nvGrpSpPr>
+        <p:cNvPr id="1" name=""/>
+        <p:cNvGrpSpPr/>
+        <p:nvPr/>
+      </p:nvGrpSpPr>
+      <p:grpSpPr>
+        <a:xfrm>
+          <a:off x="0" y="0"/>
+          <a:ext cx="0" cy="0"/>
+          <a:chOff x="0" y="0"/>
+          <a:chExt cx="0" cy="0"/>
+        </a:xfrm>
+      </p:grpSpPr>
+      <p:sp>
+        <p:nvSpPr>
+          <p:cNvPr id="2" name="Title 1"/>
+          <p:cNvSpPr>
+            <a:spLocks noGrp="1"/>
+          </p:cNvSpPr>
+          <p:nvPr>
+            <p:ph type="title"/>
+          </p:nvPr>
+        </p:nvSpPr>
+        <p:spPr>
+          <a:xfrm>
+            <a:off x="1303868" y="982132"/>
+            <a:ext cx="9592732" cy="2954868"/>
+          </a:xfrm>
+        </p:spPr>
+        <p:txBody>
+          <a:bodyPr anchor="ctr">
+            <a:normAutofit/>
+          </a:bodyPr>
+          <a:lstStyle>
+            <a:lvl1pPr algn="ctr">
+              <a:defRPr sz="3200" b="0" cap="none"/>
+            </a:lvl1pPr>
+          </a:lstStyle>
+          <a:p>
+            <a:r>
+              <a:rPr lang="he-IL"/>
+              <a:t>לחץ כדי לערוך סגנון כותרת של תבנית בסיס</a:t>
+            </a:r>
+            <a:endParaRPr lang="en-US" dirty="0"/>
+          </a:p>
+        </p:txBody>
+      </p:sp>
+      <p:sp>
+        <p:nvSpPr>
+          <p:cNvPr id="3" name="Text Placeholder 2"/>
+          <p:cNvSpPr>
+            <a:spLocks noGrp="1"/>
+          </p:cNvSpPr>
+          <p:nvPr>
+            <p:ph type="body" idx="1"/>
+          </p:nvPr>
+        </p:nvSpPr>
+        <p:spPr>
+          <a:xfrm>
+            <a:off x="1303868" y="4343399"/>
+            <a:ext cx="9592732" cy="1532467"/>
+          </a:xfrm>
+        </p:spPr>
+        <p:txBody>
+          <a:bodyPr anchor="ctr">
+            <a:normAutofit/>
+          </a:bodyPr>
+          <a:lstStyle>
+            <a:lvl1pPr marL="0" indent="0" algn="ctr">
+              <a:buNone/>
+              <a:defRPr sz="2000">
+                <a:solidFill>
+                  <a:schemeClr val="tx1"/>
+                </a:solidFill>
+              </a:defRPr>
+            </a:lvl1pPr>
+            <a:lvl2pPr marL="457200" indent="0">
+              <a:buNone/>
+              <a:defRPr sz="1800">
+                <a:solidFill>
+                  <a:schemeClr val="tx1">
+                    <a:tint val="75000"/>
+                  </a:schemeClr>
+                </a:solidFill>
+              </a:defRPr>
+            </a:lvl2pPr>
+            <a:lvl3pPr marL="914400" indent="0">
+              <a:buNone/>
+              <a:defRPr sz="1600">
+                <a:solidFill>
+                  <a:schemeClr val="tx1">
+                    <a:tint val="75000"/>
+                  </a:schemeClr>
+                </a:solidFill>
+              </a:defRPr>
+            </a:lvl3pPr>
+            <a:lvl4pPr marL="1371600" indent="0">
+              <a:buNone/>
+              <a:defRPr sz="1400">
+                <a:solidFill>
+                  <a:schemeClr val="tx1">
+                    <a:tint val="75000"/>
+                  </a:schemeClr>
+                </a:solidFill>
+              </a:defRPr>
+            </a:lvl4pPr>
+            <a:lvl5pPr marL="1828800" indent="0">
+              <a:buNone/>
+              <a:defRPr sz="1400">
+                <a:solidFill>
+                  <a:schemeClr val="tx1">
+                    <a:tint val="75000"/>
+                  </a:schemeClr>
+                </a:solidFill>
+              </a:defRPr>
+            </a:lvl5pPr>
+            <a:lvl6pPr marL="2286000" indent="0">
+              <a:buNone/>
+              <a:defRPr sz="1400">
+                <a:solidFill>
+                  <a:schemeClr val="tx1">
+                    <a:tint val="75000"/>
+                  </a:schemeClr>
+                </a:solidFill>
+              </a:defRPr>
+            </a:lvl6pPr>
+            <a:lvl7pPr marL="2743200" indent="0">
+              <a:buNone/>
+              <a:defRPr sz="1400">
+                <a:solidFill>
+                  <a:schemeClr val="tx1">
+                    <a:tint val="75000"/>
+                  </a:schemeClr>
+                </a:solidFill>
+              </a:defRPr>
+            </a:lvl7pPr>
+            <a:lvl8pPr marL="3200400" indent="0">
+              <a:buNone/>
+              <a:defRPr sz="1400">
+                <a:solidFill>
+                  <a:schemeClr val="tx1">
+                    <a:tint val="75000"/>
+                  </a:schemeClr>
+                </a:solidFill>
+              </a:defRPr>
+            </a:lvl8pPr>
+            <a:lvl9pPr marL="3657600" indent="0">
+              <a:buNone/>
+              <a:defRPr sz="1400">
+                <a:solidFill>
+                  <a:schemeClr val="tx1">
+                    <a:tint val="75000"/>
+                  </a:schemeClr>
+                </a:solidFill>
+              </a:defRPr>
+            </a:lvl9pPr>
+          </a:lstStyle>
+          <a:p>
+            <a:pPr lvl="0"/>
+            <a:r>
+              <a:rPr lang="he-IL"/>
+              <a:t>לחץ כדי לערוך סגנונות טקסט של תבנית בסיס</a:t>
+            </a:r>
+          </a:p>
+        </p:txBody>
+      </p:sp>
+      <p:sp>
+        <p:nvSpPr>
+          <p:cNvPr id="4" name="Date Placeholder 3"/>
+          <p:cNvSpPr>
+            <a:spLocks noGrp="1"/>
+          </p:cNvSpPr>
+          <p:nvPr>
+            <p:ph type="dt" sz="half" idx="10"/>
+          </p:nvPr>
+        </p:nvSpPr>
+        <p:spPr/>
+        <p:txBody>
+          <a:bodyPr/>
+          <a:lstStyle/>
+          <a:p>
+            <a:fld id="{FF244A5C-CBE4-4F0F-A48D-FEE452A0549D}" type="datetimeFigureOut">
+              <a:rPr lang="he-IL" smtClean="0"/>
+              <a:t>י"ד/שבט/תשפ"ו</a:t>
+            </a:fld>
+            <a:endParaRPr lang="he-IL"/>
+          </a:p>
+        </p:txBody>
+      </p:sp>
+      <p:sp>
+        <p:nvSpPr>
+          <p:cNvPr id="5" name="Footer Placeholder 4"/>
+          <p:cNvSpPr>
+            <a:spLocks noGrp="1"/>
+          </p:cNvSpPr>
+          <p:nvPr>
+            <p:ph type="ftr" sz="quarter" idx="11"/>
+          </p:nvPr>
+        </p:nvSpPr>
+        <p:spPr/>
+        <p:txBody>
+          <a:bodyPr/>
+          <a:lstStyle/>
+          <a:p>
+            <a:endParaRPr lang="he-IL"/>
+          </a:p>
+        </p:txBody>
+      </p:sp>
+      <p:sp>
+        <p:nvSpPr>
+          <p:cNvPr id="6" name="Slide Number Placeholder 5"/>
+          <p:cNvSpPr>
+            <a:spLocks noGrp="1"/>
+          </p:cNvSpPr>
+          <p:nvPr>
+            <p:ph type="sldNum" sz="quarter" idx="12"/>
+          </p:nvPr>
+        </p:nvSpPr>
+        <p:spPr/>
+        <p:txBody>
+          <a:bodyPr/>
+          <a:lstStyle/>
+          <a:p>
+            <a:fld id="{81C96FA1-7971-41AC-B0F2-A8ADA31D3A87}" type="slidenum">
+              <a:rPr lang="he-IL" smtClean="0"/>
+              <a:t>‹#›</a:t>
+            </a:fld>
+            <a:endParaRPr lang="he-IL"/>
+          </a:p>
+        </p:txBody>
+      </p:sp>
+      <p:cxnSp>
+        <p:nvCxnSpPr>
+          <p:cNvPr id="15" name="Straight Connector 14"/>
+          <p:cNvCxnSpPr/>
+          <p:nvPr/>
+        </p:nvCxnSpPr>
+        <p:spPr>
+          <a:xfrm>
+            <a:off x="1396169" y="4140199"/>
+            <a:ext cx="9407298" cy="0"/>
+          </a:xfrm>
+          <a:prstGeom prst="line">
+            <a:avLst/>
+          </a:prstGeom>
+          <a:ln w="15875"/>
+        </p:spPr>
+        <p:style>
+          <a:lnRef idx="2">
+            <a:schemeClr val="accent1"/>
+          </a:lnRef>
+          <a:fillRef idx="0">
+            <a:schemeClr val="accent1"/>
+          </a:fillRef>
+          <a:effectRef idx="1">
+            <a:schemeClr val="accent1"/>
+          </a:effectRef>
+          <a:fontRef idx="minor">
+            <a:schemeClr val="tx1"/>
+          </a:fontRef>
+        </p:style>
+      </p:cxnSp>
+    </p:spTree>
+    <p:extLst>
+      <p:ext uri="{BB962C8B-B14F-4D97-AF65-F5344CB8AC3E}">
+        <p14:creationId xmlns:p14="http://schemas.microsoft.com/office/powerpoint/2010/main" val="2076550623"/>
+      </p:ext>
+    </p:extLst>
+  </p:cSld>
+  <p:clrMapOvr>
+    <a:masterClrMapping/>
+  </p:clrMapOvr>
+</p:sldLayout>
+</file>
+
+<file path=ppt/slideLayouts/slideLayout12.xml><?xml version="1.0" encoding="utf-8"?>
+<p:sldLayout xmlns:a="http://schemas.openxmlformats.org/drawingml/2006/main" xmlns:r="http://schemas.openxmlformats.org/officeDocument/2006/relationships" xmlns:p="http://schemas.openxmlformats.org/presentationml/2006/main" preserve="1">
+  <p:cSld name="ציטוט עם כיתוב">
+    <p:spTree>
+      <p:nvGrpSpPr>
+        <p:cNvPr id="1" name=""/>
+        <p:cNvGrpSpPr/>
+        <p:nvPr/>
+      </p:nvGrpSpPr>
+      <p:grpSpPr>
+        <a:xfrm>
+          <a:off x="0" y="0"/>
+          <a:ext cx="0" cy="0"/>
+          <a:chOff x="0" y="0"/>
+          <a:chExt cx="0" cy="0"/>
+        </a:xfrm>
+      </p:grpSpPr>
+      <p:sp>
+        <p:nvSpPr>
+          <p:cNvPr id="2" name="Title 1"/>
+          <p:cNvSpPr>
+            <a:spLocks noGrp="1"/>
+          </p:cNvSpPr>
+          <p:nvPr>
+            <p:ph type="title"/>
+          </p:nvPr>
+        </p:nvSpPr>
+        <p:spPr>
+          <a:xfrm>
+            <a:off x="1446213" y="982132"/>
+            <a:ext cx="9296398" cy="2370668"/>
+          </a:xfrm>
+        </p:spPr>
+        <p:txBody>
+          <a:bodyPr anchor="ctr">
+            <a:normAutofit/>
+          </a:bodyPr>
+          <a:lstStyle>
+            <a:lvl1pPr algn="ctr">
+              <a:defRPr sz="3200" b="0" cap="none">
+                <a:solidFill>
+                  <a:schemeClr val="tx1"/>
+                </a:solidFill>
+              </a:defRPr>
+            </a:lvl1pPr>
+          </a:lstStyle>
+          <a:p>
+            <a:r>
+              <a:rPr lang="he-IL"/>
+              <a:t>לחץ כדי לערוך סגנון כותרת של תבנית בסיס</a:t>
+            </a:r>
+            <a:endParaRPr lang="en-US" dirty="0"/>
+          </a:p>
+        </p:txBody>
+      </p:sp>
+      <p:sp>
+        <p:nvSpPr>
+          <p:cNvPr id="10" name="Text Placeholder 9"/>
+          <p:cNvSpPr>
+            <a:spLocks noGrp="1"/>
+          </p:cNvSpPr>
+          <p:nvPr>
+            <p:ph type="body" sz="quarter" idx="13"/>
+          </p:nvPr>
+        </p:nvSpPr>
+        <p:spPr>
+          <a:xfrm>
+            <a:off x="1674812" y="3352800"/>
+            <a:ext cx="8839202" cy="584200"/>
+          </a:xfrm>
+        </p:spPr>
+        <p:txBody>
+          <a:bodyPr anchor="ctr">
+            <a:normAutofit/>
+          </a:bodyPr>
+          <a:lstStyle>
+            <a:lvl1pPr marL="0" indent="0" algn="r">
+              <a:buFontTx/>
+              <a:buNone/>
+              <a:defRPr sz="2000"/>
+            </a:lvl1pPr>
+            <a:lvl2pPr marL="457200" indent="0">
+              <a:buFontTx/>
+              <a:buNone/>
+              <a:defRPr/>
+            </a:lvl2pPr>
+            <a:lvl3pPr marL="914400" indent="0">
+              <a:buFontTx/>
+              <a:buNone/>
+              <a:defRPr/>
+            </a:lvl3pPr>
+            <a:lvl4pPr marL="1371600" indent="0">
+              <a:buFontTx/>
+              <a:buNone/>
+              <a:defRPr/>
+            </a:lvl4pPr>
+            <a:lvl5pPr marL="1828800" indent="0">
+              <a:buFontTx/>
+              <a:buNone/>
+              <a:defRPr/>
+            </a:lvl5pPr>
+          </a:lstStyle>
+          <a:p>
+            <a:pPr lvl="0"/>
+            <a:r>
+              <a:rPr lang="he-IL"/>
+              <a:t>לחץ כדי לערוך סגנונות טקסט של תבנית בסיס</a:t>
+            </a:r>
+          </a:p>
+        </p:txBody>
+      </p:sp>
+      <p:sp>
+        <p:nvSpPr>
+          <p:cNvPr id="3" name="Text Placeholder 2"/>
+          <p:cNvSpPr>
+            <a:spLocks noGrp="1"/>
+          </p:cNvSpPr>
+          <p:nvPr>
+            <p:ph type="body" idx="1"/>
+          </p:nvPr>
+        </p:nvSpPr>
+        <p:spPr>
+          <a:xfrm>
+            <a:off x="1295401" y="4343399"/>
+            <a:ext cx="9609666" cy="1532467"/>
+          </a:xfrm>
+        </p:spPr>
+        <p:txBody>
+          <a:bodyPr anchor="ctr">
+            <a:normAutofit/>
+          </a:bodyPr>
+          <a:lstStyle>
+            <a:lvl1pPr marL="0" indent="0" algn="ctr">
+              <a:buNone/>
+              <a:defRPr sz="2000">
+                <a:solidFill>
+                  <a:schemeClr val="tx1"/>
+                </a:solidFill>
+              </a:defRPr>
+            </a:lvl1pPr>
+            <a:lvl2pPr marL="457200" indent="0">
+              <a:buNone/>
+              <a:defRPr sz="1800">
+                <a:solidFill>
+                  <a:schemeClr val="tx1">
+                    <a:tint val="75000"/>
+                  </a:schemeClr>
+                </a:solidFill>
+              </a:defRPr>
+            </a:lvl2pPr>
+            <a:lvl3pPr marL="914400" indent="0">
+              <a:buNone/>
+              <a:defRPr sz="1600">
+                <a:solidFill>
+                  <a:schemeClr val="tx1">
+                    <a:tint val="75000"/>
+                  </a:schemeClr>
+                </a:solidFill>
+              </a:defRPr>
+            </a:lvl3pPr>
+            <a:lvl4pPr marL="1371600" indent="0">
+              <a:buNone/>
+              <a:defRPr sz="1400">
+                <a:solidFill>
+                  <a:schemeClr val="tx1">
+                    <a:tint val="75000"/>
+                  </a:schemeClr>
+                </a:solidFill>
+              </a:defRPr>
+            </a:lvl4pPr>
+            <a:lvl5pPr marL="1828800" indent="0">
+              <a:buNone/>
+              <a:defRPr sz="1400">
+                <a:solidFill>
+                  <a:schemeClr val="tx1">
+                    <a:tint val="75000"/>
+                  </a:schemeClr>
+                </a:solidFill>
+              </a:defRPr>
+            </a:lvl5pPr>
+            <a:lvl6pPr marL="2286000" indent="0">
+              <a:buNone/>
+              <a:defRPr sz="1400">
+                <a:solidFill>
+                  <a:schemeClr val="tx1">
+                    <a:tint val="75000"/>
+                  </a:schemeClr>
+                </a:solidFill>
+              </a:defRPr>
+            </a:lvl6pPr>
+            <a:lvl7pPr marL="2743200" indent="0">
+              <a:buNone/>
+              <a:defRPr sz="1400">
+                <a:solidFill>
+                  <a:schemeClr val="tx1">
+                    <a:tint val="75000"/>
+                  </a:schemeClr>
+                </a:solidFill>
+              </a:defRPr>
+            </a:lvl7pPr>
+            <a:lvl8pPr marL="3200400" indent="0">
+              <a:buNone/>
+              <a:defRPr sz="1400">
+                <a:solidFill>
+                  <a:schemeClr val="tx1">
+                    <a:tint val="75000"/>
+                  </a:schemeClr>
+                </a:solidFill>
+              </a:defRPr>
+            </a:lvl8pPr>
+            <a:lvl9pPr marL="3657600" indent="0">
+              <a:buNone/>
+              <a:defRPr sz="1400">
+                <a:solidFill>
+                  <a:schemeClr val="tx1">
+                    <a:tint val="75000"/>
+                  </a:schemeClr>
+                </a:solidFill>
+              </a:defRPr>
+            </a:lvl9pPr>
+          </a:lstStyle>
+          <a:p>
+            <a:pPr lvl="0"/>
+            <a:r>
+              <a:rPr lang="he-IL"/>
+              <a:t>לחץ כדי לערוך סגנונות טקסט של תבנית בסיס</a:t>
+            </a:r>
+          </a:p>
+        </p:txBody>
+      </p:sp>
+      <p:sp>
+        <p:nvSpPr>
+          <p:cNvPr id="4" name="Date Placeholder 3"/>
+          <p:cNvSpPr>
+            <a:spLocks noGrp="1"/>
+          </p:cNvSpPr>
+          <p:nvPr>
+            <p:ph type="dt" sz="half" idx="10"/>
+          </p:nvPr>
+        </p:nvSpPr>
+        <p:spPr/>
+        <p:txBody>
+          <a:bodyPr/>
+          <a:lstStyle/>
+          <a:p>
+            <a:fld id="{FF244A5C-CBE4-4F0F-A48D-FEE452A0549D}" type="datetimeFigureOut">
+              <a:rPr lang="he-IL" smtClean="0"/>
+              <a:t>י"ד/שבט/תשפ"ו</a:t>
+            </a:fld>
+            <a:endParaRPr lang="he-IL"/>
+          </a:p>
+        </p:txBody>
+      </p:sp>
+      <p:sp>
+        <p:nvSpPr>
+          <p:cNvPr id="5" name="Footer Placeholder 4"/>
+          <p:cNvSpPr>
+            <a:spLocks noGrp="1"/>
+          </p:cNvSpPr>
+          <p:nvPr>
+            <p:ph type="ftr" sz="quarter" idx="11"/>
+          </p:nvPr>
+        </p:nvSpPr>
+        <p:spPr/>
+        <p:txBody>
+          <a:bodyPr/>
+          <a:lstStyle/>
+          <a:p>
+            <a:endParaRPr lang="he-IL"/>
+          </a:p>
+        </p:txBody>
+      </p:sp>
+      <p:sp>
+        <p:nvSpPr>
+          <p:cNvPr id="6" name="Slide Number Placeholder 5"/>
+          <p:cNvSpPr>
+            <a:spLocks noGrp="1"/>
+          </p:cNvSpPr>
+          <p:nvPr>
+            <p:ph type="sldNum" sz="quarter" idx="12"/>
+          </p:nvPr>
+        </p:nvSpPr>
+        <p:spPr/>
+        <p:txBody>
+          <a:bodyPr/>
+          <a:lstStyle/>
+          <a:p>
+            <a:fld id="{81C96FA1-7971-41AC-B0F2-A8ADA31D3A87}" type="slidenum">
+              <a:rPr lang="he-IL" smtClean="0"/>
+              <a:t>‹#›</a:t>
+            </a:fld>
+            <a:endParaRPr lang="he-IL"/>
+          </a:p>
+        </p:txBody>
+      </p:sp>
+      <p:sp>
+        <p:nvSpPr>
+          <p:cNvPr id="14" name="TextBox 13"/>
+          <p:cNvSpPr txBox="1"/>
+          <p:nvPr/>
+        </p:nvSpPr>
+        <p:spPr>
+          <a:xfrm>
+            <a:off x="862013" y="879961"/>
+            <a:ext cx="609600" cy="584776"/>
+          </a:xfrm>
+          <a:prstGeom prst="rect">
+            <a:avLst/>
+          </a:prstGeom>
+        </p:spPr>
+        <p:txBody>
+          <a:bodyPr vert="horz" lIns="91440" tIns="45720" rIns="91440" bIns="45720" rtlCol="0" anchor="ctr">
+            <a:noAutofit/>
+          </a:bodyPr>
+          <a:lstStyle/>
+          <a:p>
+            <a:pPr lvl="0"/>
+            <a:r>
+              <a:rPr lang="en-US" sz="8000" dirty="0">
+                <a:solidFill>
+                  <a:schemeClr val="tx1"/>
+                </a:solidFill>
+                <a:effectLst/>
+              </a:rPr>
+              <a:t>“</a:t>
+            </a:r>
+          </a:p>
+        </p:txBody>
+      </p:sp>
+      <p:sp>
+        <p:nvSpPr>
+          <p:cNvPr id="15" name="TextBox 14"/>
+          <p:cNvSpPr txBox="1"/>
+          <p:nvPr/>
+        </p:nvSpPr>
+        <p:spPr>
+          <a:xfrm>
+            <a:off x="10600267" y="2827870"/>
+            <a:ext cx="609600" cy="584776"/>
+          </a:xfrm>
+          <a:prstGeom prst="rect">
+            <a:avLst/>
+          </a:prstGeom>
+        </p:spPr>
+        <p:txBody>
+          <a:bodyPr vert="horz" lIns="91440" tIns="45720" rIns="91440" bIns="45720" rtlCol="0" anchor="ctr">
+            <a:noAutofit/>
+          </a:bodyPr>
+          <a:lstStyle/>
+          <a:p>
+            <a:pPr lvl="0" algn="r"/>
+            <a:r>
+              <a:rPr lang="en-US" sz="8000" dirty="0">
+                <a:solidFill>
+                  <a:schemeClr val="tx1"/>
+                </a:solidFill>
+                <a:effectLst/>
+              </a:rPr>
+              <a:t>”</a:t>
+            </a:r>
+          </a:p>
+        </p:txBody>
+      </p:sp>
+      <p:cxnSp>
+        <p:nvCxnSpPr>
+          <p:cNvPr id="19" name="Straight Connector 18"/>
+          <p:cNvCxnSpPr/>
+          <p:nvPr/>
+        </p:nvCxnSpPr>
+        <p:spPr>
+          <a:xfrm>
+            <a:off x="1396169" y="4140199"/>
+            <a:ext cx="9407298" cy="0"/>
+          </a:xfrm>
+          <a:prstGeom prst="line">
+            <a:avLst/>
+          </a:prstGeom>
+          <a:ln w="15875"/>
+        </p:spPr>
+        <p:style>
+          <a:lnRef idx="2">
+            <a:schemeClr val="accent1"/>
+          </a:lnRef>
+          <a:fillRef idx="0">
+            <a:schemeClr val="accent1"/>
+          </a:fillRef>
+          <a:effectRef idx="1">
+            <a:schemeClr val="accent1"/>
+          </a:effectRef>
+          <a:fontRef idx="minor">
+            <a:schemeClr val="tx1"/>
+          </a:fontRef>
+        </p:style>
+      </p:cxnSp>
+    </p:spTree>
+    <p:extLst>
+      <p:ext uri="{BB962C8B-B14F-4D97-AF65-F5344CB8AC3E}">
+        <p14:creationId xmlns:p14="http://schemas.microsoft.com/office/powerpoint/2010/main" val="1135838563"/>
+      </p:ext>
+    </p:extLst>
+  </p:cSld>
+  <p:clrMapOvr>
+    <a:masterClrMapping/>
+  </p:clrMapOvr>
+</p:sldLayout>
+</file>
+
+<file path=ppt/slideLayouts/slideLayout13.xml><?xml version="1.0" encoding="utf-8"?>
+<p:sldLayout xmlns:a="http://schemas.openxmlformats.org/drawingml/2006/main" xmlns:r="http://schemas.openxmlformats.org/officeDocument/2006/relationships" xmlns:p="http://schemas.openxmlformats.org/presentationml/2006/main" preserve="1">
+  <p:cSld name="כרטיס שם">
+    <p:spTree>
+      <p:nvGrpSpPr>
+        <p:cNvPr id="1" name=""/>
+        <p:cNvGrpSpPr/>
+        <p:nvPr/>
+      </p:nvGrpSpPr>
+      <p:grpSpPr>
+        <a:xfrm>
+          <a:off x="0" y="0"/>
+          <a:ext cx="0" cy="0"/>
+          <a:chOff x="0" y="0"/>
+          <a:chExt cx="0" cy="0"/>
+        </a:xfrm>
+      </p:grpSpPr>
+      <p:sp>
+        <p:nvSpPr>
+          <p:cNvPr id="2" name="Title 1"/>
+          <p:cNvSpPr>
+            <a:spLocks noGrp="1"/>
+          </p:cNvSpPr>
+          <p:nvPr>
+            <p:ph type="title"/>
+          </p:nvPr>
+        </p:nvSpPr>
+        <p:spPr>
+          <a:xfrm>
+            <a:off x="1295402" y="3308581"/>
+            <a:ext cx="9609668" cy="1468800"/>
+          </a:xfrm>
+        </p:spPr>
+        <p:txBody>
+          <a:bodyPr anchor="b">
+            <a:normAutofit/>
+          </a:bodyPr>
+          <a:lstStyle>
+            <a:lvl1pPr algn="l">
+              <a:defRPr sz="3200" b="0" cap="none"/>
+            </a:lvl1pPr>
+          </a:lstStyle>
+          <a:p>
+            <a:r>
+              <a:rPr lang="he-IL"/>
+              <a:t>לחץ כדי לערוך סגנון כותרת של תבנית בסיס</a:t>
+            </a:r>
+            <a:endParaRPr lang="en-US" dirty="0"/>
+          </a:p>
+        </p:txBody>
+      </p:sp>
+      <p:sp>
+        <p:nvSpPr>
+          <p:cNvPr id="3" name="Text Placeholder 2"/>
+          <p:cNvSpPr>
+            <a:spLocks noGrp="1"/>
+          </p:cNvSpPr>
+          <p:nvPr>
+            <p:ph type="body" idx="1"/>
+          </p:nvPr>
+        </p:nvSpPr>
+        <p:spPr>
+          <a:xfrm>
+            <a:off x="1295401" y="4777381"/>
+            <a:ext cx="9609668" cy="860400"/>
+          </a:xfrm>
+        </p:spPr>
+        <p:txBody>
+          <a:bodyPr anchor="t">
+            <a:normAutofit/>
+          </a:bodyPr>
+          <a:lstStyle>
+            <a:lvl1pPr marL="0" indent="0" algn="l">
+              <a:buNone/>
+              <a:defRPr sz="2000">
+                <a:solidFill>
+                  <a:schemeClr val="tx1"/>
+                </a:solidFill>
+              </a:defRPr>
+            </a:lvl1pPr>
+            <a:lvl2pPr marL="457200" indent="0">
+              <a:buNone/>
+              <a:defRPr sz="1800">
+                <a:solidFill>
+                  <a:schemeClr val="tx1">
+                    <a:tint val="75000"/>
+                  </a:schemeClr>
+                </a:solidFill>
+              </a:defRPr>
+            </a:lvl2pPr>
+            <a:lvl3pPr marL="914400" indent="0">
+              <a:buNone/>
+              <a:defRPr sz="1600">
+                <a:solidFill>
+                  <a:schemeClr val="tx1">
+                    <a:tint val="75000"/>
+                  </a:schemeClr>
+                </a:solidFill>
+              </a:defRPr>
+            </a:lvl3pPr>
+            <a:lvl4pPr marL="1371600" indent="0">
+              <a:buNone/>
+              <a:defRPr sz="1400">
+                <a:solidFill>
+                  <a:schemeClr val="tx1">
+                    <a:tint val="75000"/>
+                  </a:schemeClr>
+                </a:solidFill>
+              </a:defRPr>
+            </a:lvl4pPr>
+            <a:lvl5pPr marL="1828800" indent="0">
+              <a:buNone/>
+              <a:defRPr sz="1400">
+                <a:solidFill>
+                  <a:schemeClr val="tx1">
+                    <a:tint val="75000"/>
+                  </a:schemeClr>
+                </a:solidFill>
+              </a:defRPr>
+            </a:lvl5pPr>
+            <a:lvl6pPr marL="2286000" indent="0">
+              <a:buNone/>
+              <a:defRPr sz="1400">
+                <a:solidFill>
+                  <a:schemeClr val="tx1">
+                    <a:tint val="75000"/>
+                  </a:schemeClr>
+                </a:solidFill>
+              </a:defRPr>
+            </a:lvl6pPr>
+            <a:lvl7pPr marL="2743200" indent="0">
+              <a:buNone/>
+              <a:defRPr sz="1400">
+                <a:solidFill>
+                  <a:schemeClr val="tx1">
+                    <a:tint val="75000"/>
+                  </a:schemeClr>
+                </a:solidFill>
+              </a:defRPr>
+            </a:lvl7pPr>
+            <a:lvl8pPr marL="3200400" indent="0">
+              <a:buNone/>
+              <a:defRPr sz="1400">
+                <a:solidFill>
+                  <a:schemeClr val="tx1">
+                    <a:tint val="75000"/>
+                  </a:schemeClr>
+                </a:solidFill>
+              </a:defRPr>
+            </a:lvl8pPr>
+            <a:lvl9pPr marL="3657600" indent="0">
+              <a:buNone/>
+              <a:defRPr sz="1400">
+                <a:solidFill>
+                  <a:schemeClr val="tx1">
+                    <a:tint val="75000"/>
+                  </a:schemeClr>
+                </a:solidFill>
+              </a:defRPr>
+            </a:lvl9pPr>
+          </a:lstStyle>
+          <a:p>
+            <a:pPr lvl="0"/>
+            <a:r>
+              <a:rPr lang="he-IL"/>
+              <a:t>לחץ כדי לערוך סגנונות טקסט של תבנית בסיס</a:t>
+            </a:r>
+          </a:p>
+        </p:txBody>
+      </p:sp>
+      <p:sp>
+        <p:nvSpPr>
+          <p:cNvPr id="4" name="Date Placeholder 3"/>
+          <p:cNvSpPr>
+            <a:spLocks noGrp="1"/>
+          </p:cNvSpPr>
+          <p:nvPr>
+            <p:ph type="dt" sz="half" idx="10"/>
+          </p:nvPr>
+        </p:nvSpPr>
+        <p:spPr/>
+        <p:txBody>
+          <a:bodyPr/>
+          <a:lstStyle/>
+          <a:p>
+            <a:fld id="{FF244A5C-CBE4-4F0F-A48D-FEE452A0549D}" type="datetimeFigureOut">
+              <a:rPr lang="he-IL" smtClean="0"/>
+              <a:t>י"ד/שבט/תשפ"ו</a:t>
+            </a:fld>
+            <a:endParaRPr lang="he-IL"/>
+          </a:p>
+        </p:txBody>
+      </p:sp>
+      <p:sp>
+        <p:nvSpPr>
+          <p:cNvPr id="5" name="Footer Placeholder 4"/>
+          <p:cNvSpPr>
+            <a:spLocks noGrp="1"/>
+          </p:cNvSpPr>
+          <p:nvPr>
+            <p:ph type="ftr" sz="quarter" idx="11"/>
+          </p:nvPr>
+        </p:nvSpPr>
+        <p:spPr/>
+        <p:txBody>
+          <a:bodyPr/>
+          <a:lstStyle/>
+          <a:p>
+            <a:endParaRPr lang="he-IL"/>
+          </a:p>
+        </p:txBody>
+      </p:sp>
+      <p:sp>
+        <p:nvSpPr>
+          <p:cNvPr id="6" name="Slide Number Placeholder 5"/>
+          <p:cNvSpPr>
+            <a:spLocks noGrp="1"/>
+          </p:cNvSpPr>
+          <p:nvPr>
+            <p:ph type="sldNum" sz="quarter" idx="12"/>
+          </p:nvPr>
+        </p:nvSpPr>
+        <p:spPr/>
+        <p:txBody>
+          <a:bodyPr/>
+          <a:lstStyle/>
+          <a:p>
+            <a:fld id="{81C96FA1-7971-41AC-B0F2-A8ADA31D3A87}" type="slidenum">
+              <a:rPr lang="he-IL" smtClean="0"/>
+              <a:t>‹#›</a:t>
+            </a:fld>
+            <a:endParaRPr lang="he-IL"/>
+          </a:p>
+        </p:txBody>
+      </p:sp>
+    </p:spTree>
+    <p:extLst>
+      <p:ext uri="{BB962C8B-B14F-4D97-AF65-F5344CB8AC3E}">
+        <p14:creationId xmlns:p14="http://schemas.microsoft.com/office/powerpoint/2010/main" val="2483352543"/>
+      </p:ext>
+    </p:extLst>
+  </p:cSld>
+  <p:clrMapOvr>
+    <a:masterClrMapping/>
+  </p:clrMapOvr>
+</p:sldLayout>
+</file>
+
+<file path=ppt/slideLayouts/slideLayout14.xml><?xml version="1.0" encoding="utf-8"?>
+<p:sldLayout xmlns:a="http://schemas.openxmlformats.org/drawingml/2006/main" xmlns:r="http://schemas.openxmlformats.org/officeDocument/2006/relationships" xmlns:p="http://schemas.openxmlformats.org/presentationml/2006/main" preserve="1">
+  <p:cSld name="כרטיס שם עם ציטוט">
+    <p:spTree>
+      <p:nvGrpSpPr>
+        <p:cNvPr id="1" name=""/>
+        <p:cNvGrpSpPr/>
+        <p:nvPr/>
+      </p:nvGrpSpPr>
+      <p:grpSpPr>
+        <a:xfrm>
+          <a:off x="0" y="0"/>
+          <a:ext cx="0" cy="0"/>
+          <a:chOff x="0" y="0"/>
+          <a:chExt cx="0" cy="0"/>
+        </a:xfrm>
+      </p:grpSpPr>
+      <p:sp>
+        <p:nvSpPr>
+          <p:cNvPr id="2" name="Title 1"/>
+          <p:cNvSpPr>
+            <a:spLocks noGrp="1"/>
+          </p:cNvSpPr>
+          <p:nvPr>
+            <p:ph type="title"/>
+          </p:nvPr>
+        </p:nvSpPr>
+        <p:spPr>
+          <a:xfrm>
+            <a:off x="1446213" y="982132"/>
+            <a:ext cx="9296398" cy="2243668"/>
+          </a:xfrm>
+        </p:spPr>
+        <p:txBody>
+          <a:bodyPr anchor="ctr">
+            <a:normAutofit/>
+          </a:bodyPr>
+          <a:lstStyle>
+            <a:lvl1pPr algn="ctr">
+              <a:defRPr sz="3200" b="0" cap="none">
+                <a:solidFill>
+                  <a:schemeClr val="tx1"/>
+                </a:solidFill>
+              </a:defRPr>
+            </a:lvl1pPr>
+          </a:lstStyle>
+          <a:p>
+            <a:r>
+              <a:rPr lang="he-IL"/>
+              <a:t>לחץ כדי לערוך סגנון כותרת של תבנית בסיס</a:t>
+            </a:r>
+            <a:endParaRPr lang="en-US" dirty="0"/>
+          </a:p>
+        </p:txBody>
+      </p:sp>
+      <p:sp>
+        <p:nvSpPr>
+          <p:cNvPr id="23" name="Text Placeholder 2"/>
+          <p:cNvSpPr>
+            <a:spLocks noGrp="1"/>
+          </p:cNvSpPr>
+          <p:nvPr>
+            <p:ph type="body" idx="13"/>
+          </p:nvPr>
+        </p:nvSpPr>
+        <p:spPr>
+          <a:xfrm>
+            <a:off x="1295401" y="3639312"/>
+            <a:ext cx="9609668" cy="886968"/>
+          </a:xfrm>
+        </p:spPr>
+        <p:txBody>
+          <a:bodyPr anchor="b">
+            <a:normAutofit/>
+          </a:bodyPr>
+          <a:lstStyle>
+            <a:lvl1pPr marL="0" indent="0" algn="l">
+              <a:spcBef>
+                <a:spcPts val="0"/>
+              </a:spcBef>
+              <a:buNone/>
+              <a:defRPr sz="2400">
+                <a:solidFill>
+                  <a:schemeClr val="tx1"/>
+                </a:solidFill>
+              </a:defRPr>
+            </a:lvl1pPr>
+            <a:lvl2pPr marL="457200" indent="0">
+              <a:buNone/>
+              <a:defRPr sz="1800">
+                <a:solidFill>
+                  <a:schemeClr val="tx1">
+                    <a:tint val="75000"/>
+                  </a:schemeClr>
+                </a:solidFill>
+              </a:defRPr>
+            </a:lvl2pPr>
+            <a:lvl3pPr marL="914400" indent="0">
+              <a:buNone/>
+              <a:defRPr sz="1600">
+                <a:solidFill>
+                  <a:schemeClr val="tx1">
+                    <a:tint val="75000"/>
+                  </a:schemeClr>
+                </a:solidFill>
+              </a:defRPr>
+            </a:lvl3pPr>
+            <a:lvl4pPr marL="1371600" indent="0">
+              <a:buNone/>
+              <a:defRPr sz="1400">
+                <a:solidFill>
+                  <a:schemeClr val="tx1">
+                    <a:tint val="75000"/>
+                  </a:schemeClr>
+                </a:solidFill>
+              </a:defRPr>
+            </a:lvl4pPr>
+            <a:lvl5pPr marL="1828800" indent="0">
+              <a:buNone/>
+              <a:defRPr sz="1400">
+                <a:solidFill>
+                  <a:schemeClr val="tx1">
+                    <a:tint val="75000"/>
+                  </a:schemeClr>
+                </a:solidFill>
+              </a:defRPr>
+            </a:lvl5pPr>
+            <a:lvl6pPr marL="2286000" indent="0">
+              <a:buNone/>
+              <a:defRPr sz="1400">
+                <a:solidFill>
+                  <a:schemeClr val="tx1">
+                    <a:tint val="75000"/>
+                  </a:schemeClr>
+                </a:solidFill>
+              </a:defRPr>
+            </a:lvl6pPr>
+            <a:lvl7pPr marL="2743200" indent="0">
+              <a:buNone/>
+              <a:defRPr sz="1400">
+                <a:solidFill>
+                  <a:schemeClr val="tx1">
+                    <a:tint val="75000"/>
+                  </a:schemeClr>
+                </a:solidFill>
+              </a:defRPr>
+            </a:lvl7pPr>
+            <a:lvl8pPr marL="3200400" indent="0">
+              <a:buNone/>
+              <a:defRPr sz="1400">
+                <a:solidFill>
+                  <a:schemeClr val="tx1">
+                    <a:tint val="75000"/>
+                  </a:schemeClr>
+                </a:solidFill>
+              </a:defRPr>
+            </a:lvl8pPr>
+            <a:lvl9pPr marL="3657600" indent="0">
+              <a:buNone/>
+              <a:defRPr sz="1400">
+                <a:solidFill>
+                  <a:schemeClr val="tx1">
+                    <a:tint val="75000"/>
+                  </a:schemeClr>
+                </a:solidFill>
+              </a:defRPr>
+            </a:lvl9pPr>
+          </a:lstStyle>
+          <a:p>
+            <a:pPr lvl="0"/>
+            <a:r>
+              <a:rPr lang="he-IL"/>
+              <a:t>לחץ כדי לערוך סגנונות טקסט של תבנית בסיס</a:t>
+            </a:r>
+          </a:p>
+        </p:txBody>
+      </p:sp>
+      <p:sp>
+        <p:nvSpPr>
+          <p:cNvPr id="3" name="Text Placeholder 2"/>
+          <p:cNvSpPr>
+            <a:spLocks noGrp="1"/>
+          </p:cNvSpPr>
+          <p:nvPr>
+            <p:ph type="body" idx="1"/>
+          </p:nvPr>
+        </p:nvSpPr>
+        <p:spPr>
+          <a:xfrm>
+            <a:off x="1295401" y="4529667"/>
+            <a:ext cx="9609668" cy="1346200"/>
+          </a:xfrm>
+        </p:spPr>
+        <p:txBody>
+          <a:bodyPr anchor="t">
+            <a:normAutofit/>
+          </a:bodyPr>
+          <a:lstStyle>
+            <a:lvl1pPr marL="0" indent="0" algn="l">
+              <a:buNone/>
+              <a:defRPr sz="1800">
+                <a:solidFill>
+                  <a:schemeClr val="tx1"/>
+                </a:solidFill>
+              </a:defRPr>
+            </a:lvl1pPr>
+            <a:lvl2pPr marL="457200" indent="0">
+              <a:buNone/>
+              <a:defRPr sz="1800">
+                <a:solidFill>
+                  <a:schemeClr val="tx1">
+                    <a:tint val="75000"/>
+                  </a:schemeClr>
+                </a:solidFill>
+              </a:defRPr>
+            </a:lvl2pPr>
+            <a:lvl3pPr marL="914400" indent="0">
+              <a:buNone/>
+              <a:defRPr sz="1600">
+                <a:solidFill>
+                  <a:schemeClr val="tx1">
+                    <a:tint val="75000"/>
+                  </a:schemeClr>
+                </a:solidFill>
+              </a:defRPr>
+            </a:lvl3pPr>
+            <a:lvl4pPr marL="1371600" indent="0">
+              <a:buNone/>
+              <a:defRPr sz="1400">
+                <a:solidFill>
+                  <a:schemeClr val="tx1">
+                    <a:tint val="75000"/>
+                  </a:schemeClr>
+                </a:solidFill>
+              </a:defRPr>
+            </a:lvl4pPr>
+            <a:lvl5pPr marL="1828800" indent="0">
+              <a:buNone/>
+              <a:defRPr sz="1400">
+                <a:solidFill>
+                  <a:schemeClr val="tx1">
+                    <a:tint val="75000"/>
+                  </a:schemeClr>
+                </a:solidFill>
+              </a:defRPr>
+            </a:lvl5pPr>
+            <a:lvl6pPr marL="2286000" indent="0">
+              <a:buNone/>
+              <a:defRPr sz="1400">
+                <a:solidFill>
+                  <a:schemeClr val="tx1">
+                    <a:tint val="75000"/>
+                  </a:schemeClr>
+                </a:solidFill>
+              </a:defRPr>
+            </a:lvl6pPr>
+            <a:lvl7pPr marL="2743200" indent="0">
+              <a:buNone/>
+              <a:defRPr sz="1400">
+                <a:solidFill>
+                  <a:schemeClr val="tx1">
+                    <a:tint val="75000"/>
+                  </a:schemeClr>
+                </a:solidFill>
+              </a:defRPr>
+            </a:lvl7pPr>
+            <a:lvl8pPr marL="3200400" indent="0">
+              <a:buNone/>
+              <a:defRPr sz="1400">
+                <a:solidFill>
+                  <a:schemeClr val="tx1">
+                    <a:tint val="75000"/>
+                  </a:schemeClr>
+                </a:solidFill>
+              </a:defRPr>
+            </a:lvl8pPr>
+            <a:lvl9pPr marL="3657600" indent="0">
+              <a:buNone/>
+              <a:defRPr sz="1400">
+                <a:solidFill>
+                  <a:schemeClr val="tx1">
+                    <a:tint val="75000"/>
+                  </a:schemeClr>
+                </a:solidFill>
+              </a:defRPr>
+            </a:lvl9pPr>
+          </a:lstStyle>
+          <a:p>
+            <a:pPr lvl="0"/>
+            <a:r>
+              <a:rPr lang="he-IL"/>
+              <a:t>לחץ כדי לערוך סגנונות טקסט של תבנית בסיס</a:t>
+            </a:r>
+          </a:p>
+        </p:txBody>
+      </p:sp>
+      <p:sp>
+        <p:nvSpPr>
+          <p:cNvPr id="4" name="Date Placeholder 3"/>
+          <p:cNvSpPr>
+            <a:spLocks noGrp="1"/>
+          </p:cNvSpPr>
+          <p:nvPr>
+            <p:ph type="dt" sz="half" idx="10"/>
+          </p:nvPr>
+        </p:nvSpPr>
+        <p:spPr/>
+        <p:txBody>
+          <a:bodyPr/>
+          <a:lstStyle/>
+          <a:p>
+            <a:fld id="{FF244A5C-CBE4-4F0F-A48D-FEE452A0549D}" type="datetimeFigureOut">
+              <a:rPr lang="he-IL" smtClean="0"/>
+              <a:t>י"ד/שבט/תשפ"ו</a:t>
+            </a:fld>
+            <a:endParaRPr lang="he-IL"/>
+          </a:p>
+        </p:txBody>
+      </p:sp>
+      <p:sp>
+        <p:nvSpPr>
+          <p:cNvPr id="5" name="Footer Placeholder 4"/>
+          <p:cNvSpPr>
+            <a:spLocks noGrp="1"/>
+          </p:cNvSpPr>
+          <p:nvPr>
+            <p:ph type="ftr" sz="quarter" idx="11"/>
+          </p:nvPr>
+        </p:nvSpPr>
+        <p:spPr/>
+        <p:txBody>
+          <a:bodyPr/>
+          <a:lstStyle/>
+          <a:p>
+            <a:endParaRPr lang="he-IL"/>
+          </a:p>
+        </p:txBody>
+      </p:sp>
+      <p:sp>
+        <p:nvSpPr>
+          <p:cNvPr id="6" name="Slide Number Placeholder 5"/>
+          <p:cNvSpPr>
+            <a:spLocks noGrp="1"/>
+          </p:cNvSpPr>
+          <p:nvPr>
+            <p:ph type="sldNum" sz="quarter" idx="12"/>
+          </p:nvPr>
+        </p:nvSpPr>
+        <p:spPr/>
+        <p:txBody>
+          <a:bodyPr/>
+          <a:lstStyle/>
+          <a:p>
+            <a:fld id="{81C96FA1-7971-41AC-B0F2-A8ADA31D3A87}" type="slidenum">
+              <a:rPr lang="he-IL" smtClean="0"/>
+              <a:t>‹#›</a:t>
+            </a:fld>
+            <a:endParaRPr lang="he-IL"/>
+          </a:p>
+        </p:txBody>
+      </p:sp>
+      <p:sp>
+        <p:nvSpPr>
+          <p:cNvPr id="12" name="TextBox 11"/>
+          <p:cNvSpPr txBox="1"/>
+          <p:nvPr/>
+        </p:nvSpPr>
+        <p:spPr>
+          <a:xfrm>
+            <a:off x="862013" y="879961"/>
+            <a:ext cx="609600" cy="584776"/>
+          </a:xfrm>
+          <a:prstGeom prst="rect">
+            <a:avLst/>
+          </a:prstGeom>
+        </p:spPr>
+        <p:txBody>
+          <a:bodyPr vert="horz" lIns="91440" tIns="45720" rIns="91440" bIns="45720" rtlCol="0" anchor="ctr">
+            <a:noAutofit/>
+          </a:bodyPr>
+          <a:lstStyle/>
+          <a:p>
+            <a:pPr lvl="0"/>
+            <a:r>
+              <a:rPr lang="en-US" sz="8000" dirty="0">
+                <a:solidFill>
+                  <a:schemeClr val="tx1"/>
+                </a:solidFill>
+                <a:effectLst/>
+              </a:rPr>
+              <a:t>“</a:t>
+            </a:r>
+          </a:p>
+        </p:txBody>
+      </p:sp>
+      <p:sp>
+        <p:nvSpPr>
+          <p:cNvPr id="13" name="TextBox 12"/>
+          <p:cNvSpPr txBox="1"/>
+          <p:nvPr/>
+        </p:nvSpPr>
+        <p:spPr>
+          <a:xfrm>
+            <a:off x="10600267" y="2599261"/>
+            <a:ext cx="609600" cy="584776"/>
+          </a:xfrm>
+          <a:prstGeom prst="rect">
+            <a:avLst/>
+          </a:prstGeom>
+        </p:spPr>
+        <p:txBody>
+          <a:bodyPr vert="horz" lIns="91440" tIns="45720" rIns="91440" bIns="45720" rtlCol="0" anchor="ctr">
+            <a:noAutofit/>
+          </a:bodyPr>
+          <a:lstStyle/>
+          <a:p>
+            <a:pPr lvl="0" algn="r"/>
+            <a:r>
+              <a:rPr lang="en-US" sz="8000" dirty="0">
+                <a:solidFill>
+                  <a:schemeClr val="tx1"/>
+                </a:solidFill>
+                <a:effectLst/>
+              </a:rPr>
+              <a:t>”</a:t>
+            </a:r>
+          </a:p>
+        </p:txBody>
+      </p:sp>
+      <p:cxnSp>
+        <p:nvCxnSpPr>
+          <p:cNvPr id="26" name="Straight Connector 25"/>
+          <p:cNvCxnSpPr/>
+          <p:nvPr/>
+        </p:nvCxnSpPr>
+        <p:spPr>
+          <a:xfrm>
+            <a:off x="1396169" y="3429000"/>
+            <a:ext cx="9407298" cy="0"/>
+          </a:xfrm>
+          <a:prstGeom prst="line">
+            <a:avLst/>
+          </a:prstGeom>
+          <a:ln w="15875"/>
+        </p:spPr>
+        <p:style>
+          <a:lnRef idx="2">
+            <a:schemeClr val="accent1"/>
+          </a:lnRef>
+          <a:fillRef idx="0">
+            <a:schemeClr val="accent1"/>
+          </a:fillRef>
+          <a:effectRef idx="1">
+            <a:schemeClr val="accent1"/>
+          </a:effectRef>
+          <a:fontRef idx="minor">
+            <a:schemeClr val="tx1"/>
+          </a:fontRef>
+        </p:style>
+      </p:cxnSp>
+    </p:spTree>
+    <p:extLst>
+      <p:ext uri="{BB962C8B-B14F-4D97-AF65-F5344CB8AC3E}">
+        <p14:creationId xmlns:p14="http://schemas.microsoft.com/office/powerpoint/2010/main" val="2446789834"/>
+      </p:ext>
+    </p:extLst>
+  </p:cSld>
+  <p:clrMapOvr>
+    <a:masterClrMapping/>
+  </p:clrMapOvr>
+</p:sldLayout>
+</file>
+
+<file path=ppt/slideLayouts/slideLayout15.xml><?xml version="1.0" encoding="utf-8"?>
+<p:sldLayout xmlns:a="http://schemas.openxmlformats.org/drawingml/2006/main" xmlns:r="http://schemas.openxmlformats.org/officeDocument/2006/relationships" xmlns:p="http://schemas.openxmlformats.org/presentationml/2006/main" preserve="1">
+  <p:cSld name="נכון או לא נכון">
+    <p:spTree>
+      <p:nvGrpSpPr>
+        <p:cNvPr id="1" name=""/>
+        <p:cNvGrpSpPr/>
+        <p:nvPr/>
+      </p:nvGrpSpPr>
+      <p:grpSpPr>
+        <a:xfrm>
+          <a:off x="0" y="0"/>
+          <a:ext cx="0" cy="0"/>
+          <a:chOff x="0" y="0"/>
+          <a:chExt cx="0" cy="0"/>
+        </a:xfrm>
+      </p:grpSpPr>
+      <p:sp>
+        <p:nvSpPr>
+          <p:cNvPr id="2" name="Title 1"/>
+          <p:cNvSpPr>
+            <a:spLocks noGrp="1"/>
+          </p:cNvSpPr>
+          <p:nvPr>
+            <p:ph type="title"/>
+          </p:nvPr>
+        </p:nvSpPr>
+        <p:spPr>
+          <a:xfrm>
+            <a:off x="1295401" y="982132"/>
+            <a:ext cx="9609666" cy="2243668"/>
+          </a:xfrm>
+        </p:spPr>
+        <p:txBody>
+          <a:bodyPr vert="horz" lIns="91440" tIns="45720" rIns="91440" bIns="45720" rtlCol="0" anchor="ctr">
+            <a:normAutofit/>
+          </a:bodyPr>
+          <a:lstStyle>
+            <a:lvl1pPr>
+              <a:defRPr lang="en-US" b="0" dirty="0"/>
+            </a:lvl1pPr>
+          </a:lstStyle>
+          <a:p>
+            <a:pPr marL="0" lvl="0"/>
+            <a:r>
+              <a:rPr lang="he-IL"/>
+              <a:t>לחץ כדי לערוך סגנון כותרת של תבנית בסיס</a:t>
+            </a:r>
+            <a:endParaRPr lang="en-US" dirty="0"/>
+          </a:p>
+        </p:txBody>
+      </p:sp>
+      <p:sp>
+        <p:nvSpPr>
+          <p:cNvPr id="20" name="Text Placeholder 2"/>
+          <p:cNvSpPr>
+            <a:spLocks noGrp="1"/>
+          </p:cNvSpPr>
+          <p:nvPr>
+            <p:ph type="body" idx="13"/>
+          </p:nvPr>
+        </p:nvSpPr>
+        <p:spPr>
+          <a:xfrm>
+            <a:off x="1295401" y="3630168"/>
+            <a:ext cx="9609668" cy="841248"/>
+          </a:xfrm>
+        </p:spPr>
+        <p:txBody>
+          <a:bodyPr anchor="b">
+            <a:normAutofit/>
+          </a:bodyPr>
+          <a:lstStyle>
+            <a:lvl1pPr marL="0" indent="0" algn="l">
+              <a:spcBef>
+                <a:spcPts val="0"/>
+              </a:spcBef>
+              <a:buNone/>
+              <a:defRPr sz="2800">
+                <a:solidFill>
+                  <a:schemeClr val="tx1"/>
+                </a:solidFill>
+              </a:defRPr>
+            </a:lvl1pPr>
+            <a:lvl2pPr marL="457200" indent="0">
+              <a:buNone/>
+              <a:defRPr sz="1800">
+                <a:solidFill>
+                  <a:schemeClr val="tx1">
+                    <a:tint val="75000"/>
+                  </a:schemeClr>
+                </a:solidFill>
+              </a:defRPr>
+            </a:lvl2pPr>
+            <a:lvl3pPr marL="914400" indent="0">
+              <a:buNone/>
+              <a:defRPr sz="1600">
+                <a:solidFill>
+                  <a:schemeClr val="tx1">
+                    <a:tint val="75000"/>
+                  </a:schemeClr>
+                </a:solidFill>
+              </a:defRPr>
+            </a:lvl3pPr>
+            <a:lvl4pPr marL="1371600" indent="0">
+              <a:buNone/>
+              <a:defRPr sz="1400">
+                <a:solidFill>
+                  <a:schemeClr val="tx1">
+                    <a:tint val="75000"/>
+                  </a:schemeClr>
+                </a:solidFill>
+              </a:defRPr>
+            </a:lvl4pPr>
+            <a:lvl5pPr marL="1828800" indent="0">
+              <a:buNone/>
+              <a:defRPr sz="1400">
+                <a:solidFill>
+                  <a:schemeClr val="tx1">
+                    <a:tint val="75000"/>
+                  </a:schemeClr>
+                </a:solidFill>
+              </a:defRPr>
+            </a:lvl5pPr>
+            <a:lvl6pPr marL="2286000" indent="0">
+              <a:buNone/>
+              <a:defRPr sz="1400">
+                <a:solidFill>
+                  <a:schemeClr val="tx1">
+                    <a:tint val="75000"/>
+                  </a:schemeClr>
+                </a:solidFill>
+              </a:defRPr>
+            </a:lvl6pPr>
+            <a:lvl7pPr marL="2743200" indent="0">
+              <a:buNone/>
+              <a:defRPr sz="1400">
+                <a:solidFill>
+                  <a:schemeClr val="tx1">
+                    <a:tint val="75000"/>
+                  </a:schemeClr>
+                </a:solidFill>
+              </a:defRPr>
+            </a:lvl7pPr>
+            <a:lvl8pPr marL="3200400" indent="0">
+              <a:buNone/>
+              <a:defRPr sz="1400">
+                <a:solidFill>
+                  <a:schemeClr val="tx1">
+                    <a:tint val="75000"/>
+                  </a:schemeClr>
+                </a:solidFill>
+              </a:defRPr>
+            </a:lvl8pPr>
+            <a:lvl9pPr marL="3657600" indent="0">
+              <a:buNone/>
+              <a:defRPr sz="1400">
+                <a:solidFill>
+                  <a:schemeClr val="tx1">
+                    <a:tint val="75000"/>
+                  </a:schemeClr>
+                </a:solidFill>
+              </a:defRPr>
+            </a:lvl9pPr>
+          </a:lstStyle>
+          <a:p>
+            <a:pPr lvl="0"/>
+            <a:r>
+              <a:rPr lang="he-IL"/>
+              <a:t>לחץ כדי לערוך סגנונות טקסט של תבנית בסיס</a:t>
+            </a:r>
+          </a:p>
+        </p:txBody>
+      </p:sp>
+      <p:sp>
+        <p:nvSpPr>
+          <p:cNvPr id="3" name="Text Placeholder 2"/>
+          <p:cNvSpPr>
+            <a:spLocks noGrp="1"/>
+          </p:cNvSpPr>
+          <p:nvPr>
+            <p:ph type="body" idx="1"/>
+          </p:nvPr>
+        </p:nvSpPr>
+        <p:spPr>
+          <a:xfrm>
+            <a:off x="1295400" y="4470399"/>
+            <a:ext cx="9609670" cy="1405467"/>
+          </a:xfrm>
+        </p:spPr>
+        <p:txBody>
+          <a:bodyPr anchor="t">
+            <a:normAutofit/>
+          </a:bodyPr>
+          <a:lstStyle>
+            <a:lvl1pPr marL="0" indent="0" algn="l">
+              <a:buNone/>
+              <a:defRPr sz="1800">
+                <a:solidFill>
+                  <a:schemeClr val="tx1"/>
+                </a:solidFill>
+              </a:defRPr>
+            </a:lvl1pPr>
+            <a:lvl2pPr marL="457200" indent="0">
+              <a:buNone/>
+              <a:defRPr sz="1800">
+                <a:solidFill>
+                  <a:schemeClr val="tx1">
+                    <a:tint val="75000"/>
+                  </a:schemeClr>
+                </a:solidFill>
+              </a:defRPr>
+            </a:lvl2pPr>
+            <a:lvl3pPr marL="914400" indent="0">
+              <a:buNone/>
+              <a:defRPr sz="1600">
+                <a:solidFill>
+                  <a:schemeClr val="tx1">
+                    <a:tint val="75000"/>
+                  </a:schemeClr>
+                </a:solidFill>
+              </a:defRPr>
+            </a:lvl3pPr>
+            <a:lvl4pPr marL="1371600" indent="0">
+              <a:buNone/>
+              <a:defRPr sz="1400">
+                <a:solidFill>
+                  <a:schemeClr val="tx1">
+                    <a:tint val="75000"/>
+                  </a:schemeClr>
+                </a:solidFill>
+              </a:defRPr>
+            </a:lvl4pPr>
+            <a:lvl5pPr marL="1828800" indent="0">
+              <a:buNone/>
+              <a:defRPr sz="1400">
+                <a:solidFill>
+                  <a:schemeClr val="tx1">
+                    <a:tint val="75000"/>
+                  </a:schemeClr>
+                </a:solidFill>
+              </a:defRPr>
+            </a:lvl5pPr>
+            <a:lvl6pPr marL="2286000" indent="0">
+              <a:buNone/>
+              <a:defRPr sz="1400">
+                <a:solidFill>
+                  <a:schemeClr val="tx1">
+                    <a:tint val="75000"/>
+                  </a:schemeClr>
+                </a:solidFill>
+              </a:defRPr>
+            </a:lvl6pPr>
+            <a:lvl7pPr marL="2743200" indent="0">
+              <a:buNone/>
+              <a:defRPr sz="1400">
+                <a:solidFill>
+                  <a:schemeClr val="tx1">
+                    <a:tint val="75000"/>
+                  </a:schemeClr>
+                </a:solidFill>
+              </a:defRPr>
+            </a:lvl7pPr>
+            <a:lvl8pPr marL="3200400" indent="0">
+              <a:buNone/>
+              <a:defRPr sz="1400">
+                <a:solidFill>
+                  <a:schemeClr val="tx1">
+                    <a:tint val="75000"/>
+                  </a:schemeClr>
+                </a:solidFill>
+              </a:defRPr>
+            </a:lvl8pPr>
+            <a:lvl9pPr marL="3657600" indent="0">
+              <a:buNone/>
+              <a:defRPr sz="1400">
+                <a:solidFill>
+                  <a:schemeClr val="tx1">
+                    <a:tint val="75000"/>
+                  </a:schemeClr>
+                </a:solidFill>
+              </a:defRPr>
+            </a:lvl9pPr>
+          </a:lstStyle>
+          <a:p>
+            <a:pPr lvl="0"/>
+            <a:r>
+              <a:rPr lang="he-IL"/>
+              <a:t>לחץ כדי לערוך סגנונות טקסט של תבנית בסיס</a:t>
+            </a:r>
+          </a:p>
+        </p:txBody>
+      </p:sp>
+      <p:sp>
+        <p:nvSpPr>
+          <p:cNvPr id="4" name="Date Placeholder 3"/>
+          <p:cNvSpPr>
+            <a:spLocks noGrp="1"/>
+          </p:cNvSpPr>
+          <p:nvPr>
+            <p:ph type="dt" sz="half" idx="10"/>
+          </p:nvPr>
+        </p:nvSpPr>
+        <p:spPr/>
+        <p:txBody>
+          <a:bodyPr/>
+          <a:lstStyle/>
+          <a:p>
+            <a:fld id="{FF244A5C-CBE4-4F0F-A48D-FEE452A0549D}" type="datetimeFigureOut">
+              <a:rPr lang="he-IL" smtClean="0"/>
+              <a:t>י"ד/שבט/תשפ"ו</a:t>
+            </a:fld>
+            <a:endParaRPr lang="he-IL"/>
+          </a:p>
+        </p:txBody>
+      </p:sp>
+      <p:sp>
+        <p:nvSpPr>
+          <p:cNvPr id="5" name="Footer Placeholder 4"/>
+          <p:cNvSpPr>
+            <a:spLocks noGrp="1"/>
+          </p:cNvSpPr>
+          <p:nvPr>
+            <p:ph type="ftr" sz="quarter" idx="11"/>
+          </p:nvPr>
+        </p:nvSpPr>
+        <p:spPr/>
+        <p:txBody>
+          <a:bodyPr/>
+          <a:lstStyle/>
+          <a:p>
+            <a:endParaRPr lang="he-IL"/>
+          </a:p>
+        </p:txBody>
+      </p:sp>
+      <p:sp>
+        <p:nvSpPr>
+          <p:cNvPr id="6" name="Slide Number Placeholder 5"/>
+          <p:cNvSpPr>
+            <a:spLocks noGrp="1"/>
+          </p:cNvSpPr>
+          <p:nvPr>
+            <p:ph type="sldNum" sz="quarter" idx="12"/>
+          </p:nvPr>
+        </p:nvSpPr>
+        <p:spPr/>
+        <p:txBody>
+          <a:bodyPr/>
+          <a:lstStyle/>
+          <a:p>
+            <a:fld id="{81C96FA1-7971-41AC-B0F2-A8ADA31D3A87}" type="slidenum">
+              <a:rPr lang="he-IL" smtClean="0"/>
+              <a:t>‹#›</a:t>
+            </a:fld>
+            <a:endParaRPr lang="he-IL"/>
+          </a:p>
+        </p:txBody>
+      </p:sp>
+      <p:cxnSp>
+        <p:nvCxnSpPr>
+          <p:cNvPr id="15" name="Straight Connector 14"/>
+          <p:cNvCxnSpPr/>
+          <p:nvPr/>
+        </p:nvCxnSpPr>
+        <p:spPr>
+          <a:xfrm>
+            <a:off x="1396169" y="3429000"/>
+            <a:ext cx="9407298" cy="0"/>
+          </a:xfrm>
+          <a:prstGeom prst="line">
+            <a:avLst/>
+          </a:prstGeom>
+          <a:ln w="15875"/>
+        </p:spPr>
+        <p:style>
+          <a:lnRef idx="2">
+            <a:schemeClr val="accent1"/>
+          </a:lnRef>
+          <a:fillRef idx="0">
+            <a:schemeClr val="accent1"/>
+          </a:fillRef>
+          <a:effectRef idx="1">
+            <a:schemeClr val="accent1"/>
+          </a:effectRef>
+          <a:fontRef idx="minor">
+            <a:schemeClr val="tx1"/>
+          </a:fontRef>
+        </p:style>
+      </p:cxnSp>
+    </p:spTree>
+    <p:extLst>
+      <p:ext uri="{BB962C8B-B14F-4D97-AF65-F5344CB8AC3E}">
+        <p14:creationId xmlns:p14="http://schemas.microsoft.com/office/powerpoint/2010/main" val="2069103209"/>
+      </p:ext>
+    </p:extLst>
+  </p:cSld>
+  <p:clrMapOvr>
+    <a:masterClrMapping/>
+  </p:clrMapOvr>
+</p:sldLayout>
+</file>
+
+<file path=ppt/slideLayouts/slideLayout16.xml><?xml version="1.0" encoding="utf-8"?>
 <p:sldLayout xmlns:a="http://schemas.openxmlformats.org/drawingml/2006/main" xmlns:r="http://schemas.openxmlformats.org/officeDocument/2006/relationships" xmlns:p="http://schemas.openxmlformats.org/presentationml/2006/main" type="vertTx" preserve="1">
   <p:cSld name="כותרת וטקסט אנכי">
     <p:spTree>
@@ -346,13 +2660,7 @@
       </p:grpSpPr>
       <p:sp>
         <p:nvSpPr>
-          <p:cNvPr id="2" name="כותרת 1">
-            <a:extLst>
-              <a:ext uri="{FF2B5EF4-FFF2-40B4-BE49-F238E27FC236}">
-                <a16:creationId xmlns:a16="http://schemas.microsoft.com/office/drawing/2014/main" id="{4C366409-689D-4E63-BBB7-9AE0C6422948}"/>
-              </a:ext>
-            </a:extLst>
-          </p:cNvPr>
+          <p:cNvPr id="2" name="Title 1"/>
           <p:cNvSpPr>
             <a:spLocks noGrp="1"/>
           </p:cNvSpPr>
@@ -363,24 +2671,23 @@
         <p:spPr/>
         <p:txBody>
           <a:bodyPr/>
-          <a:lstStyle/>
+          <a:lstStyle>
+            <a:lvl1pPr algn="ctr">
+              <a:defRPr/>
+            </a:lvl1pPr>
+          </a:lstStyle>
           <a:p>
             <a:r>
               <a:rPr lang="he-IL"/>
               <a:t>לחץ כדי לערוך סגנון כותרת של תבנית בסיס</a:t>
             </a:r>
-          </a:p>
-        </p:txBody>
-      </p:sp>
-      <p:sp>
-        <p:nvSpPr>
-          <p:cNvPr id="3" name="מציין מיקום של טקסט אנכי 2">
-            <a:extLst>
-              <a:ext uri="{FF2B5EF4-FFF2-40B4-BE49-F238E27FC236}">
-                <a16:creationId xmlns:a16="http://schemas.microsoft.com/office/drawing/2014/main" id="{51729955-AE43-4455-BCB4-1B8027D44968}"/>
-              </a:ext>
-            </a:extLst>
-          </p:cNvPr>
+            <a:endParaRPr lang="en-US" dirty="0"/>
+          </a:p>
+        </p:txBody>
+      </p:sp>
+      <p:sp>
+        <p:nvSpPr>
+          <p:cNvPr id="3" name="Vertical Text Placeholder 2"/>
           <p:cNvSpPr>
             <a:spLocks noGrp="1"/>
           </p:cNvSpPr>
@@ -390,7 +2697,7 @@
         </p:nvSpPr>
         <p:spPr/>
         <p:txBody>
-          <a:bodyPr vert="eaVert"/>
+          <a:bodyPr vert="eaVert" anchor="t"/>
           <a:lstStyle/>
           <a:p>
             <a:pPr lvl="0"/>
@@ -426,18 +2733,13 @@
               <a:rPr lang="he-IL"/>
               <a:t>רמה חמישית</a:t>
             </a:r>
-          </a:p>
-        </p:txBody>
-      </p:sp>
-      <p:sp>
-        <p:nvSpPr>
-          <p:cNvPr id="4" name="מציין מיקום של תאריך 3">
-            <a:extLst>
-              <a:ext uri="{FF2B5EF4-FFF2-40B4-BE49-F238E27FC236}">
-                <a16:creationId xmlns:a16="http://schemas.microsoft.com/office/drawing/2014/main" id="{EFB683B4-62FB-4D0E-BBB5-7479CE9FA4A0}"/>
-              </a:ext>
-            </a:extLst>
-          </p:cNvPr>
+            <a:endParaRPr lang="en-US" dirty="0"/>
+          </a:p>
+        </p:txBody>
+      </p:sp>
+      <p:sp>
+        <p:nvSpPr>
+          <p:cNvPr id="4" name="Date Placeholder 3"/>
           <p:cNvSpPr>
             <a:spLocks noGrp="1"/>
           </p:cNvSpPr>
@@ -452,7 +2754,7 @@
           <a:p>
             <a:fld id="{FF244A5C-CBE4-4F0F-A48D-FEE452A0549D}" type="datetimeFigureOut">
               <a:rPr lang="he-IL" smtClean="0"/>
-              <a:t>י'/שבט/תשפ"ו</a:t>
+              <a:t>י"ד/שבט/תשפ"ו</a:t>
             </a:fld>
             <a:endParaRPr lang="he-IL"/>
           </a:p>
@@ -460,13 +2762,7 @@
       </p:sp>
       <p:sp>
         <p:nvSpPr>
-          <p:cNvPr id="5" name="מציין מיקום של כותרת תחתונה 4">
-            <a:extLst>
-              <a:ext uri="{FF2B5EF4-FFF2-40B4-BE49-F238E27FC236}">
-                <a16:creationId xmlns:a16="http://schemas.microsoft.com/office/drawing/2014/main" id="{D1EFF79A-448D-4BB5-84B8-3EA7C8F64C65}"/>
-              </a:ext>
-            </a:extLst>
-          </p:cNvPr>
+          <p:cNvPr id="5" name="Footer Placeholder 4"/>
           <p:cNvSpPr>
             <a:spLocks noGrp="1"/>
           </p:cNvSpPr>
@@ -485,13 +2781,7 @@
       </p:sp>
       <p:sp>
         <p:nvSpPr>
-          <p:cNvPr id="6" name="מציין מיקום של מספר שקופית 5">
-            <a:extLst>
-              <a:ext uri="{FF2B5EF4-FFF2-40B4-BE49-F238E27FC236}">
-                <a16:creationId xmlns:a16="http://schemas.microsoft.com/office/drawing/2014/main" id="{695DD3FC-5B97-42B6-9AE6-AC1459736077}"/>
-              </a:ext>
-            </a:extLst>
-          </p:cNvPr>
+          <p:cNvPr id="6" name="Slide Number Placeholder 5"/>
           <p:cNvSpPr>
             <a:spLocks noGrp="1"/>
           </p:cNvSpPr>
@@ -512,10 +2802,41 @@
           </a:p>
         </p:txBody>
       </p:sp>
+      <p:cxnSp>
+        <p:nvCxnSpPr>
+          <p:cNvPr id="14" name="Straight Connector 13"/>
+          <p:cNvCxnSpPr/>
+          <p:nvPr/>
+        </p:nvCxnSpPr>
+        <p:spPr>
+          <a:xfrm>
+            <a:off x="1396169" y="2421466"/>
+            <a:ext cx="9407298" cy="0"/>
+          </a:xfrm>
+          <a:prstGeom prst="line">
+            <a:avLst/>
+          </a:prstGeom>
+          <a:ln w="15875"/>
+        </p:spPr>
+        <p:style>
+          <a:lnRef idx="2">
+            <a:schemeClr val="accent1"/>
+          </a:lnRef>
+          <a:fillRef idx="0">
+            <a:schemeClr val="accent1"/>
+          </a:fillRef>
+          <a:effectRef idx="1">
+            <a:schemeClr val="accent1"/>
+          </a:effectRef>
+          <a:fontRef idx="minor">
+            <a:schemeClr val="tx1"/>
+          </a:fontRef>
+        </p:style>
+      </p:cxnSp>
     </p:spTree>
     <p:extLst>
       <p:ext uri="{BB962C8B-B14F-4D97-AF65-F5344CB8AC3E}">
-        <p14:creationId xmlns:p14="http://schemas.microsoft.com/office/powerpoint/2010/main" val="1832917983"/>
+        <p14:creationId xmlns:p14="http://schemas.microsoft.com/office/powerpoint/2010/main" val="3765164452"/>
       </p:ext>
     </p:extLst>
   </p:cSld>
@@ -525,7 +2846,7 @@
 </p:sldLayout>
 </file>
 
-<file path=ppt/slideLayouts/slideLayout11.xml><?xml version="1.0" encoding="utf-8"?>
+<file path=ppt/slideLayouts/slideLayout17.xml><?xml version="1.0" encoding="utf-8"?>
 <p:sldLayout xmlns:a="http://schemas.openxmlformats.org/drawingml/2006/main" xmlns:r="http://schemas.openxmlformats.org/officeDocument/2006/relationships" xmlns:p="http://schemas.openxmlformats.org/presentationml/2006/main" type="vertTitleAndTx" preserve="1">
   <p:cSld name="כותרת אנכית וטקסט">
     <p:spTree>
@@ -544,13 +2865,7 @@
       </p:grpSpPr>
       <p:sp>
         <p:nvSpPr>
-          <p:cNvPr id="2" name="כותרת אנכית 1">
-            <a:extLst>
-              <a:ext uri="{FF2B5EF4-FFF2-40B4-BE49-F238E27FC236}">
-                <a16:creationId xmlns:a16="http://schemas.microsoft.com/office/drawing/2014/main" id="{69381411-4D22-4880-8930-BC8DAD328E42}"/>
-              </a:ext>
-            </a:extLst>
-          </p:cNvPr>
+          <p:cNvPr id="2" name="Vertical Title 1"/>
           <p:cNvSpPr>
             <a:spLocks noGrp="1"/>
           </p:cNvSpPr>
@@ -560,8 +2875,8 @@
         </p:nvSpPr>
         <p:spPr>
           <a:xfrm>
-            <a:off x="8724900" y="365125"/>
-            <a:ext cx="2628900" cy="5811838"/>
+            <a:off x="8999356" y="982131"/>
+            <a:ext cx="1890895" cy="4893735"/>
           </a:xfrm>
         </p:spPr>
         <p:txBody>
@@ -572,18 +2887,13 @@
               <a:rPr lang="he-IL"/>
               <a:t>לחץ כדי לערוך סגנון כותרת של תבנית בסיס</a:t>
             </a:r>
-          </a:p>
-        </p:txBody>
-      </p:sp>
-      <p:sp>
-        <p:nvSpPr>
-          <p:cNvPr id="3" name="מציין מיקום של טקסט אנכי 2">
-            <a:extLst>
-              <a:ext uri="{FF2B5EF4-FFF2-40B4-BE49-F238E27FC236}">
-                <a16:creationId xmlns:a16="http://schemas.microsoft.com/office/drawing/2014/main" id="{F0E5B6E6-3FED-4412-89FF-E6CB1D0EAE80}"/>
-              </a:ext>
-            </a:extLst>
-          </p:cNvPr>
+            <a:endParaRPr lang="en-US" dirty="0"/>
+          </a:p>
+        </p:txBody>
+      </p:sp>
+      <p:sp>
+        <p:nvSpPr>
+          <p:cNvPr id="3" name="Vertical Text Placeholder 2"/>
           <p:cNvSpPr>
             <a:spLocks noGrp="1"/>
           </p:cNvSpPr>
@@ -593,12 +2903,12 @@
         </p:nvSpPr>
         <p:spPr>
           <a:xfrm>
-            <a:off x="838200" y="365125"/>
-            <a:ext cx="7734300" cy="5811838"/>
+            <a:off x="1295398" y="982132"/>
+            <a:ext cx="7433025" cy="4893734"/>
           </a:xfrm>
         </p:spPr>
         <p:txBody>
-          <a:bodyPr vert="eaVert"/>
+          <a:bodyPr vert="eaVert" anchor="t"/>
           <a:lstStyle/>
           <a:p>
             <a:pPr lvl="0"/>
@@ -634,18 +2944,13 @@
               <a:rPr lang="he-IL"/>
               <a:t>רמה חמישית</a:t>
             </a:r>
-          </a:p>
-        </p:txBody>
-      </p:sp>
-      <p:sp>
-        <p:nvSpPr>
-          <p:cNvPr id="4" name="מציין מיקום של תאריך 3">
-            <a:extLst>
-              <a:ext uri="{FF2B5EF4-FFF2-40B4-BE49-F238E27FC236}">
-                <a16:creationId xmlns:a16="http://schemas.microsoft.com/office/drawing/2014/main" id="{4C55D162-8CE1-4D1C-96B4-1A5D674F883F}"/>
-              </a:ext>
-            </a:extLst>
-          </p:cNvPr>
+            <a:endParaRPr lang="en-US" dirty="0"/>
+          </a:p>
+        </p:txBody>
+      </p:sp>
+      <p:sp>
+        <p:nvSpPr>
+          <p:cNvPr id="4" name="Date Placeholder 3"/>
           <p:cNvSpPr>
             <a:spLocks noGrp="1"/>
           </p:cNvSpPr>
@@ -660,7 +2965,7 @@
           <a:p>
             <a:fld id="{FF244A5C-CBE4-4F0F-A48D-FEE452A0549D}" type="datetimeFigureOut">
               <a:rPr lang="he-IL" smtClean="0"/>
-              <a:t>י'/שבט/תשפ"ו</a:t>
+              <a:t>י"ד/שבט/תשפ"ו</a:t>
             </a:fld>
             <a:endParaRPr lang="he-IL"/>
           </a:p>
@@ -668,13 +2973,7 @@
       </p:sp>
       <p:sp>
         <p:nvSpPr>
-          <p:cNvPr id="5" name="מציין מיקום של כותרת תחתונה 4">
-            <a:extLst>
-              <a:ext uri="{FF2B5EF4-FFF2-40B4-BE49-F238E27FC236}">
-                <a16:creationId xmlns:a16="http://schemas.microsoft.com/office/drawing/2014/main" id="{40869EDA-937D-470B-B018-400A7C116FD4}"/>
-              </a:ext>
-            </a:extLst>
-          </p:cNvPr>
+          <p:cNvPr id="5" name="Footer Placeholder 4"/>
           <p:cNvSpPr>
             <a:spLocks noGrp="1"/>
           </p:cNvSpPr>
@@ -693,13 +2992,7 @@
       </p:sp>
       <p:sp>
         <p:nvSpPr>
-          <p:cNvPr id="6" name="מציין מיקום של מספר שקופית 5">
-            <a:extLst>
-              <a:ext uri="{FF2B5EF4-FFF2-40B4-BE49-F238E27FC236}">
-                <a16:creationId xmlns:a16="http://schemas.microsoft.com/office/drawing/2014/main" id="{5A1F2F10-F8BD-42C6-9C62-B59A5AACBC67}"/>
-              </a:ext>
-            </a:extLst>
-          </p:cNvPr>
+          <p:cNvPr id="6" name="Slide Number Placeholder 5"/>
           <p:cNvSpPr>
             <a:spLocks noGrp="1"/>
           </p:cNvSpPr>
@@ -720,10 +3013,41 @@
           </a:p>
         </p:txBody>
       </p:sp>
+      <p:cxnSp>
+        <p:nvCxnSpPr>
+          <p:cNvPr id="14" name="Straight Connector 13"/>
+          <p:cNvCxnSpPr/>
+          <p:nvPr/>
+        </p:nvCxnSpPr>
+        <p:spPr>
+          <a:xfrm>
+            <a:off x="8863890" y="990600"/>
+            <a:ext cx="0" cy="4876800"/>
+          </a:xfrm>
+          <a:prstGeom prst="line">
+            <a:avLst/>
+          </a:prstGeom>
+          <a:ln w="15875"/>
+        </p:spPr>
+        <p:style>
+          <a:lnRef idx="2">
+            <a:schemeClr val="accent1"/>
+          </a:lnRef>
+          <a:fillRef idx="0">
+            <a:schemeClr val="accent1"/>
+          </a:fillRef>
+          <a:effectRef idx="1">
+            <a:schemeClr val="accent1"/>
+          </a:effectRef>
+          <a:fontRef idx="minor">
+            <a:schemeClr val="tx1"/>
+          </a:fontRef>
+        </p:style>
+      </p:cxnSp>
     </p:spTree>
     <p:extLst>
       <p:ext uri="{BB962C8B-B14F-4D97-AF65-F5344CB8AC3E}">
-        <p14:creationId xmlns:p14="http://schemas.microsoft.com/office/powerpoint/2010/main" val="220449700"/>
+        <p14:creationId xmlns:p14="http://schemas.microsoft.com/office/powerpoint/2010/main" val="337940588"/>
       </p:ext>
     </p:extLst>
   </p:cSld>
@@ -750,15 +3074,40 @@
           <a:chExt cx="0" cy="0"/>
         </a:xfrm>
       </p:grpSpPr>
-      <p:sp>
-        <p:nvSpPr>
-          <p:cNvPr id="2" name="כותרת 1">
-            <a:extLst>
-              <a:ext uri="{FF2B5EF4-FFF2-40B4-BE49-F238E27FC236}">
-                <a16:creationId xmlns:a16="http://schemas.microsoft.com/office/drawing/2014/main" id="{15AFEFD0-577D-494D-9D10-04F4FDE6EEDE}"/>
-              </a:ext>
-            </a:extLst>
-          </p:cNvPr>
+      <p:cxnSp>
+        <p:nvCxnSpPr>
+          <p:cNvPr id="7" name="Straight Connector 6"/>
+          <p:cNvCxnSpPr/>
+          <p:nvPr/>
+        </p:nvCxnSpPr>
+        <p:spPr>
+          <a:xfrm>
+            <a:off x="1396169" y="2421466"/>
+            <a:ext cx="9407298" cy="0"/>
+          </a:xfrm>
+          <a:prstGeom prst="line">
+            <a:avLst/>
+          </a:prstGeom>
+          <a:ln w="15875"/>
+        </p:spPr>
+        <p:style>
+          <a:lnRef idx="2">
+            <a:schemeClr val="accent1"/>
+          </a:lnRef>
+          <a:fillRef idx="0">
+            <a:schemeClr val="accent1"/>
+          </a:fillRef>
+          <a:effectRef idx="1">
+            <a:schemeClr val="accent1"/>
+          </a:effectRef>
+          <a:fontRef idx="minor">
+            <a:schemeClr val="tx1"/>
+          </a:fontRef>
+        </p:style>
+      </p:cxnSp>
+      <p:sp>
+        <p:nvSpPr>
+          <p:cNvPr id="2" name="Title 1"/>
           <p:cNvSpPr>
             <a:spLocks noGrp="1"/>
           </p:cNvSpPr>
@@ -775,18 +3124,13 @@
               <a:rPr lang="he-IL"/>
               <a:t>לחץ כדי לערוך סגנון כותרת של תבנית בסיס</a:t>
             </a:r>
-          </a:p>
-        </p:txBody>
-      </p:sp>
-      <p:sp>
-        <p:nvSpPr>
-          <p:cNvPr id="3" name="מציין מיקום תוכן 2">
-            <a:extLst>
-              <a:ext uri="{FF2B5EF4-FFF2-40B4-BE49-F238E27FC236}">
-                <a16:creationId xmlns:a16="http://schemas.microsoft.com/office/drawing/2014/main" id="{B24A535B-F7CA-4B58-B4EE-D3D11980BA08}"/>
-              </a:ext>
-            </a:extLst>
-          </p:cNvPr>
+            <a:endParaRPr lang="en-US" dirty="0"/>
+          </a:p>
+        </p:txBody>
+      </p:sp>
+      <p:sp>
+        <p:nvSpPr>
+          <p:cNvPr id="3" name="Content Placeholder 2"/>
           <p:cNvSpPr>
             <a:spLocks noGrp="1"/>
           </p:cNvSpPr>
@@ -832,18 +3176,13 @@
               <a:rPr lang="he-IL"/>
               <a:t>רמה חמישית</a:t>
             </a:r>
-          </a:p>
-        </p:txBody>
-      </p:sp>
-      <p:sp>
-        <p:nvSpPr>
-          <p:cNvPr id="4" name="מציין מיקום של תאריך 3">
-            <a:extLst>
-              <a:ext uri="{FF2B5EF4-FFF2-40B4-BE49-F238E27FC236}">
-                <a16:creationId xmlns:a16="http://schemas.microsoft.com/office/drawing/2014/main" id="{F05F57D4-93B8-41D8-B76E-482900D58073}"/>
-              </a:ext>
-            </a:extLst>
-          </p:cNvPr>
+            <a:endParaRPr lang="en-US" dirty="0"/>
+          </a:p>
+        </p:txBody>
+      </p:sp>
+      <p:sp>
+        <p:nvSpPr>
+          <p:cNvPr id="4" name="Date Placeholder 3"/>
           <p:cNvSpPr>
             <a:spLocks noGrp="1"/>
           </p:cNvSpPr>
@@ -858,7 +3197,7 @@
           <a:p>
             <a:fld id="{FF244A5C-CBE4-4F0F-A48D-FEE452A0549D}" type="datetimeFigureOut">
               <a:rPr lang="he-IL" smtClean="0"/>
-              <a:t>י'/שבט/תשפ"ו</a:t>
+              <a:t>י"ד/שבט/תשפ"ו</a:t>
             </a:fld>
             <a:endParaRPr lang="he-IL"/>
           </a:p>
@@ -866,13 +3205,7 @@
       </p:sp>
       <p:sp>
         <p:nvSpPr>
-          <p:cNvPr id="5" name="מציין מיקום של כותרת תחתונה 4">
-            <a:extLst>
-              <a:ext uri="{FF2B5EF4-FFF2-40B4-BE49-F238E27FC236}">
-                <a16:creationId xmlns:a16="http://schemas.microsoft.com/office/drawing/2014/main" id="{7FC7E631-527D-4CE9-A8E9-FCA3C9B67AA6}"/>
-              </a:ext>
-            </a:extLst>
-          </p:cNvPr>
+          <p:cNvPr id="5" name="Footer Placeholder 4"/>
           <p:cNvSpPr>
             <a:spLocks noGrp="1"/>
           </p:cNvSpPr>
@@ -891,13 +3224,7 @@
       </p:sp>
       <p:sp>
         <p:nvSpPr>
-          <p:cNvPr id="6" name="מציין מיקום של מספר שקופית 5">
-            <a:extLst>
-              <a:ext uri="{FF2B5EF4-FFF2-40B4-BE49-F238E27FC236}">
-                <a16:creationId xmlns:a16="http://schemas.microsoft.com/office/drawing/2014/main" id="{203F0575-3EC7-480B-BBEB-265A1BABA002}"/>
-              </a:ext>
-            </a:extLst>
-          </p:cNvPr>
+          <p:cNvPr id="6" name="Slide Number Placeholder 5"/>
           <p:cNvSpPr>
             <a:spLocks noGrp="1"/>
           </p:cNvSpPr>
@@ -921,7 +3248,7 @@
     </p:spTree>
     <p:extLst>
       <p:ext uri="{BB962C8B-B14F-4D97-AF65-F5344CB8AC3E}">
-        <p14:creationId xmlns:p14="http://schemas.microsoft.com/office/powerpoint/2010/main" val="3000604242"/>
+        <p14:creationId xmlns:p14="http://schemas.microsoft.com/office/powerpoint/2010/main" val="3911464539"/>
       </p:ext>
     </p:extLst>
   </p:cSld>
@@ -950,13 +3277,7 @@
       </p:grpSpPr>
       <p:sp>
         <p:nvSpPr>
-          <p:cNvPr id="2" name="כותרת 1">
-            <a:extLst>
-              <a:ext uri="{FF2B5EF4-FFF2-40B4-BE49-F238E27FC236}">
-                <a16:creationId xmlns:a16="http://schemas.microsoft.com/office/drawing/2014/main" id="{2ED57B83-7299-45CE-BFAE-F4AFC1E6B2D3}"/>
-              </a:ext>
-            </a:extLst>
-          </p:cNvPr>
+          <p:cNvPr id="2" name="Title 1"/>
           <p:cNvSpPr>
             <a:spLocks noGrp="1"/>
           </p:cNvSpPr>
@@ -966,15 +3287,17 @@
         </p:nvSpPr>
         <p:spPr>
           <a:xfrm>
-            <a:off x="831850" y="1709738"/>
-            <a:ext cx="10515600" cy="2852737"/>
+            <a:off x="2015069" y="1752606"/>
+            <a:ext cx="8158688" cy="1822514"/>
           </a:xfrm>
         </p:spPr>
         <p:txBody>
-          <a:bodyPr anchor="b"/>
+          <a:bodyPr anchor="b">
+            <a:normAutofit/>
+          </a:bodyPr>
           <a:lstStyle>
-            <a:lvl1pPr>
-              <a:defRPr sz="6000"/>
+            <a:lvl1pPr algn="ctr">
+              <a:defRPr sz="4400" b="0" cap="none"/>
             </a:lvl1pPr>
           </a:lstStyle>
           <a:p>
@@ -982,18 +3305,13 @@
               <a:rPr lang="he-IL"/>
               <a:t>לחץ כדי לערוך סגנון כותרת של תבנית בסיס</a:t>
             </a:r>
-          </a:p>
-        </p:txBody>
-      </p:sp>
-      <p:sp>
-        <p:nvSpPr>
-          <p:cNvPr id="3" name="מציין מיקום טקסט 2">
-            <a:extLst>
-              <a:ext uri="{FF2B5EF4-FFF2-40B4-BE49-F238E27FC236}">
-                <a16:creationId xmlns:a16="http://schemas.microsoft.com/office/drawing/2014/main" id="{6F650F37-1AED-4284-B4C2-0FD3D84228F9}"/>
-              </a:ext>
-            </a:extLst>
-          </p:cNvPr>
+            <a:endParaRPr lang="en-US" dirty="0"/>
+          </a:p>
+        </p:txBody>
+      </p:sp>
+      <p:sp>
+        <p:nvSpPr>
+          <p:cNvPr id="3" name="Text Placeholder 2"/>
           <p:cNvSpPr>
             <a:spLocks noGrp="1"/>
           </p:cNvSpPr>
@@ -1003,26 +3321,26 @@
         </p:nvSpPr>
         <p:spPr>
           <a:xfrm>
-            <a:off x="831850" y="4589463"/>
-            <a:ext cx="10515600" cy="1500187"/>
+            <a:off x="2015067" y="3846051"/>
+            <a:ext cx="8158690" cy="954547"/>
           </a:xfrm>
         </p:spPr>
         <p:txBody>
-          <a:bodyPr/>
+          <a:bodyPr anchor="t">
+            <a:normAutofit/>
+          </a:bodyPr>
           <a:lstStyle>
-            <a:lvl1pPr marL="0" indent="0">
+            <a:lvl1pPr marL="0" indent="0" algn="ctr">
               <a:buNone/>
               <a:defRPr sz="2400">
                 <a:solidFill>
-                  <a:schemeClr val="tx1">
-                    <a:tint val="75000"/>
-                  </a:schemeClr>
+                  <a:schemeClr val="tx1"/>
                 </a:solidFill>
               </a:defRPr>
             </a:lvl1pPr>
             <a:lvl2pPr marL="457200" indent="0">
               <a:buNone/>
-              <a:defRPr sz="2000">
+              <a:defRPr sz="1800">
                 <a:solidFill>
                   <a:schemeClr val="tx1">
                     <a:tint val="75000"/>
@@ -1032,7 +3350,7 @@
             </a:lvl2pPr>
             <a:lvl3pPr marL="914400" indent="0">
               <a:buNone/>
-              <a:defRPr sz="1800">
+              <a:defRPr sz="1600">
                 <a:solidFill>
                   <a:schemeClr val="tx1">
                     <a:tint val="75000"/>
@@ -1042,7 +3360,7 @@
             </a:lvl3pPr>
             <a:lvl4pPr marL="1371600" indent="0">
               <a:buNone/>
-              <a:defRPr sz="1600">
+              <a:defRPr sz="1400">
                 <a:solidFill>
                   <a:schemeClr val="tx1">
                     <a:tint val="75000"/>
@@ -1052,7 +3370,7 @@
             </a:lvl4pPr>
             <a:lvl5pPr marL="1828800" indent="0">
               <a:buNone/>
-              <a:defRPr sz="1600">
+              <a:defRPr sz="1400">
                 <a:solidFill>
                   <a:schemeClr val="tx1">
                     <a:tint val="75000"/>
@@ -1062,7 +3380,7 @@
             </a:lvl5pPr>
             <a:lvl6pPr marL="2286000" indent="0">
               <a:buNone/>
-              <a:defRPr sz="1600">
+              <a:defRPr sz="1400">
                 <a:solidFill>
                   <a:schemeClr val="tx1">
                     <a:tint val="75000"/>
@@ -1072,7 +3390,7 @@
             </a:lvl6pPr>
             <a:lvl7pPr marL="2743200" indent="0">
               <a:buNone/>
-              <a:defRPr sz="1600">
+              <a:defRPr sz="1400">
                 <a:solidFill>
                   <a:schemeClr val="tx1">
                     <a:tint val="75000"/>
@@ -1082,7 +3400,7 @@
             </a:lvl7pPr>
             <a:lvl8pPr marL="3200400" indent="0">
               <a:buNone/>
-              <a:defRPr sz="1600">
+              <a:defRPr sz="1400">
                 <a:solidFill>
                   <a:schemeClr val="tx1">
                     <a:tint val="75000"/>
@@ -1092,7 +3410,7 @@
             </a:lvl8pPr>
             <a:lvl9pPr marL="3657600" indent="0">
               <a:buNone/>
-              <a:defRPr sz="1600">
+              <a:defRPr sz="1400">
                 <a:solidFill>
                   <a:schemeClr val="tx1">
                     <a:tint val="75000"/>
@@ -1112,13 +3430,7 @@
       </p:sp>
       <p:sp>
         <p:nvSpPr>
-          <p:cNvPr id="4" name="מציין מיקום של תאריך 3">
-            <a:extLst>
-              <a:ext uri="{FF2B5EF4-FFF2-40B4-BE49-F238E27FC236}">
-                <a16:creationId xmlns:a16="http://schemas.microsoft.com/office/drawing/2014/main" id="{E334B07C-DCCC-473A-A02B-CCBE93648680}"/>
-              </a:ext>
-            </a:extLst>
-          </p:cNvPr>
+          <p:cNvPr id="4" name="Date Placeholder 3"/>
           <p:cNvSpPr>
             <a:spLocks noGrp="1"/>
           </p:cNvSpPr>
@@ -1133,7 +3445,7 @@
           <a:p>
             <a:fld id="{FF244A5C-CBE4-4F0F-A48D-FEE452A0549D}" type="datetimeFigureOut">
               <a:rPr lang="he-IL" smtClean="0"/>
-              <a:t>י'/שבט/תשפ"ו</a:t>
+              <a:t>י"ד/שבט/תשפ"ו</a:t>
             </a:fld>
             <a:endParaRPr lang="he-IL"/>
           </a:p>
@@ -1141,13 +3453,7 @@
       </p:sp>
       <p:sp>
         <p:nvSpPr>
-          <p:cNvPr id="5" name="מציין מיקום של כותרת תחתונה 4">
-            <a:extLst>
-              <a:ext uri="{FF2B5EF4-FFF2-40B4-BE49-F238E27FC236}">
-                <a16:creationId xmlns:a16="http://schemas.microsoft.com/office/drawing/2014/main" id="{C43B48B1-2B7A-4A3F-8602-329511322D00}"/>
-              </a:ext>
-            </a:extLst>
-          </p:cNvPr>
+          <p:cNvPr id="5" name="Footer Placeholder 4"/>
           <p:cNvSpPr>
             <a:spLocks noGrp="1"/>
           </p:cNvSpPr>
@@ -1166,13 +3472,7 @@
       </p:sp>
       <p:sp>
         <p:nvSpPr>
-          <p:cNvPr id="6" name="מציין מיקום של מספר שקופית 5">
-            <a:extLst>
-              <a:ext uri="{FF2B5EF4-FFF2-40B4-BE49-F238E27FC236}">
-                <a16:creationId xmlns:a16="http://schemas.microsoft.com/office/drawing/2014/main" id="{30AFACDC-BE46-4757-94A2-A46B0E00CBA7}"/>
-              </a:ext>
-            </a:extLst>
-          </p:cNvPr>
+          <p:cNvPr id="6" name="Slide Number Placeholder 5"/>
           <p:cNvSpPr>
             <a:spLocks noGrp="1"/>
           </p:cNvSpPr>
@@ -1193,10 +3493,41 @@
           </a:p>
         </p:txBody>
       </p:sp>
+      <p:cxnSp>
+        <p:nvCxnSpPr>
+          <p:cNvPr id="16" name="Straight Connector 15"/>
+          <p:cNvCxnSpPr/>
+          <p:nvPr/>
+        </p:nvCxnSpPr>
+        <p:spPr>
+          <a:xfrm>
+            <a:off x="2012723" y="3710585"/>
+            <a:ext cx="8163380" cy="0"/>
+          </a:xfrm>
+          <a:prstGeom prst="line">
+            <a:avLst/>
+          </a:prstGeom>
+          <a:ln w="15875"/>
+        </p:spPr>
+        <p:style>
+          <a:lnRef idx="2">
+            <a:schemeClr val="accent1"/>
+          </a:lnRef>
+          <a:fillRef idx="0">
+            <a:schemeClr val="accent1"/>
+          </a:fillRef>
+          <a:effectRef idx="1">
+            <a:schemeClr val="accent1"/>
+          </a:effectRef>
+          <a:fontRef idx="minor">
+            <a:schemeClr val="tx1"/>
+          </a:fontRef>
+        </p:style>
+      </p:cxnSp>
     </p:spTree>
     <p:extLst>
       <p:ext uri="{BB962C8B-B14F-4D97-AF65-F5344CB8AC3E}">
-        <p14:creationId xmlns:p14="http://schemas.microsoft.com/office/powerpoint/2010/main" val="2382790825"/>
+        <p14:creationId xmlns:p14="http://schemas.microsoft.com/office/powerpoint/2010/main" val="3632056580"/>
       </p:ext>
     </p:extLst>
   </p:cSld>
@@ -1223,58 +3554,80 @@
           <a:chExt cx="0" cy="0"/>
         </a:xfrm>
       </p:grpSpPr>
-      <p:sp>
-        <p:nvSpPr>
-          <p:cNvPr id="2" name="כותרת 1">
-            <a:extLst>
-              <a:ext uri="{FF2B5EF4-FFF2-40B4-BE49-F238E27FC236}">
-                <a16:creationId xmlns:a16="http://schemas.microsoft.com/office/drawing/2014/main" id="{F1DA5C84-023D-4942-BC1C-12A3E7E75CF0}"/>
-              </a:ext>
-            </a:extLst>
-          </p:cNvPr>
-          <p:cNvSpPr>
-            <a:spLocks noGrp="1"/>
-          </p:cNvSpPr>
-          <p:nvPr>
-            <p:ph type="title"/>
-          </p:nvPr>
-        </p:nvSpPr>
-        <p:spPr/>
-        <p:txBody>
-          <a:bodyPr/>
-          <a:lstStyle/>
-          <a:p>
-            <a:r>
-              <a:rPr lang="he-IL"/>
-              <a:t>לחץ כדי לערוך סגנון כותרת של תבנית בסיס</a:t>
-            </a:r>
-          </a:p>
-        </p:txBody>
-      </p:sp>
-      <p:sp>
-        <p:nvSpPr>
-          <p:cNvPr id="3" name="מציין מיקום תוכן 2">
-            <a:extLst>
-              <a:ext uri="{FF2B5EF4-FFF2-40B4-BE49-F238E27FC236}">
-                <a16:creationId xmlns:a16="http://schemas.microsoft.com/office/drawing/2014/main" id="{1C8A01A3-D52E-4775-B059-76AA081AC6B5}"/>
-              </a:ext>
-            </a:extLst>
-          </p:cNvPr>
-          <p:cNvSpPr>
-            <a:spLocks noGrp="1"/>
-          </p:cNvSpPr>
-          <p:nvPr>
-            <p:ph sz="half" idx="1"/>
-          </p:nvPr>
-        </p:nvSpPr>
+      <p:cxnSp>
+        <p:nvCxnSpPr>
+          <p:cNvPr id="8" name="Straight Connector 7"/>
+          <p:cNvCxnSpPr/>
+          <p:nvPr/>
+        </p:nvCxnSpPr>
         <p:spPr>
           <a:xfrm>
-            <a:off x="838200" y="1825625"/>
-            <a:ext cx="5181600" cy="4351338"/>
+            <a:off x="1396169" y="2421466"/>
+            <a:ext cx="9407298" cy="0"/>
+          </a:xfrm>
+          <a:prstGeom prst="line">
+            <a:avLst/>
+          </a:prstGeom>
+          <a:ln w="15875"/>
+        </p:spPr>
+        <p:style>
+          <a:lnRef idx="2">
+            <a:schemeClr val="accent1"/>
+          </a:lnRef>
+          <a:fillRef idx="0">
+            <a:schemeClr val="accent1"/>
+          </a:fillRef>
+          <a:effectRef idx="1">
+            <a:schemeClr val="accent1"/>
+          </a:effectRef>
+          <a:fontRef idx="minor">
+            <a:schemeClr val="tx1"/>
+          </a:fontRef>
+        </p:style>
+      </p:cxnSp>
+      <p:sp>
+        <p:nvSpPr>
+          <p:cNvPr id="2" name="Title 1"/>
+          <p:cNvSpPr>
+            <a:spLocks noGrp="1"/>
+          </p:cNvSpPr>
+          <p:nvPr>
+            <p:ph type="title"/>
+          </p:nvPr>
+        </p:nvSpPr>
+        <p:spPr/>
+        <p:txBody>
+          <a:bodyPr/>
+          <a:lstStyle/>
+          <a:p>
+            <a:r>
+              <a:rPr lang="he-IL"/>
+              <a:t>לחץ כדי לערוך סגנון כותרת של תבנית בסיס</a:t>
+            </a:r>
+            <a:endParaRPr lang="en-US" dirty="0"/>
+          </a:p>
+        </p:txBody>
+      </p:sp>
+      <p:sp>
+        <p:nvSpPr>
+          <p:cNvPr id="3" name="Content Placeholder 2"/>
+          <p:cNvSpPr>
+            <a:spLocks noGrp="1"/>
+          </p:cNvSpPr>
+          <p:nvPr>
+            <p:ph sz="half" idx="1"/>
+          </p:nvPr>
+        </p:nvSpPr>
+        <p:spPr>
+          <a:xfrm>
+            <a:off x="1298448" y="2560320"/>
+            <a:ext cx="4718304" cy="3310128"/>
           </a:xfrm>
         </p:spPr>
         <p:txBody>
-          <a:bodyPr/>
+          <a:bodyPr>
+            <a:normAutofit/>
+          </a:bodyPr>
           <a:lstStyle/>
           <a:p>
             <a:pPr lvl="0"/>
@@ -1310,18 +3663,13 @@
               <a:rPr lang="he-IL"/>
               <a:t>רמה חמישית</a:t>
             </a:r>
-          </a:p>
-        </p:txBody>
-      </p:sp>
-      <p:sp>
-        <p:nvSpPr>
-          <p:cNvPr id="4" name="מציין מיקום תוכן 3">
-            <a:extLst>
-              <a:ext uri="{FF2B5EF4-FFF2-40B4-BE49-F238E27FC236}">
-                <a16:creationId xmlns:a16="http://schemas.microsoft.com/office/drawing/2014/main" id="{28376AD3-F0D4-4344-9824-39532270A1D7}"/>
-              </a:ext>
-            </a:extLst>
-          </p:cNvPr>
+            <a:endParaRPr lang="en-US" dirty="0"/>
+          </a:p>
+        </p:txBody>
+      </p:sp>
+      <p:sp>
+        <p:nvSpPr>
+          <p:cNvPr id="4" name="Content Placeholder 3"/>
           <p:cNvSpPr>
             <a:spLocks noGrp="1"/>
           </p:cNvSpPr>
@@ -1331,12 +3679,14 @@
         </p:nvSpPr>
         <p:spPr>
           <a:xfrm>
-            <a:off x="6172200" y="1825625"/>
-            <a:ext cx="5181600" cy="4351338"/>
+            <a:off x="6181344" y="2560320"/>
+            <a:ext cx="4718304" cy="3310128"/>
           </a:xfrm>
         </p:spPr>
         <p:txBody>
-          <a:bodyPr/>
+          <a:bodyPr>
+            <a:normAutofit/>
+          </a:bodyPr>
           <a:lstStyle/>
           <a:p>
             <a:pPr lvl="0"/>
@@ -1372,18 +3722,13 @@
               <a:rPr lang="he-IL"/>
               <a:t>רמה חמישית</a:t>
             </a:r>
-          </a:p>
-        </p:txBody>
-      </p:sp>
-      <p:sp>
-        <p:nvSpPr>
-          <p:cNvPr id="5" name="מציין מיקום של תאריך 4">
-            <a:extLst>
-              <a:ext uri="{FF2B5EF4-FFF2-40B4-BE49-F238E27FC236}">
-                <a16:creationId xmlns:a16="http://schemas.microsoft.com/office/drawing/2014/main" id="{285910D7-5D7E-4320-9FA9-31F47FDC82A2}"/>
-              </a:ext>
-            </a:extLst>
-          </p:cNvPr>
+            <a:endParaRPr lang="en-US" dirty="0"/>
+          </a:p>
+        </p:txBody>
+      </p:sp>
+      <p:sp>
+        <p:nvSpPr>
+          <p:cNvPr id="5" name="Date Placeholder 4"/>
           <p:cNvSpPr>
             <a:spLocks noGrp="1"/>
           </p:cNvSpPr>
@@ -1398,7 +3743,7 @@
           <a:p>
             <a:fld id="{FF244A5C-CBE4-4F0F-A48D-FEE452A0549D}" type="datetimeFigureOut">
               <a:rPr lang="he-IL" smtClean="0"/>
-              <a:t>י'/שבט/תשפ"ו</a:t>
+              <a:t>י"ד/שבט/תשפ"ו</a:t>
             </a:fld>
             <a:endParaRPr lang="he-IL"/>
           </a:p>
@@ -1406,13 +3751,7 @@
       </p:sp>
       <p:sp>
         <p:nvSpPr>
-          <p:cNvPr id="6" name="מציין מיקום של כותרת תחתונה 5">
-            <a:extLst>
-              <a:ext uri="{FF2B5EF4-FFF2-40B4-BE49-F238E27FC236}">
-                <a16:creationId xmlns:a16="http://schemas.microsoft.com/office/drawing/2014/main" id="{B57D0737-9AD5-43CF-98E2-79F65009D50A}"/>
-              </a:ext>
-            </a:extLst>
-          </p:cNvPr>
+          <p:cNvPr id="6" name="Footer Placeholder 5"/>
           <p:cNvSpPr>
             <a:spLocks noGrp="1"/>
           </p:cNvSpPr>
@@ -1431,13 +3770,7 @@
       </p:sp>
       <p:sp>
         <p:nvSpPr>
-          <p:cNvPr id="7" name="מציין מיקום של מספר שקופית 6">
-            <a:extLst>
-              <a:ext uri="{FF2B5EF4-FFF2-40B4-BE49-F238E27FC236}">
-                <a16:creationId xmlns:a16="http://schemas.microsoft.com/office/drawing/2014/main" id="{163B09B6-41D8-4EC0-87A6-1FCF37DB46FB}"/>
-              </a:ext>
-            </a:extLst>
-          </p:cNvPr>
+          <p:cNvPr id="7" name="Slide Number Placeholder 6"/>
           <p:cNvSpPr>
             <a:spLocks noGrp="1"/>
           </p:cNvSpPr>
@@ -1461,7 +3794,7 @@
     </p:spTree>
     <p:extLst>
       <p:ext uri="{BB962C8B-B14F-4D97-AF65-F5344CB8AC3E}">
-        <p14:creationId xmlns:p14="http://schemas.microsoft.com/office/powerpoint/2010/main" val="1156937728"/>
+        <p14:creationId xmlns:p14="http://schemas.microsoft.com/office/powerpoint/2010/main" val="3904315901"/>
       </p:ext>
     </p:extLst>
   </p:cSld>
@@ -1490,65 +3823,65 @@
       </p:grpSpPr>
       <p:sp>
         <p:nvSpPr>
-          <p:cNvPr id="2" name="כותרת 1">
-            <a:extLst>
-              <a:ext uri="{FF2B5EF4-FFF2-40B4-BE49-F238E27FC236}">
-                <a16:creationId xmlns:a16="http://schemas.microsoft.com/office/drawing/2014/main" id="{C8871ED9-3226-45FA-85C2-82C926286AB6}"/>
-              </a:ext>
-            </a:extLst>
-          </p:cNvPr>
+          <p:cNvPr id="2" name="Title 1"/>
           <p:cNvSpPr>
             <a:spLocks noGrp="1"/>
           </p:cNvSpPr>
           <p:nvPr>
             <p:ph type="title"/>
+          </p:nvPr>
+        </p:nvSpPr>
+        <p:spPr/>
+        <p:txBody>
+          <a:bodyPr/>
+          <a:lstStyle>
+            <a:lvl1pPr>
+              <a:defRPr/>
+            </a:lvl1pPr>
+          </a:lstStyle>
+          <a:p>
+            <a:r>
+              <a:rPr lang="he-IL"/>
+              <a:t>לחץ כדי לערוך סגנון כותרת של תבנית בסיס</a:t>
+            </a:r>
+            <a:endParaRPr lang="en-US" dirty="0"/>
+          </a:p>
+        </p:txBody>
+      </p:sp>
+      <p:sp>
+        <p:nvSpPr>
+          <p:cNvPr id="3" name="Text Placeholder 2"/>
+          <p:cNvSpPr>
+            <a:spLocks noGrp="1"/>
+          </p:cNvSpPr>
+          <p:nvPr>
+            <p:ph type="body" idx="1"/>
           </p:nvPr>
         </p:nvSpPr>
         <p:spPr>
           <a:xfrm>
-            <a:off x="839788" y="365125"/>
-            <a:ext cx="10515600" cy="1325563"/>
+            <a:off x="1295400" y="2658533"/>
+            <a:ext cx="4718304" cy="576262"/>
           </a:xfrm>
         </p:spPr>
         <p:txBody>
-          <a:bodyPr/>
-          <a:lstStyle/>
-          <a:p>
-            <a:r>
-              <a:rPr lang="he-IL"/>
-              <a:t>לחץ כדי לערוך סגנון כותרת של תבנית בסיס</a:t>
-            </a:r>
-          </a:p>
-        </p:txBody>
-      </p:sp>
-      <p:sp>
-        <p:nvSpPr>
-          <p:cNvPr id="3" name="מציין מיקום טקסט 2">
-            <a:extLst>
-              <a:ext uri="{FF2B5EF4-FFF2-40B4-BE49-F238E27FC236}">
-                <a16:creationId xmlns:a16="http://schemas.microsoft.com/office/drawing/2014/main" id="{64E63FD1-2251-41AC-8265-438F5DDC550C}"/>
-              </a:ext>
-            </a:extLst>
-          </p:cNvPr>
-          <p:cNvSpPr>
-            <a:spLocks noGrp="1"/>
-          </p:cNvSpPr>
-          <p:nvPr>
-            <p:ph type="body" idx="1"/>
-          </p:nvPr>
-        </p:nvSpPr>
-        <p:spPr>
-          <a:xfrm>
-            <a:off x="839788" y="1681163"/>
-            <a:ext cx="5157787" cy="823912"/>
-          </a:xfrm>
-        </p:spPr>
-        <p:txBody>
-          <a:bodyPr anchor="b"/>
+          <a:bodyPr anchor="b">
+            <a:noAutofit/>
+          </a:bodyPr>
           <a:lstStyle>
             <a:lvl1pPr marL="0" indent="0">
-              <a:buNone/>
-              <a:defRPr sz="2400" b="1"/>
+              <a:spcBef>
+                <a:spcPts val="672"/>
+              </a:spcBef>
+              <a:spcAft>
+                <a:spcPts val="600"/>
+              </a:spcAft>
+              <a:buNone/>
+              <a:defRPr sz="2800" b="0">
+                <a:solidFill>
+                  <a:schemeClr val="accent1"/>
+                </a:solidFill>
+              </a:defRPr>
             </a:lvl1pPr>
             <a:lvl2pPr marL="457200" indent="0">
               <a:buNone/>
@@ -1594,13 +3927,7 @@
       </p:sp>
       <p:sp>
         <p:nvSpPr>
-          <p:cNvPr id="4" name="מציין מיקום תוכן 3">
-            <a:extLst>
-              <a:ext uri="{FF2B5EF4-FFF2-40B4-BE49-F238E27FC236}">
-                <a16:creationId xmlns:a16="http://schemas.microsoft.com/office/drawing/2014/main" id="{AAFE9DD7-E17D-45B4-A6B7-48710FEA95C2}"/>
-              </a:ext>
-            </a:extLst>
-          </p:cNvPr>
+          <p:cNvPr id="4" name="Content Placeholder 3"/>
           <p:cNvSpPr>
             <a:spLocks noGrp="1"/>
           </p:cNvSpPr>
@@ -1610,12 +3937,14 @@
         </p:nvSpPr>
         <p:spPr>
           <a:xfrm>
-            <a:off x="839788" y="2505075"/>
-            <a:ext cx="5157787" cy="3684588"/>
+            <a:off x="1295400" y="3243262"/>
+            <a:ext cx="4718304" cy="2632605"/>
           </a:xfrm>
         </p:spPr>
         <p:txBody>
-          <a:bodyPr/>
+          <a:bodyPr anchor="t">
+            <a:normAutofit/>
+          </a:bodyPr>
           <a:lstStyle/>
           <a:p>
             <a:pPr lvl="0"/>
@@ -1651,18 +3980,13 @@
               <a:rPr lang="he-IL"/>
               <a:t>רמה חמישית</a:t>
             </a:r>
-          </a:p>
-        </p:txBody>
-      </p:sp>
-      <p:sp>
-        <p:nvSpPr>
-          <p:cNvPr id="5" name="מציין מיקום טקסט 4">
-            <a:extLst>
-              <a:ext uri="{FF2B5EF4-FFF2-40B4-BE49-F238E27FC236}">
-                <a16:creationId xmlns:a16="http://schemas.microsoft.com/office/drawing/2014/main" id="{1E09FE33-D1D6-40AA-A4C1-9AD4B67E6644}"/>
-              </a:ext>
-            </a:extLst>
-          </p:cNvPr>
+            <a:endParaRPr lang="en-US" dirty="0"/>
+          </a:p>
+        </p:txBody>
+      </p:sp>
+      <p:sp>
+        <p:nvSpPr>
+          <p:cNvPr id="5" name="Text Placeholder 4"/>
           <p:cNvSpPr>
             <a:spLocks noGrp="1"/>
           </p:cNvSpPr>
@@ -1672,16 +3996,28 @@
         </p:nvSpPr>
         <p:spPr>
           <a:xfrm>
-            <a:off x="6172200" y="1681163"/>
-            <a:ext cx="5183188" cy="823912"/>
+            <a:off x="6180670" y="2658533"/>
+            <a:ext cx="4718304" cy="576262"/>
           </a:xfrm>
         </p:spPr>
         <p:txBody>
-          <a:bodyPr anchor="b"/>
+          <a:bodyPr anchor="b">
+            <a:noAutofit/>
+          </a:bodyPr>
           <a:lstStyle>
             <a:lvl1pPr marL="0" indent="0">
-              <a:buNone/>
-              <a:defRPr sz="2400" b="1"/>
+              <a:spcBef>
+                <a:spcPts val="672"/>
+              </a:spcBef>
+              <a:spcAft>
+                <a:spcPts val="600"/>
+              </a:spcAft>
+              <a:buNone/>
+              <a:defRPr sz="2800" b="0">
+                <a:solidFill>
+                  <a:schemeClr val="accent1"/>
+                </a:solidFill>
+              </a:defRPr>
             </a:lvl1pPr>
             <a:lvl2pPr marL="457200" indent="0">
               <a:buNone/>
@@ -1727,13 +4063,7 @@
       </p:sp>
       <p:sp>
         <p:nvSpPr>
-          <p:cNvPr id="6" name="מציין מיקום תוכן 5">
-            <a:extLst>
-              <a:ext uri="{FF2B5EF4-FFF2-40B4-BE49-F238E27FC236}">
-                <a16:creationId xmlns:a16="http://schemas.microsoft.com/office/drawing/2014/main" id="{C3CFF43F-AA97-44CA-924F-3151C7ECA0D9}"/>
-              </a:ext>
-            </a:extLst>
-          </p:cNvPr>
+          <p:cNvPr id="6" name="Content Placeholder 5"/>
           <p:cNvSpPr>
             <a:spLocks noGrp="1"/>
           </p:cNvSpPr>
@@ -1743,12 +4073,14 @@
         </p:nvSpPr>
         <p:spPr>
           <a:xfrm>
-            <a:off x="6172200" y="2505075"/>
-            <a:ext cx="5183188" cy="3684588"/>
+            <a:off x="6180670" y="3243262"/>
+            <a:ext cx="4718304" cy="2632605"/>
           </a:xfrm>
         </p:spPr>
         <p:txBody>
-          <a:bodyPr/>
+          <a:bodyPr anchor="t">
+            <a:normAutofit/>
+          </a:bodyPr>
           <a:lstStyle/>
           <a:p>
             <a:pPr lvl="0"/>
@@ -1784,18 +4116,13 @@
               <a:rPr lang="he-IL"/>
               <a:t>רמה חמישית</a:t>
             </a:r>
-          </a:p>
-        </p:txBody>
-      </p:sp>
-      <p:sp>
-        <p:nvSpPr>
-          <p:cNvPr id="7" name="מציין מיקום של תאריך 6">
-            <a:extLst>
-              <a:ext uri="{FF2B5EF4-FFF2-40B4-BE49-F238E27FC236}">
-                <a16:creationId xmlns:a16="http://schemas.microsoft.com/office/drawing/2014/main" id="{DAAB8D64-1506-4884-8454-6B9AA68F1FDC}"/>
-              </a:ext>
-            </a:extLst>
-          </p:cNvPr>
+            <a:endParaRPr lang="en-US" dirty="0"/>
+          </a:p>
+        </p:txBody>
+      </p:sp>
+      <p:sp>
+        <p:nvSpPr>
+          <p:cNvPr id="7" name="Date Placeholder 6"/>
           <p:cNvSpPr>
             <a:spLocks noGrp="1"/>
           </p:cNvSpPr>
@@ -1810,7 +4137,7 @@
           <a:p>
             <a:fld id="{FF244A5C-CBE4-4F0F-A48D-FEE452A0549D}" type="datetimeFigureOut">
               <a:rPr lang="he-IL" smtClean="0"/>
-              <a:t>י'/שבט/תשפ"ו</a:t>
+              <a:t>י"ד/שבט/תשפ"ו</a:t>
             </a:fld>
             <a:endParaRPr lang="he-IL"/>
           </a:p>
@@ -1818,13 +4145,7 @@
       </p:sp>
       <p:sp>
         <p:nvSpPr>
-          <p:cNvPr id="8" name="מציין מיקום של כותרת תחתונה 7">
-            <a:extLst>
-              <a:ext uri="{FF2B5EF4-FFF2-40B4-BE49-F238E27FC236}">
-                <a16:creationId xmlns:a16="http://schemas.microsoft.com/office/drawing/2014/main" id="{EEF401E8-35BF-416C-8E7A-A0A73B1B09CF}"/>
-              </a:ext>
-            </a:extLst>
-          </p:cNvPr>
+          <p:cNvPr id="8" name="Footer Placeholder 7"/>
           <p:cNvSpPr>
             <a:spLocks noGrp="1"/>
           </p:cNvSpPr>
@@ -1843,13 +4164,7 @@
       </p:sp>
       <p:sp>
         <p:nvSpPr>
-          <p:cNvPr id="9" name="מציין מיקום של מספר שקופית 8">
-            <a:extLst>
-              <a:ext uri="{FF2B5EF4-FFF2-40B4-BE49-F238E27FC236}">
-                <a16:creationId xmlns:a16="http://schemas.microsoft.com/office/drawing/2014/main" id="{0C975114-CE38-4806-82AD-81DDD40F4718}"/>
-              </a:ext>
-            </a:extLst>
-          </p:cNvPr>
+          <p:cNvPr id="9" name="Slide Number Placeholder 8"/>
           <p:cNvSpPr>
             <a:spLocks noGrp="1"/>
           </p:cNvSpPr>
@@ -1870,10 +4185,41 @@
           </a:p>
         </p:txBody>
       </p:sp>
+      <p:cxnSp>
+        <p:nvCxnSpPr>
+          <p:cNvPr id="18" name="Straight Connector 17"/>
+          <p:cNvCxnSpPr/>
+          <p:nvPr/>
+        </p:nvCxnSpPr>
+        <p:spPr>
+          <a:xfrm>
+            <a:off x="1396169" y="2421466"/>
+            <a:ext cx="9407298" cy="0"/>
+          </a:xfrm>
+          <a:prstGeom prst="line">
+            <a:avLst/>
+          </a:prstGeom>
+          <a:ln w="15875"/>
+        </p:spPr>
+        <p:style>
+          <a:lnRef idx="2">
+            <a:schemeClr val="accent1"/>
+          </a:lnRef>
+          <a:fillRef idx="0">
+            <a:schemeClr val="accent1"/>
+          </a:fillRef>
+          <a:effectRef idx="1">
+            <a:schemeClr val="accent1"/>
+          </a:effectRef>
+          <a:fontRef idx="minor">
+            <a:schemeClr val="tx1"/>
+          </a:fontRef>
+        </p:style>
+      </p:cxnSp>
     </p:spTree>
     <p:extLst>
       <p:ext uri="{BB962C8B-B14F-4D97-AF65-F5344CB8AC3E}">
-        <p14:creationId xmlns:p14="http://schemas.microsoft.com/office/powerpoint/2010/main" val="2637881755"/>
+        <p14:creationId xmlns:p14="http://schemas.microsoft.com/office/powerpoint/2010/main" val="2856821859"/>
       </p:ext>
     </p:extLst>
   </p:cSld>
@@ -1902,13 +4248,7 @@
       </p:grpSpPr>
       <p:sp>
         <p:nvSpPr>
-          <p:cNvPr id="2" name="כותרת 1">
-            <a:extLst>
-              <a:ext uri="{FF2B5EF4-FFF2-40B4-BE49-F238E27FC236}">
-                <a16:creationId xmlns:a16="http://schemas.microsoft.com/office/drawing/2014/main" id="{F0D297D7-005E-4FF5-9354-B412BA0B851F}"/>
-              </a:ext>
-            </a:extLst>
-          </p:cNvPr>
+          <p:cNvPr id="2" name="Title 1"/>
           <p:cNvSpPr>
             <a:spLocks noGrp="1"/>
           </p:cNvSpPr>
@@ -1925,18 +4265,13 @@
               <a:rPr lang="he-IL"/>
               <a:t>לחץ כדי לערוך סגנון כותרת של תבנית בסיס</a:t>
             </a:r>
-          </a:p>
-        </p:txBody>
-      </p:sp>
-      <p:sp>
-        <p:nvSpPr>
-          <p:cNvPr id="3" name="מציין מיקום של תאריך 2">
-            <a:extLst>
-              <a:ext uri="{FF2B5EF4-FFF2-40B4-BE49-F238E27FC236}">
-                <a16:creationId xmlns:a16="http://schemas.microsoft.com/office/drawing/2014/main" id="{B54628E2-64EA-42CB-B060-D82B0ADFF879}"/>
-              </a:ext>
-            </a:extLst>
-          </p:cNvPr>
+            <a:endParaRPr lang="en-US" dirty="0"/>
+          </a:p>
+        </p:txBody>
+      </p:sp>
+      <p:sp>
+        <p:nvSpPr>
+          <p:cNvPr id="3" name="Date Placeholder 2"/>
           <p:cNvSpPr>
             <a:spLocks noGrp="1"/>
           </p:cNvSpPr>
@@ -1951,7 +4286,7 @@
           <a:p>
             <a:fld id="{FF244A5C-CBE4-4F0F-A48D-FEE452A0549D}" type="datetimeFigureOut">
               <a:rPr lang="he-IL" smtClean="0"/>
-              <a:t>י'/שבט/תשפ"ו</a:t>
+              <a:t>י"ד/שבט/תשפ"ו</a:t>
             </a:fld>
             <a:endParaRPr lang="he-IL"/>
           </a:p>
@@ -1959,13 +4294,7 @@
       </p:sp>
       <p:sp>
         <p:nvSpPr>
-          <p:cNvPr id="4" name="מציין מיקום של כותרת תחתונה 3">
-            <a:extLst>
-              <a:ext uri="{FF2B5EF4-FFF2-40B4-BE49-F238E27FC236}">
-                <a16:creationId xmlns:a16="http://schemas.microsoft.com/office/drawing/2014/main" id="{A460F409-50C2-4D15-B418-C310AFDDE00F}"/>
-              </a:ext>
-            </a:extLst>
-          </p:cNvPr>
+          <p:cNvPr id="4" name="Footer Placeholder 3"/>
           <p:cNvSpPr>
             <a:spLocks noGrp="1"/>
           </p:cNvSpPr>
@@ -1984,13 +4313,7 @@
       </p:sp>
       <p:sp>
         <p:nvSpPr>
-          <p:cNvPr id="5" name="מציין מיקום של מספר שקופית 4">
-            <a:extLst>
-              <a:ext uri="{FF2B5EF4-FFF2-40B4-BE49-F238E27FC236}">
-                <a16:creationId xmlns:a16="http://schemas.microsoft.com/office/drawing/2014/main" id="{21A46940-5E8E-4A8E-B471-4C42D18686AD}"/>
-              </a:ext>
-            </a:extLst>
-          </p:cNvPr>
+          <p:cNvPr id="5" name="Slide Number Placeholder 4"/>
           <p:cNvSpPr>
             <a:spLocks noGrp="1"/>
           </p:cNvSpPr>
@@ -2011,10 +4334,41 @@
           </a:p>
         </p:txBody>
       </p:sp>
+      <p:cxnSp>
+        <p:nvCxnSpPr>
+          <p:cNvPr id="14" name="Straight Connector 13"/>
+          <p:cNvCxnSpPr/>
+          <p:nvPr/>
+        </p:nvCxnSpPr>
+        <p:spPr>
+          <a:xfrm>
+            <a:off x="1396169" y="2421466"/>
+            <a:ext cx="9407298" cy="0"/>
+          </a:xfrm>
+          <a:prstGeom prst="line">
+            <a:avLst/>
+          </a:prstGeom>
+          <a:ln w="15875"/>
+        </p:spPr>
+        <p:style>
+          <a:lnRef idx="2">
+            <a:schemeClr val="accent1"/>
+          </a:lnRef>
+          <a:fillRef idx="0">
+            <a:schemeClr val="accent1"/>
+          </a:fillRef>
+          <a:effectRef idx="1">
+            <a:schemeClr val="accent1"/>
+          </a:effectRef>
+          <a:fontRef idx="minor">
+            <a:schemeClr val="tx1"/>
+          </a:fontRef>
+        </p:style>
+      </p:cxnSp>
     </p:spTree>
     <p:extLst>
       <p:ext uri="{BB962C8B-B14F-4D97-AF65-F5344CB8AC3E}">
-        <p14:creationId xmlns:p14="http://schemas.microsoft.com/office/powerpoint/2010/main" val="1840028566"/>
+        <p14:creationId xmlns:p14="http://schemas.microsoft.com/office/powerpoint/2010/main" val="3990780908"/>
       </p:ext>
     </p:extLst>
   </p:cSld>
@@ -2043,13 +4397,7 @@
       </p:grpSpPr>
       <p:sp>
         <p:nvSpPr>
-          <p:cNvPr id="2" name="מציין מיקום של תאריך 1">
-            <a:extLst>
-              <a:ext uri="{FF2B5EF4-FFF2-40B4-BE49-F238E27FC236}">
-                <a16:creationId xmlns:a16="http://schemas.microsoft.com/office/drawing/2014/main" id="{669BC559-F29B-4382-8AC5-1DA66F04581F}"/>
-              </a:ext>
-            </a:extLst>
-          </p:cNvPr>
+          <p:cNvPr id="2" name="Date Placeholder 1"/>
           <p:cNvSpPr>
             <a:spLocks noGrp="1"/>
           </p:cNvSpPr>
@@ -2064,7 +4412,7 @@
           <a:p>
             <a:fld id="{FF244A5C-CBE4-4F0F-A48D-FEE452A0549D}" type="datetimeFigureOut">
               <a:rPr lang="he-IL" smtClean="0"/>
-              <a:t>י'/שבט/תשפ"ו</a:t>
+              <a:t>י"ד/שבט/תשפ"ו</a:t>
             </a:fld>
             <a:endParaRPr lang="he-IL"/>
           </a:p>
@@ -2072,13 +4420,7 @@
       </p:sp>
       <p:sp>
         <p:nvSpPr>
-          <p:cNvPr id="3" name="מציין מיקום של כותרת תחתונה 2">
-            <a:extLst>
-              <a:ext uri="{FF2B5EF4-FFF2-40B4-BE49-F238E27FC236}">
-                <a16:creationId xmlns:a16="http://schemas.microsoft.com/office/drawing/2014/main" id="{001AA570-3BFF-41BE-8F41-E8DDFED91119}"/>
-              </a:ext>
-            </a:extLst>
-          </p:cNvPr>
+          <p:cNvPr id="3" name="Footer Placeholder 2"/>
           <p:cNvSpPr>
             <a:spLocks noGrp="1"/>
           </p:cNvSpPr>
@@ -2097,13 +4439,7 @@
       </p:sp>
       <p:sp>
         <p:nvSpPr>
-          <p:cNvPr id="4" name="מציין מיקום של מספר שקופית 3">
-            <a:extLst>
-              <a:ext uri="{FF2B5EF4-FFF2-40B4-BE49-F238E27FC236}">
-                <a16:creationId xmlns:a16="http://schemas.microsoft.com/office/drawing/2014/main" id="{B7074716-78EF-45BD-BB26-B151AC0F0723}"/>
-              </a:ext>
-            </a:extLst>
-          </p:cNvPr>
+          <p:cNvPr id="4" name="Slide Number Placeholder 3"/>
           <p:cNvSpPr>
             <a:spLocks noGrp="1"/>
           </p:cNvSpPr>
@@ -2127,7 +4463,7 @@
     </p:spTree>
     <p:extLst>
       <p:ext uri="{BB962C8B-B14F-4D97-AF65-F5344CB8AC3E}">
-        <p14:creationId xmlns:p14="http://schemas.microsoft.com/office/powerpoint/2010/main" val="1051964883"/>
+        <p14:creationId xmlns:p14="http://schemas.microsoft.com/office/powerpoint/2010/main" val="3558343164"/>
       </p:ext>
     </p:extLst>
   </p:cSld>
@@ -2156,13 +4492,7 @@
       </p:grpSpPr>
       <p:sp>
         <p:nvSpPr>
-          <p:cNvPr id="2" name="כותרת 1">
-            <a:extLst>
-              <a:ext uri="{FF2B5EF4-FFF2-40B4-BE49-F238E27FC236}">
-                <a16:creationId xmlns:a16="http://schemas.microsoft.com/office/drawing/2014/main" id="{7BB91D8A-8A8C-4680-B780-288CCE265173}"/>
-              </a:ext>
-            </a:extLst>
-          </p:cNvPr>
+          <p:cNvPr id="2" name="Title 1"/>
           <p:cNvSpPr>
             <a:spLocks noGrp="1"/>
           </p:cNvSpPr>
@@ -2172,15 +4502,17 @@
         </p:nvSpPr>
         <p:spPr>
           <a:xfrm>
-            <a:off x="839788" y="457200"/>
-            <a:ext cx="3932237" cy="1600200"/>
+            <a:off x="1293811" y="1388534"/>
+            <a:ext cx="3718455" cy="1371600"/>
           </a:xfrm>
         </p:spPr>
         <p:txBody>
-          <a:bodyPr anchor="b"/>
+          <a:bodyPr anchor="b">
+            <a:normAutofit/>
+          </a:bodyPr>
           <a:lstStyle>
-            <a:lvl1pPr>
-              <a:defRPr sz="3200"/>
+            <a:lvl1pPr algn="ctr">
+              <a:defRPr sz="2400" b="0"/>
             </a:lvl1pPr>
           </a:lstStyle>
           <a:p>
@@ -2188,18 +4520,13 @@
               <a:rPr lang="he-IL"/>
               <a:t>לחץ כדי לערוך סגנון כותרת של תבנית בסיס</a:t>
             </a:r>
-          </a:p>
-        </p:txBody>
-      </p:sp>
-      <p:sp>
-        <p:nvSpPr>
-          <p:cNvPr id="3" name="מציין מיקום תוכן 2">
-            <a:extLst>
-              <a:ext uri="{FF2B5EF4-FFF2-40B4-BE49-F238E27FC236}">
-                <a16:creationId xmlns:a16="http://schemas.microsoft.com/office/drawing/2014/main" id="{2FEBC54D-ECE8-421A-814E-EA6EE8BE8F08}"/>
-              </a:ext>
-            </a:extLst>
-          </p:cNvPr>
+            <a:endParaRPr lang="en-US" dirty="0"/>
+          </a:p>
+        </p:txBody>
+      </p:sp>
+      <p:sp>
+        <p:nvSpPr>
+          <p:cNvPr id="3" name="Content Placeholder 2"/>
           <p:cNvSpPr>
             <a:spLocks noGrp="1"/>
           </p:cNvSpPr>
@@ -2209,41 +4536,15 @@
         </p:nvSpPr>
         <p:spPr>
           <a:xfrm>
-            <a:off x="5183188" y="987425"/>
-            <a:ext cx="6172200" cy="4873625"/>
+            <a:off x="5418668" y="982131"/>
+            <a:ext cx="5469466" cy="4893735"/>
           </a:xfrm>
         </p:spPr>
         <p:txBody>
-          <a:bodyPr/>
-          <a:lstStyle>
-            <a:lvl1pPr>
-              <a:defRPr sz="3200"/>
-            </a:lvl1pPr>
-            <a:lvl2pPr>
-              <a:defRPr sz="2800"/>
-            </a:lvl2pPr>
-            <a:lvl3pPr>
-              <a:defRPr sz="2400"/>
-            </a:lvl3pPr>
-            <a:lvl4pPr>
-              <a:defRPr sz="2000"/>
-            </a:lvl4pPr>
-            <a:lvl5pPr>
-              <a:defRPr sz="2000"/>
-            </a:lvl5pPr>
-            <a:lvl6pPr>
-              <a:defRPr sz="2000"/>
-            </a:lvl6pPr>
-            <a:lvl7pPr>
-              <a:defRPr sz="2000"/>
-            </a:lvl7pPr>
-            <a:lvl8pPr>
-              <a:defRPr sz="2000"/>
-            </a:lvl8pPr>
-            <a:lvl9pPr>
-              <a:defRPr sz="2000"/>
-            </a:lvl9pPr>
-          </a:lstStyle>
+          <a:bodyPr anchor="ctr">
+            <a:normAutofit/>
+          </a:bodyPr>
+          <a:lstStyle/>
           <a:p>
             <a:pPr lvl="0"/>
             <a:r>
@@ -2278,18 +4579,13 @@
               <a:rPr lang="he-IL"/>
               <a:t>רמה חמישית</a:t>
             </a:r>
-          </a:p>
-        </p:txBody>
-      </p:sp>
-      <p:sp>
-        <p:nvSpPr>
-          <p:cNvPr id="4" name="מציין מיקום טקסט 3">
-            <a:extLst>
-              <a:ext uri="{FF2B5EF4-FFF2-40B4-BE49-F238E27FC236}">
-                <a16:creationId xmlns:a16="http://schemas.microsoft.com/office/drawing/2014/main" id="{379D7A40-3809-40B0-9E76-6D01D21AB77D}"/>
-              </a:ext>
-            </a:extLst>
-          </p:cNvPr>
+            <a:endParaRPr lang="en-US" dirty="0"/>
+          </a:p>
+        </p:txBody>
+      </p:sp>
+      <p:sp>
+        <p:nvSpPr>
+          <p:cNvPr id="4" name="Text Placeholder 3"/>
           <p:cNvSpPr>
             <a:spLocks noGrp="1"/>
           </p:cNvSpPr>
@@ -2299,48 +4595,50 @@
         </p:nvSpPr>
         <p:spPr>
           <a:xfrm>
-            <a:off x="839788" y="2057400"/>
-            <a:ext cx="3932237" cy="3811588"/>
+            <a:off x="1293811" y="3031065"/>
+            <a:ext cx="3718455" cy="2438404"/>
           </a:xfrm>
         </p:spPr>
         <p:txBody>
-          <a:bodyPr/>
+          <a:bodyPr anchor="t">
+            <a:normAutofit/>
+          </a:bodyPr>
           <a:lstStyle>
-            <a:lvl1pPr marL="0" indent="0">
+            <a:lvl1pPr marL="0" indent="0" algn="ctr">
               <a:buNone/>
               <a:defRPr sz="1600"/>
             </a:lvl1pPr>
             <a:lvl2pPr marL="457200" indent="0">
               <a:buNone/>
-              <a:defRPr sz="1400"/>
+              <a:defRPr sz="1200"/>
             </a:lvl2pPr>
             <a:lvl3pPr marL="914400" indent="0">
               <a:buNone/>
-              <a:defRPr sz="1200"/>
+              <a:defRPr sz="1000"/>
             </a:lvl3pPr>
             <a:lvl4pPr marL="1371600" indent="0">
               <a:buNone/>
-              <a:defRPr sz="1000"/>
+              <a:defRPr sz="900"/>
             </a:lvl4pPr>
             <a:lvl5pPr marL="1828800" indent="0">
               <a:buNone/>
-              <a:defRPr sz="1000"/>
+              <a:defRPr sz="900"/>
             </a:lvl5pPr>
             <a:lvl6pPr marL="2286000" indent="0">
               <a:buNone/>
-              <a:defRPr sz="1000"/>
+              <a:defRPr sz="900"/>
             </a:lvl6pPr>
             <a:lvl7pPr marL="2743200" indent="0">
               <a:buNone/>
-              <a:defRPr sz="1000"/>
+              <a:defRPr sz="900"/>
             </a:lvl7pPr>
             <a:lvl8pPr marL="3200400" indent="0">
               <a:buNone/>
-              <a:defRPr sz="1000"/>
+              <a:defRPr sz="900"/>
             </a:lvl8pPr>
             <a:lvl9pPr marL="3657600" indent="0">
               <a:buNone/>
-              <a:defRPr sz="1000"/>
+              <a:defRPr sz="900"/>
             </a:lvl9pPr>
           </a:lstStyle>
           <a:p>
@@ -2354,13 +4652,7 @@
       </p:sp>
       <p:sp>
         <p:nvSpPr>
-          <p:cNvPr id="5" name="מציין מיקום של תאריך 4">
-            <a:extLst>
-              <a:ext uri="{FF2B5EF4-FFF2-40B4-BE49-F238E27FC236}">
-                <a16:creationId xmlns:a16="http://schemas.microsoft.com/office/drawing/2014/main" id="{58F7BA4F-D012-4127-BAC5-86C897774B66}"/>
-              </a:ext>
-            </a:extLst>
-          </p:cNvPr>
+          <p:cNvPr id="5" name="Date Placeholder 4"/>
           <p:cNvSpPr>
             <a:spLocks noGrp="1"/>
           </p:cNvSpPr>
@@ -2375,7 +4667,7 @@
           <a:p>
             <a:fld id="{FF244A5C-CBE4-4F0F-A48D-FEE452A0549D}" type="datetimeFigureOut">
               <a:rPr lang="he-IL" smtClean="0"/>
-              <a:t>י'/שבט/תשפ"ו</a:t>
+              <a:t>י"ד/שבט/תשפ"ו</a:t>
             </a:fld>
             <a:endParaRPr lang="he-IL"/>
           </a:p>
@@ -2383,13 +4675,7 @@
       </p:sp>
       <p:sp>
         <p:nvSpPr>
-          <p:cNvPr id="6" name="מציין מיקום של כותרת תחתונה 5">
-            <a:extLst>
-              <a:ext uri="{FF2B5EF4-FFF2-40B4-BE49-F238E27FC236}">
-                <a16:creationId xmlns:a16="http://schemas.microsoft.com/office/drawing/2014/main" id="{FB18919F-3639-4404-A350-8F1983AEB5A5}"/>
-              </a:ext>
-            </a:extLst>
-          </p:cNvPr>
+          <p:cNvPr id="6" name="Footer Placeholder 5"/>
           <p:cNvSpPr>
             <a:spLocks noGrp="1"/>
           </p:cNvSpPr>
@@ -2408,13 +4694,7 @@
       </p:sp>
       <p:sp>
         <p:nvSpPr>
-          <p:cNvPr id="7" name="מציין מיקום של מספר שקופית 6">
-            <a:extLst>
-              <a:ext uri="{FF2B5EF4-FFF2-40B4-BE49-F238E27FC236}">
-                <a16:creationId xmlns:a16="http://schemas.microsoft.com/office/drawing/2014/main" id="{AFE67C08-385A-4359-969E-BC8EEABC65D6}"/>
-              </a:ext>
-            </a:extLst>
-          </p:cNvPr>
+          <p:cNvPr id="7" name="Slide Number Placeholder 6"/>
           <p:cNvSpPr>
             <a:spLocks noGrp="1"/>
           </p:cNvSpPr>
@@ -2435,10 +4715,41 @@
           </a:p>
         </p:txBody>
       </p:sp>
+      <p:cxnSp>
+        <p:nvCxnSpPr>
+          <p:cNvPr id="16" name="Straight Connector 15"/>
+          <p:cNvCxnSpPr/>
+          <p:nvPr/>
+        </p:nvCxnSpPr>
+        <p:spPr>
+          <a:xfrm>
+            <a:off x="1396169" y="2912533"/>
+            <a:ext cx="3514498" cy="0"/>
+          </a:xfrm>
+          <a:prstGeom prst="line">
+            <a:avLst/>
+          </a:prstGeom>
+          <a:ln w="15875"/>
+        </p:spPr>
+        <p:style>
+          <a:lnRef idx="2">
+            <a:schemeClr val="accent1"/>
+          </a:lnRef>
+          <a:fillRef idx="0">
+            <a:schemeClr val="accent1"/>
+          </a:fillRef>
+          <a:effectRef idx="1">
+            <a:schemeClr val="accent1"/>
+          </a:effectRef>
+          <a:fontRef idx="minor">
+            <a:schemeClr val="tx1"/>
+          </a:fontRef>
+        </p:style>
+      </p:cxnSp>
     </p:spTree>
     <p:extLst>
       <p:ext uri="{BB962C8B-B14F-4D97-AF65-F5344CB8AC3E}">
-        <p14:creationId xmlns:p14="http://schemas.microsoft.com/office/powerpoint/2010/main" val="2062382575"/>
+        <p14:creationId xmlns:p14="http://schemas.microsoft.com/office/powerpoint/2010/main" val="2503065139"/>
       </p:ext>
     </p:extLst>
   </p:cSld>
@@ -2467,13 +4778,7 @@
       </p:grpSpPr>
       <p:sp>
         <p:nvSpPr>
-          <p:cNvPr id="2" name="כותרת 1">
-            <a:extLst>
-              <a:ext uri="{FF2B5EF4-FFF2-40B4-BE49-F238E27FC236}">
-                <a16:creationId xmlns:a16="http://schemas.microsoft.com/office/drawing/2014/main" id="{F6864767-9D33-41F4-B419-F050904E8338}"/>
-              </a:ext>
-            </a:extLst>
-          </p:cNvPr>
+          <p:cNvPr id="2" name="Title 1"/>
           <p:cNvSpPr>
             <a:spLocks noGrp="1"/>
           </p:cNvSpPr>
@@ -2483,15 +4788,17 @@
         </p:nvSpPr>
         <p:spPr>
           <a:xfrm>
-            <a:off x="839788" y="457200"/>
-            <a:ext cx="3932237" cy="1600200"/>
+            <a:off x="1295399" y="1883832"/>
+            <a:ext cx="6241816" cy="1371600"/>
           </a:xfrm>
         </p:spPr>
         <p:txBody>
-          <a:bodyPr anchor="b"/>
+          <a:bodyPr anchor="b">
+            <a:normAutofit/>
+          </a:bodyPr>
           <a:lstStyle>
-            <a:lvl1pPr>
-              <a:defRPr sz="3200"/>
+            <a:lvl1pPr algn="ctr">
+              <a:defRPr sz="2800" b="0"/>
             </a:lvl1pPr>
           </a:lstStyle>
           <a:p>
@@ -2499,20 +4806,15 @@
               <a:rPr lang="he-IL"/>
               <a:t>לחץ כדי לערוך סגנון כותרת של תבנית בסיס</a:t>
             </a:r>
-          </a:p>
-        </p:txBody>
-      </p:sp>
-      <p:sp>
-        <p:nvSpPr>
-          <p:cNvPr id="3" name="מציין מיקום של תמונה 2">
-            <a:extLst>
-              <a:ext uri="{FF2B5EF4-FFF2-40B4-BE49-F238E27FC236}">
-                <a16:creationId xmlns:a16="http://schemas.microsoft.com/office/drawing/2014/main" id="{9740C904-860B-4EE6-9800-8ED14F37B329}"/>
-              </a:ext>
-            </a:extLst>
-          </p:cNvPr>
-          <p:cNvSpPr>
-            <a:spLocks noGrp="1"/>
+            <a:endParaRPr lang="en-US" dirty="0"/>
+          </a:p>
+        </p:txBody>
+      </p:sp>
+      <p:sp>
+        <p:nvSpPr>
+          <p:cNvPr id="17" name="Picture Placeholder 2"/>
+          <p:cNvSpPr>
+            <a:spLocks noGrp="1" noChangeAspect="1"/>
           </p:cNvSpPr>
           <p:nvPr>
             <p:ph type="pic" idx="1"/>
@@ -2520,118 +4822,141 @@
         </p:nvSpPr>
         <p:spPr>
           <a:xfrm>
-            <a:off x="5183188" y="987425"/>
-            <a:ext cx="6172200" cy="4873625"/>
+            <a:off x="8094831" y="1041400"/>
+            <a:ext cx="3063347" cy="4775200"/>
           </a:xfrm>
+          <a:prstGeom prst="roundRect">
+            <a:avLst>
+              <a:gd name="adj" fmla="val 0"/>
+            </a:avLst>
+          </a:prstGeom>
+          <a:ln w="57150" cmpd="thickThin">
+            <a:solidFill>
+              <a:schemeClr val="tx1">
+                <a:lumMod val="50000"/>
+                <a:lumOff val="50000"/>
+              </a:schemeClr>
+            </a:solidFill>
+            <a:miter lim="800000"/>
+          </a:ln>
+          <a:effectLst>
+            <a:innerShdw blurRad="57150" dist="38100" dir="14460000">
+              <a:srgbClr val="000000">
+                <a:alpha val="70000"/>
+              </a:srgbClr>
+            </a:innerShdw>
+          </a:effectLst>
         </p:spPr>
         <p:txBody>
-          <a:bodyPr/>
+          <a:bodyPr anchor="t">
+            <a:normAutofit/>
+          </a:bodyPr>
           <a:lstStyle>
-            <a:lvl1pPr marL="0" indent="0">
-              <a:buNone/>
-              <a:defRPr sz="3200"/>
-            </a:lvl1pPr>
-            <a:lvl2pPr marL="457200" indent="0">
-              <a:buNone/>
-              <a:defRPr sz="2800"/>
-            </a:lvl2pPr>
-            <a:lvl3pPr marL="914400" indent="0">
-              <a:buNone/>
-              <a:defRPr sz="2400"/>
-            </a:lvl3pPr>
-            <a:lvl4pPr marL="1371600" indent="0">
-              <a:buNone/>
-              <a:defRPr sz="2000"/>
-            </a:lvl4pPr>
-            <a:lvl5pPr marL="1828800" indent="0">
-              <a:buNone/>
-              <a:defRPr sz="2000"/>
-            </a:lvl5pPr>
-            <a:lvl6pPr marL="2286000" indent="0">
-              <a:buNone/>
-              <a:defRPr sz="2000"/>
-            </a:lvl6pPr>
-            <a:lvl7pPr marL="2743200" indent="0">
-              <a:buNone/>
-              <a:defRPr sz="2000"/>
-            </a:lvl7pPr>
-            <a:lvl8pPr marL="3200400" indent="0">
-              <a:buNone/>
-              <a:defRPr sz="2000"/>
-            </a:lvl8pPr>
-            <a:lvl9pPr marL="3657600" indent="0">
-              <a:buNone/>
-              <a:defRPr sz="2000"/>
-            </a:lvl9pPr>
-          </a:lstStyle>
-          <a:p>
-            <a:endParaRPr lang="he-IL"/>
-          </a:p>
-        </p:txBody>
-      </p:sp>
-      <p:sp>
-        <p:nvSpPr>
-          <p:cNvPr id="4" name="מציין מיקום טקסט 3">
-            <a:extLst>
-              <a:ext uri="{FF2B5EF4-FFF2-40B4-BE49-F238E27FC236}">
-                <a16:creationId xmlns:a16="http://schemas.microsoft.com/office/drawing/2014/main" id="{23CCB0A9-AACE-42ED-B45B-E7835F352A5F}"/>
-              </a:ext>
-            </a:extLst>
-          </p:cNvPr>
-          <p:cNvSpPr>
-            <a:spLocks noGrp="1"/>
-          </p:cNvSpPr>
-          <p:nvPr>
-            <p:ph type="body" sz="half" idx="2"/>
-          </p:nvPr>
-        </p:nvSpPr>
-        <p:spPr>
-          <a:xfrm>
-            <a:off x="839788" y="2057400"/>
-            <a:ext cx="3932237" cy="3811588"/>
-          </a:xfrm>
-        </p:spPr>
-        <p:txBody>
-          <a:bodyPr/>
-          <a:lstStyle>
-            <a:lvl1pPr marL="0" indent="0">
+            <a:lvl1pPr marL="0" indent="0" algn="ctr">
               <a:buNone/>
               <a:defRPr sz="1600"/>
             </a:lvl1pPr>
             <a:lvl2pPr marL="457200" indent="0">
               <a:buNone/>
-              <a:defRPr sz="1400"/>
+              <a:defRPr sz="1600"/>
             </a:lvl2pPr>
             <a:lvl3pPr marL="914400" indent="0">
               <a:buNone/>
-              <a:defRPr sz="1200"/>
+              <a:defRPr sz="1600"/>
             </a:lvl3pPr>
             <a:lvl4pPr marL="1371600" indent="0">
               <a:buNone/>
-              <a:defRPr sz="1000"/>
+              <a:defRPr sz="1600"/>
             </a:lvl4pPr>
             <a:lvl5pPr marL="1828800" indent="0">
               <a:buNone/>
-              <a:defRPr sz="1000"/>
+              <a:defRPr sz="1600"/>
             </a:lvl5pPr>
             <a:lvl6pPr marL="2286000" indent="0">
               <a:buNone/>
-              <a:defRPr sz="1000"/>
+              <a:defRPr sz="1600"/>
             </a:lvl6pPr>
             <a:lvl7pPr marL="2743200" indent="0">
               <a:buNone/>
-              <a:defRPr sz="1000"/>
+              <a:defRPr sz="1600"/>
             </a:lvl7pPr>
             <a:lvl8pPr marL="3200400" indent="0">
               <a:buNone/>
-              <a:defRPr sz="1000"/>
+              <a:defRPr sz="1600"/>
             </a:lvl8pPr>
             <a:lvl9pPr marL="3657600" indent="0">
               <a:buNone/>
-              <a:defRPr sz="1000"/>
+              <a:defRPr sz="1600"/>
             </a:lvl9pPr>
           </a:lstStyle>
           <a:p>
+            <a:r>
+              <a:rPr lang="he-IL"/>
+              <a:t>לחץ על הסמל כדי להוסיף תמונה</a:t>
+            </a:r>
+            <a:endParaRPr lang="en-US" dirty="0"/>
+          </a:p>
+        </p:txBody>
+      </p:sp>
+      <p:sp>
+        <p:nvSpPr>
+          <p:cNvPr id="4" name="Text Placeholder 3"/>
+          <p:cNvSpPr>
+            <a:spLocks noGrp="1"/>
+          </p:cNvSpPr>
+          <p:nvPr>
+            <p:ph type="body" sz="half" idx="2"/>
+          </p:nvPr>
+        </p:nvSpPr>
+        <p:spPr>
+          <a:xfrm>
+            <a:off x="1295399" y="3255432"/>
+            <a:ext cx="6241816" cy="1828800"/>
+          </a:xfrm>
+        </p:spPr>
+        <p:txBody>
+          <a:bodyPr anchor="t">
+            <a:normAutofit/>
+          </a:bodyPr>
+          <a:lstStyle>
+            <a:lvl1pPr marL="0" indent="0" algn="ctr">
+              <a:buNone/>
+              <a:defRPr sz="1800"/>
+            </a:lvl1pPr>
+            <a:lvl2pPr marL="457200" indent="0">
+              <a:buNone/>
+              <a:defRPr sz="1200"/>
+            </a:lvl2pPr>
+            <a:lvl3pPr marL="914400" indent="0">
+              <a:buNone/>
+              <a:defRPr sz="1000"/>
+            </a:lvl3pPr>
+            <a:lvl4pPr marL="1371600" indent="0">
+              <a:buNone/>
+              <a:defRPr sz="900"/>
+            </a:lvl4pPr>
+            <a:lvl5pPr marL="1828800" indent="0">
+              <a:buNone/>
+              <a:defRPr sz="900"/>
+            </a:lvl5pPr>
+            <a:lvl6pPr marL="2286000" indent="0">
+              <a:buNone/>
+              <a:defRPr sz="900"/>
+            </a:lvl6pPr>
+            <a:lvl7pPr marL="2743200" indent="0">
+              <a:buNone/>
+              <a:defRPr sz="900"/>
+            </a:lvl7pPr>
+            <a:lvl8pPr marL="3200400" indent="0">
+              <a:buNone/>
+              <a:defRPr sz="900"/>
+            </a:lvl8pPr>
+            <a:lvl9pPr marL="3657600" indent="0">
+              <a:buNone/>
+              <a:defRPr sz="900"/>
+            </a:lvl9pPr>
+          </a:lstStyle>
+          <a:p>
             <a:pPr lvl="0"/>
             <a:r>
               <a:rPr lang="he-IL"/>
@@ -2642,13 +4967,7 @@
       </p:sp>
       <p:sp>
         <p:nvSpPr>
-          <p:cNvPr id="5" name="מציין מיקום של תאריך 4">
-            <a:extLst>
-              <a:ext uri="{FF2B5EF4-FFF2-40B4-BE49-F238E27FC236}">
-                <a16:creationId xmlns:a16="http://schemas.microsoft.com/office/drawing/2014/main" id="{C2EE51A6-87DB-4615-9F34-99168ABA68F4}"/>
-              </a:ext>
-            </a:extLst>
-          </p:cNvPr>
+          <p:cNvPr id="5" name="Date Placeholder 4"/>
           <p:cNvSpPr>
             <a:spLocks noGrp="1"/>
           </p:cNvSpPr>
@@ -2663,7 +4982,7 @@
           <a:p>
             <a:fld id="{FF244A5C-CBE4-4F0F-A48D-FEE452A0549D}" type="datetimeFigureOut">
               <a:rPr lang="he-IL" smtClean="0"/>
-              <a:t>י'/שבט/תשפ"ו</a:t>
+              <a:t>י"ד/שבט/תשפ"ו</a:t>
             </a:fld>
             <a:endParaRPr lang="he-IL"/>
           </a:p>
@@ -2671,13 +4990,7 @@
       </p:sp>
       <p:sp>
         <p:nvSpPr>
-          <p:cNvPr id="6" name="מציין מיקום של כותרת תחתונה 5">
-            <a:extLst>
-              <a:ext uri="{FF2B5EF4-FFF2-40B4-BE49-F238E27FC236}">
-                <a16:creationId xmlns:a16="http://schemas.microsoft.com/office/drawing/2014/main" id="{DC0AA263-4696-4C38-BCAA-C831E2C196D7}"/>
-              </a:ext>
-            </a:extLst>
-          </p:cNvPr>
+          <p:cNvPr id="6" name="Footer Placeholder 5"/>
           <p:cNvSpPr>
             <a:spLocks noGrp="1"/>
           </p:cNvSpPr>
@@ -2696,13 +5009,7 @@
       </p:sp>
       <p:sp>
         <p:nvSpPr>
-          <p:cNvPr id="7" name="מציין מיקום של מספר שקופית 6">
-            <a:extLst>
-              <a:ext uri="{FF2B5EF4-FFF2-40B4-BE49-F238E27FC236}">
-                <a16:creationId xmlns:a16="http://schemas.microsoft.com/office/drawing/2014/main" id="{FC3F2D3E-A071-4761-B468-BEDE2F7AA63F}"/>
-              </a:ext>
-            </a:extLst>
-          </p:cNvPr>
+          <p:cNvPr id="7" name="Slide Number Placeholder 6"/>
           <p:cNvSpPr>
             <a:spLocks noGrp="1"/>
           </p:cNvSpPr>
@@ -2726,7 +5033,7 @@
     </p:spTree>
     <p:extLst>
       <p:ext uri="{BB962C8B-B14F-4D97-AF65-F5344CB8AC3E}">
-        <p14:creationId xmlns:p14="http://schemas.microsoft.com/office/powerpoint/2010/main" val="3075737897"/>
+        <p14:creationId xmlns:p14="http://schemas.microsoft.com/office/powerpoint/2010/main" val="3414261612"/>
       </p:ext>
     </p:extLst>
   </p:cSld>
@@ -2740,7 +5047,7 @@
 <p:sldMaster xmlns:a="http://schemas.openxmlformats.org/drawingml/2006/main" xmlns:r="http://schemas.openxmlformats.org/officeDocument/2006/relationships" xmlns:p="http://schemas.openxmlformats.org/presentationml/2006/main">
   <p:cSld>
     <p:bg>
-      <p:bgRef idx="1001">
+      <p:bgRef idx="1003">
         <a:schemeClr val="bg1"/>
       </p:bgRef>
     </p:bg>
@@ -2758,15 +5065,146 @@
           <a:chExt cx="0" cy="0"/>
         </a:xfrm>
       </p:grpSpPr>
-      <p:sp>
-        <p:nvSpPr>
-          <p:cNvPr id="2" name="מציין מיקום של כותרת 1">
-            <a:extLst>
-              <a:ext uri="{FF2B5EF4-FFF2-40B4-BE49-F238E27FC236}">
-                <a16:creationId xmlns:a16="http://schemas.microsoft.com/office/drawing/2014/main" id="{5CB670A2-CB1B-403B-BFCA-59B011A3D04C}"/>
-              </a:ext>
-            </a:extLst>
-          </p:cNvPr>
+      <p:grpSp>
+        <p:nvGrpSpPr>
+          <p:cNvPr id="7" name="Group 6"/>
+          <p:cNvGrpSpPr/>
+          <p:nvPr/>
+        </p:nvGrpSpPr>
+        <p:grpSpPr>
+          <a:xfrm>
+            <a:off x="-15736" y="0"/>
+            <a:ext cx="12229962" cy="6856214"/>
+            <a:chOff x="-15736" y="0"/>
+            <a:chExt cx="12229962" cy="6856214"/>
+          </a:xfrm>
+        </p:grpSpPr>
+        <p:pic>
+          <p:nvPicPr>
+            <p:cNvPr id="8" name="Picture 7" descr="HD-PanelContent.png"/>
+            <p:cNvPicPr>
+              <a:picLocks noChangeAspect="1"/>
+            </p:cNvPicPr>
+            <p:nvPr/>
+          </p:nvPicPr>
+          <p:blipFill>
+            <a:blip r:embed="rId19">
+              <a:extLst>
+                <a:ext uri="{28A0092B-C50C-407E-A947-70E740481C1C}">
+                  <a14:useLocalDpi xmlns:a14="http://schemas.microsoft.com/office/drawing/2010/main" val="0"/>
+                </a:ext>
+              </a:extLst>
+            </a:blip>
+            <a:stretch>
+              <a:fillRect/>
+            </a:stretch>
+          </p:blipFill>
+          <p:spPr>
+            <a:xfrm>
+              <a:off x="0" y="0"/>
+              <a:ext cx="12188825" cy="6856214"/>
+            </a:xfrm>
+            <a:prstGeom prst="rect">
+              <a:avLst/>
+            </a:prstGeom>
+          </p:spPr>
+        </p:pic>
+        <p:sp>
+          <p:nvSpPr>
+            <p:cNvPr id="9" name="Rectangle 8"/>
+            <p:cNvSpPr/>
+            <p:nvPr/>
+          </p:nvSpPr>
+          <p:spPr>
+            <a:xfrm>
+              <a:off x="608012" y="609600"/>
+              <a:ext cx="10972800" cy="5638800"/>
+            </a:xfrm>
+            <a:prstGeom prst="rect">
+              <a:avLst/>
+            </a:prstGeom>
+            <a:noFill/>
+            <a:ln w="15875" cap="flat">
+              <a:miter lim="800000"/>
+            </a:ln>
+          </p:spPr>
+          <p:style>
+            <a:lnRef idx="1">
+              <a:schemeClr val="accent1"/>
+            </a:lnRef>
+            <a:fillRef idx="3">
+              <a:schemeClr val="accent1"/>
+            </a:fillRef>
+            <a:effectRef idx="2">
+              <a:schemeClr val="accent1"/>
+            </a:effectRef>
+            <a:fontRef idx="minor">
+              <a:schemeClr val="lt1"/>
+            </a:fontRef>
+          </p:style>
+        </p:sp>
+        <p:pic>
+          <p:nvPicPr>
+            <p:cNvPr id="10" name="Picture 9" descr="HDRibbonContent-UniformTrim.png"/>
+            <p:cNvPicPr>
+              <a:picLocks noChangeAspect="1"/>
+            </p:cNvPicPr>
+            <p:nvPr/>
+          </p:nvPicPr>
+          <p:blipFill rotWithShape="1">
+            <a:blip r:embed="rId20">
+              <a:extLst>
+                <a:ext uri="{28A0092B-C50C-407E-A947-70E740481C1C}">
+                  <a14:useLocalDpi xmlns:a14="http://schemas.microsoft.com/office/drawing/2010/main" val="0"/>
+                </a:ext>
+              </a:extLst>
+            </a:blip>
+            <a:srcRect/>
+            <a:stretch/>
+          </p:blipFill>
+          <p:spPr>
+            <a:xfrm>
+              <a:off x="-15736" y="3153832"/>
+              <a:ext cx="777240" cy="606425"/>
+            </a:xfrm>
+            <a:prstGeom prst="rect">
+              <a:avLst/>
+            </a:prstGeom>
+          </p:spPr>
+        </p:pic>
+        <p:pic>
+          <p:nvPicPr>
+            <p:cNvPr id="11" name="Picture 10" descr="HDRibbonContent-UniformTrim.png"/>
+            <p:cNvPicPr>
+              <a:picLocks noChangeAspect="1"/>
+            </p:cNvPicPr>
+            <p:nvPr/>
+          </p:nvPicPr>
+          <p:blipFill rotWithShape="1">
+            <a:blip r:embed="rId20">
+              <a:extLst>
+                <a:ext uri="{28A0092B-C50C-407E-A947-70E740481C1C}">
+                  <a14:useLocalDpi xmlns:a14="http://schemas.microsoft.com/office/drawing/2010/main" val="0"/>
+                </a:ext>
+              </a:extLst>
+            </a:blip>
+            <a:srcRect/>
+            <a:stretch/>
+          </p:blipFill>
+          <p:spPr>
+            <a:xfrm>
+              <a:off x="11436986" y="3153832"/>
+              <a:ext cx="777240" cy="606425"/>
+            </a:xfrm>
+            <a:prstGeom prst="rect">
+              <a:avLst/>
+            </a:prstGeom>
+          </p:spPr>
+        </p:pic>
+      </p:grpSp>
+      <p:sp>
+        <p:nvSpPr>
+          <p:cNvPr id="2" name="Title Placeholder 1"/>
           <p:cNvSpPr>
             <a:spLocks noGrp="1"/>
           </p:cNvSpPr>
@@ -2776,218 +5214,197 @@
         </p:nvSpPr>
         <p:spPr>
           <a:xfrm>
-            <a:off x="838200" y="365125"/>
-            <a:ext cx="10515600" cy="1325563"/>
+            <a:off x="1295402" y="982132"/>
+            <a:ext cx="9601196" cy="1303867"/>
+          </a:xfrm>
+          <a:prstGeom prst="rect">
+            <a:avLst/>
+          </a:prstGeom>
+          <a:effectLst/>
+        </p:spPr>
+        <p:txBody>
+          <a:bodyPr vert="horz" lIns="91440" tIns="45720" rIns="91440" bIns="45720" rtlCol="0" anchor="ctr">
+            <a:normAutofit/>
+          </a:bodyPr>
+          <a:lstStyle/>
+          <a:p>
+            <a:r>
+              <a:rPr lang="he-IL"/>
+              <a:t>לחץ כדי לערוך סגנון כותרת של תבנית בסיס</a:t>
+            </a:r>
+            <a:endParaRPr lang="en-US" dirty="0"/>
+          </a:p>
+        </p:txBody>
+      </p:sp>
+      <p:sp>
+        <p:nvSpPr>
+          <p:cNvPr id="3" name="Text Placeholder 2"/>
+          <p:cNvSpPr>
+            <a:spLocks noGrp="1"/>
+          </p:cNvSpPr>
+          <p:nvPr>
+            <p:ph type="body" idx="1"/>
+          </p:nvPr>
+        </p:nvSpPr>
+        <p:spPr>
+          <a:xfrm>
+            <a:off x="1295401" y="2556932"/>
+            <a:ext cx="9601196" cy="3318936"/>
           </a:xfrm>
           <a:prstGeom prst="rect">
             <a:avLst/>
           </a:prstGeom>
         </p:spPr>
         <p:txBody>
-          <a:bodyPr vert="horz" lIns="91440" tIns="45720" rIns="91440" bIns="45720" rtlCol="1" anchor="ctr">
+          <a:bodyPr vert="horz" lIns="91440" tIns="45720" rIns="91440" bIns="45720" rtlCol="0" anchor="t">
             <a:normAutofit/>
           </a:bodyPr>
           <a:lstStyle/>
           <a:p>
-            <a:r>
-              <a:rPr lang="he-IL"/>
-              <a:t>לחץ כדי לערוך סגנון כותרת של תבנית בסיס</a:t>
-            </a:r>
-          </a:p>
-        </p:txBody>
-      </p:sp>
-      <p:sp>
-        <p:nvSpPr>
-          <p:cNvPr id="3" name="מציין מיקום טקסט 2">
-            <a:extLst>
-              <a:ext uri="{FF2B5EF4-FFF2-40B4-BE49-F238E27FC236}">
-                <a16:creationId xmlns:a16="http://schemas.microsoft.com/office/drawing/2014/main" id="{4D34A5E5-34B4-42AA-AB55-32F186DB75ED}"/>
-              </a:ext>
-            </a:extLst>
-          </p:cNvPr>
-          <p:cNvSpPr>
-            <a:spLocks noGrp="1"/>
-          </p:cNvSpPr>
-          <p:nvPr>
-            <p:ph type="body" idx="1"/>
+            <a:pPr lvl="0"/>
+            <a:r>
+              <a:rPr lang="he-IL"/>
+              <a:t>לחץ כדי לערוך סגנונות טקסט של תבנית בסיס</a:t>
+            </a:r>
+          </a:p>
+          <a:p>
+            <a:pPr lvl="1"/>
+            <a:r>
+              <a:rPr lang="he-IL"/>
+              <a:t>רמה שנייה</a:t>
+            </a:r>
+          </a:p>
+          <a:p>
+            <a:pPr lvl="2"/>
+            <a:r>
+              <a:rPr lang="he-IL"/>
+              <a:t>רמה שלישית</a:t>
+            </a:r>
+          </a:p>
+          <a:p>
+            <a:pPr lvl="3"/>
+            <a:r>
+              <a:rPr lang="he-IL"/>
+              <a:t>רמה רביעית</a:t>
+            </a:r>
+          </a:p>
+          <a:p>
+            <a:pPr lvl="4"/>
+            <a:r>
+              <a:rPr lang="he-IL"/>
+              <a:t>רמה חמישית</a:t>
+            </a:r>
+            <a:endParaRPr lang="en-US" dirty="0"/>
+          </a:p>
+        </p:txBody>
+      </p:sp>
+      <p:sp>
+        <p:nvSpPr>
+          <p:cNvPr id="4" name="Date Placeholder 3"/>
+          <p:cNvSpPr>
+            <a:spLocks noGrp="1"/>
+          </p:cNvSpPr>
+          <p:nvPr>
+            <p:ph type="dt" sz="half" idx="2"/>
           </p:nvPr>
         </p:nvSpPr>
         <p:spPr>
           <a:xfrm>
-            <a:off x="838200" y="1825625"/>
-            <a:ext cx="10515600" cy="4351338"/>
+            <a:off x="8677501" y="5969000"/>
+            <a:ext cx="1600200" cy="279400"/>
           </a:xfrm>
           <a:prstGeom prst="rect">
             <a:avLst/>
           </a:prstGeom>
         </p:spPr>
         <p:txBody>
-          <a:bodyPr vert="horz" lIns="91440" tIns="45720" rIns="91440" bIns="45720" rtlCol="1">
-            <a:normAutofit/>
-          </a:bodyPr>
-          <a:lstStyle/>
-          <a:p>
-            <a:pPr lvl="0"/>
-            <a:r>
-              <a:rPr lang="he-IL"/>
-              <a:t>לחץ כדי לערוך סגנונות טקסט של תבנית בסיס</a:t>
-            </a:r>
-          </a:p>
-          <a:p>
-            <a:pPr lvl="1"/>
-            <a:r>
-              <a:rPr lang="he-IL"/>
-              <a:t>רמה שנייה</a:t>
-            </a:r>
-          </a:p>
-          <a:p>
-            <a:pPr lvl="2"/>
-            <a:r>
-              <a:rPr lang="he-IL"/>
-              <a:t>רמה שלישית</a:t>
-            </a:r>
-          </a:p>
-          <a:p>
-            <a:pPr lvl="3"/>
-            <a:r>
-              <a:rPr lang="he-IL"/>
-              <a:t>רמה רביעית</a:t>
-            </a:r>
-          </a:p>
-          <a:p>
-            <a:pPr lvl="4"/>
-            <a:r>
-              <a:rPr lang="he-IL"/>
-              <a:t>רמה חמישית</a:t>
-            </a:r>
-          </a:p>
-        </p:txBody>
-      </p:sp>
-      <p:sp>
-        <p:nvSpPr>
-          <p:cNvPr id="4" name="מציין מיקום של תאריך 3">
-            <a:extLst>
-              <a:ext uri="{FF2B5EF4-FFF2-40B4-BE49-F238E27FC236}">
-                <a16:creationId xmlns:a16="http://schemas.microsoft.com/office/drawing/2014/main" id="{22BBF910-ADFD-4423-9995-924DC2EDFA0A}"/>
-              </a:ext>
-            </a:extLst>
-          </p:cNvPr>
-          <p:cNvSpPr>
-            <a:spLocks noGrp="1"/>
-          </p:cNvSpPr>
-          <p:nvPr>
-            <p:ph type="dt" sz="half" idx="2"/>
+          <a:bodyPr vert="horz" lIns="91440" tIns="45720" rIns="91440" bIns="45720" rtlCol="0" anchor="ctr"/>
+          <a:lstStyle>
+            <a:lvl1pPr algn="r">
+              <a:defRPr sz="1000" b="0" i="0">
+                <a:solidFill>
+                  <a:schemeClr val="tx1"/>
+                </a:solidFill>
+                <a:effectLst/>
+                <a:latin typeface="+mn-lt"/>
+              </a:defRPr>
+            </a:lvl1pPr>
+          </a:lstStyle>
+          <a:p>
+            <a:fld id="{FF244A5C-CBE4-4F0F-A48D-FEE452A0549D}" type="datetimeFigureOut">
+              <a:rPr lang="he-IL" smtClean="0"/>
+              <a:t>י"ד/שבט/תשפ"ו</a:t>
+            </a:fld>
+            <a:endParaRPr lang="he-IL"/>
+          </a:p>
+        </p:txBody>
+      </p:sp>
+      <p:sp>
+        <p:nvSpPr>
+          <p:cNvPr id="5" name="Footer Placeholder 4"/>
+          <p:cNvSpPr>
+            <a:spLocks noGrp="1"/>
+          </p:cNvSpPr>
+          <p:nvPr>
+            <p:ph type="ftr" sz="quarter" idx="3"/>
           </p:nvPr>
         </p:nvSpPr>
         <p:spPr>
           <a:xfrm>
-            <a:off x="8610600" y="6356350"/>
-            <a:ext cx="2743200" cy="365125"/>
+            <a:off x="1295401" y="5969000"/>
+            <a:ext cx="7305900" cy="279400"/>
           </a:xfrm>
           <a:prstGeom prst="rect">
             <a:avLst/>
           </a:prstGeom>
         </p:spPr>
         <p:txBody>
-          <a:bodyPr vert="horz" lIns="91440" tIns="45720" rIns="91440" bIns="45720" rtlCol="1" anchor="ctr"/>
+          <a:bodyPr vert="horz" lIns="91440" tIns="45720" rIns="91440" bIns="45720" rtlCol="0" anchor="ctr"/>
           <a:lstStyle>
-            <a:lvl1pPr algn="r">
-              <a:defRPr sz="1200">
-                <a:solidFill>
-                  <a:schemeClr val="tx1">
-                    <a:tint val="75000"/>
-                  </a:schemeClr>
-                </a:solidFill>
+            <a:lvl1pPr algn="l">
+              <a:defRPr sz="1000" b="0" i="0">
+                <a:solidFill>
+                  <a:schemeClr val="tx1"/>
+                </a:solidFill>
+                <a:effectLst/>
+                <a:latin typeface="+mn-lt"/>
               </a:defRPr>
             </a:lvl1pPr>
           </a:lstStyle>
           <a:p>
-            <a:fld id="{FF244A5C-CBE4-4F0F-A48D-FEE452A0549D}" type="datetimeFigureOut">
-              <a:rPr lang="he-IL" smtClean="0"/>
-              <a:t>י'/שבט/תשפ"ו</a:t>
-            </a:fld>
             <a:endParaRPr lang="he-IL"/>
           </a:p>
         </p:txBody>
       </p:sp>
       <p:sp>
         <p:nvSpPr>
-          <p:cNvPr id="5" name="מציין מיקום של כותרת תחתונה 4">
-            <a:extLst>
-              <a:ext uri="{FF2B5EF4-FFF2-40B4-BE49-F238E27FC236}">
-                <a16:creationId xmlns:a16="http://schemas.microsoft.com/office/drawing/2014/main" id="{6CFF5694-556C-4004-9BA0-E9B5C160139D}"/>
-              </a:ext>
-            </a:extLst>
-          </p:cNvPr>
-          <p:cNvSpPr>
-            <a:spLocks noGrp="1"/>
-          </p:cNvSpPr>
-          <p:nvPr>
-            <p:ph type="ftr" sz="quarter" idx="3"/>
+          <p:cNvPr id="6" name="Slide Number Placeholder 5"/>
+          <p:cNvSpPr>
+            <a:spLocks noGrp="1"/>
+          </p:cNvSpPr>
+          <p:nvPr>
+            <p:ph type="sldNum" sz="quarter" idx="4"/>
           </p:nvPr>
         </p:nvSpPr>
         <p:spPr>
           <a:xfrm>
-            <a:off x="4038600" y="6356350"/>
-            <a:ext cx="4114800" cy="365125"/>
+            <a:off x="10353901" y="5969000"/>
+            <a:ext cx="542697" cy="279400"/>
           </a:xfrm>
           <a:prstGeom prst="rect">
             <a:avLst/>
           </a:prstGeom>
         </p:spPr>
         <p:txBody>
-          <a:bodyPr vert="horz" lIns="91440" tIns="45720" rIns="91440" bIns="45720" rtlCol="1" anchor="ctr"/>
+          <a:bodyPr vert="horz" lIns="91440" tIns="45720" rIns="91440" bIns="45720" rtlCol="0" anchor="ctr"/>
           <a:lstStyle>
-            <a:lvl1pPr algn="ctr">
-              <a:defRPr sz="1200">
-                <a:solidFill>
-                  <a:schemeClr val="tx1">
-                    <a:tint val="75000"/>
-                  </a:schemeClr>
-                </a:solidFill>
-              </a:defRPr>
-            </a:lvl1pPr>
-          </a:lstStyle>
-          <a:p>
-            <a:endParaRPr lang="he-IL"/>
-          </a:p>
-        </p:txBody>
-      </p:sp>
-      <p:sp>
-        <p:nvSpPr>
-          <p:cNvPr id="6" name="מציין מיקום של מספר שקופית 5">
-            <a:extLst>
-              <a:ext uri="{FF2B5EF4-FFF2-40B4-BE49-F238E27FC236}">
-                <a16:creationId xmlns:a16="http://schemas.microsoft.com/office/drawing/2014/main" id="{144F8060-77FF-4602-8F14-48AE01B13CB1}"/>
-              </a:ext>
-            </a:extLst>
-          </p:cNvPr>
-          <p:cNvSpPr>
-            <a:spLocks noGrp="1"/>
-          </p:cNvSpPr>
-          <p:nvPr>
-            <p:ph type="sldNum" sz="quarter" idx="4"/>
-          </p:nvPr>
-        </p:nvSpPr>
-        <p:spPr>
-          <a:xfrm>
-            <a:off x="838200" y="6356350"/>
-            <a:ext cx="2743200" cy="365125"/>
-          </a:xfrm>
-          <a:prstGeom prst="rect">
-            <a:avLst/>
-          </a:prstGeom>
-        </p:spPr>
-        <p:txBody>
-          <a:bodyPr vert="horz" lIns="91440" tIns="45720" rIns="91440" bIns="45720" rtlCol="1" anchor="ctr"/>
-          <a:lstStyle>
-            <a:lvl1pPr algn="l">
-              <a:defRPr sz="1200">
-                <a:solidFill>
-                  <a:schemeClr val="tx1">
-                    <a:tint val="75000"/>
-                  </a:schemeClr>
-                </a:solidFill>
+            <a:lvl1pPr algn="r">
+              <a:defRPr sz="1000" b="0" i="0">
+                <a:solidFill>
+                  <a:schemeClr val="tx1"/>
+                </a:solidFill>
+                <a:effectLst/>
+                <a:latin typeface="+mn-lt"/>
               </a:defRPr>
             </a:lvl1pPr>
           </a:lstStyle>
@@ -3003,55 +5420,352 @@
     </p:spTree>
     <p:extLst>
       <p:ext uri="{BB962C8B-B14F-4D97-AF65-F5344CB8AC3E}">
-        <p14:creationId xmlns:p14="http://schemas.microsoft.com/office/powerpoint/2010/main" val="1695886395"/>
+        <p14:creationId xmlns:p14="http://schemas.microsoft.com/office/powerpoint/2010/main" val="405047959"/>
       </p:ext>
     </p:extLst>
   </p:cSld>
   <p:clrMap bg1="lt1" tx1="dk1" bg2="lt2" tx2="dk2" accent1="accent1" accent2="accent2" accent3="accent3" accent4="accent4" accent5="accent5" accent6="accent6" hlink="hlink" folHlink="folHlink"/>
   <p:sldLayoutIdLst>
-    <p:sldLayoutId id="2147483649" r:id="rId1"/>
-    <p:sldLayoutId id="2147483650" r:id="rId2"/>
-    <p:sldLayoutId id="2147483651" r:id="rId3"/>
-    <p:sldLayoutId id="2147483652" r:id="rId4"/>
-    <p:sldLayoutId id="2147483653" r:id="rId5"/>
-    <p:sldLayoutId id="2147483654" r:id="rId6"/>
-    <p:sldLayoutId id="2147483655" r:id="rId7"/>
-    <p:sldLayoutId id="2147483656" r:id="rId8"/>
-    <p:sldLayoutId id="2147483657" r:id="rId9"/>
-    <p:sldLayoutId id="2147483658" r:id="rId10"/>
-    <p:sldLayoutId id="2147483659" r:id="rId11"/>
+    <p:sldLayoutId id="2147483661" r:id="rId1"/>
+    <p:sldLayoutId id="2147483662" r:id="rId2"/>
+    <p:sldLayoutId id="2147483663" r:id="rId3"/>
+    <p:sldLayoutId id="2147483664" r:id="rId4"/>
+    <p:sldLayoutId id="2147483665" r:id="rId5"/>
+    <p:sldLayoutId id="2147483666" r:id="rId6"/>
+    <p:sldLayoutId id="2147483667" r:id="rId7"/>
+    <p:sldLayoutId id="2147483668" r:id="rId8"/>
+    <p:sldLayoutId id="2147483669" r:id="rId9"/>
+    <p:sldLayoutId id="2147483670" r:id="rId10"/>
+    <p:sldLayoutId id="2147483671" r:id="rId11"/>
+    <p:sldLayoutId id="2147483672" r:id="rId12"/>
+    <p:sldLayoutId id="2147483673" r:id="rId13"/>
+    <p:sldLayoutId id="2147483674" r:id="rId14"/>
+    <p:sldLayoutId id="2147483675" r:id="rId15"/>
+    <p:sldLayoutId id="2147483676" r:id="rId16"/>
+    <p:sldLayoutId id="2147483677" r:id="rId17"/>
   </p:sldLayoutIdLst>
   <p:txStyles>
     <p:titleStyle>
-      <a:lvl1pPr algn="r" defTabSz="914400" rtl="1" eaLnBrk="1" latinLnBrk="0" hangingPunct="1">
-        <a:lnSpc>
-          <a:spcPct val="90000"/>
-        </a:lnSpc>
+      <a:lvl1pPr algn="ctr" defTabSz="457200" rtl="1" eaLnBrk="1" latinLnBrk="0" hangingPunct="1">
         <a:spcBef>
           <a:spcPct val="0"/>
         </a:spcBef>
         <a:buNone/>
-        <a:defRPr sz="4400" kern="1200">
+        <a:defRPr sz="4400" kern="1200" cap="none">
+          <a:ln w="3175" cmpd="sng">
+            <a:noFill/>
+          </a:ln>
           <a:solidFill>
-            <a:schemeClr val="tx1"/>
+            <a:schemeClr val="tx1">
+              <a:lumMod val="85000"/>
+              <a:lumOff val="15000"/>
+            </a:schemeClr>
           </a:solidFill>
+          <a:effectLst/>
           <a:latin typeface="+mj-lt"/>
           <a:ea typeface="+mj-ea"/>
           <a:cs typeface="+mj-cs"/>
         </a:defRPr>
       </a:lvl1pPr>
+      <a:lvl2pPr rtl="1" eaLnBrk="1" hangingPunct="1">
+        <a:defRPr>
+          <a:solidFill>
+            <a:schemeClr val="tx2"/>
+          </a:solidFill>
+        </a:defRPr>
+      </a:lvl2pPr>
+      <a:lvl3pPr rtl="1" eaLnBrk="1" hangingPunct="1">
+        <a:defRPr>
+          <a:solidFill>
+            <a:schemeClr val="tx2"/>
+          </a:solidFill>
+        </a:defRPr>
+      </a:lvl3pPr>
+      <a:lvl4pPr rtl="1" eaLnBrk="1" hangingPunct="1">
+        <a:defRPr>
+          <a:solidFill>
+            <a:schemeClr val="tx2"/>
+          </a:solidFill>
+        </a:defRPr>
+      </a:lvl4pPr>
+      <a:lvl5pPr rtl="1" eaLnBrk="1" hangingPunct="1">
+        <a:defRPr>
+          <a:solidFill>
+            <a:schemeClr val="tx2"/>
+          </a:solidFill>
+        </a:defRPr>
+      </a:lvl5pPr>
+      <a:lvl6pPr rtl="1" eaLnBrk="1" hangingPunct="1">
+        <a:defRPr>
+          <a:solidFill>
+            <a:schemeClr val="tx2"/>
+          </a:solidFill>
+        </a:defRPr>
+      </a:lvl6pPr>
+      <a:lvl7pPr rtl="1" eaLnBrk="1" hangingPunct="1">
+        <a:defRPr>
+          <a:solidFill>
+            <a:schemeClr val="tx2"/>
+          </a:solidFill>
+        </a:defRPr>
+      </a:lvl7pPr>
+      <a:lvl8pPr rtl="1" eaLnBrk="1" hangingPunct="1">
+        <a:defRPr>
+          <a:solidFill>
+            <a:schemeClr val="tx2"/>
+          </a:solidFill>
+        </a:defRPr>
+      </a:lvl8pPr>
+      <a:lvl9pPr rtl="1" eaLnBrk="1" hangingPunct="1">
+        <a:defRPr>
+          <a:solidFill>
+            <a:schemeClr val="tx2"/>
+          </a:solidFill>
+        </a:defRPr>
+      </a:lvl9pPr>
     </p:titleStyle>
     <p:bodyStyle>
-      <a:lvl1pPr marL="228600" indent="-228600" algn="r" defTabSz="914400" rtl="1" eaLnBrk="1" latinLnBrk="0" hangingPunct="1">
-        <a:lnSpc>
-          <a:spcPct val="90000"/>
-        </a:lnSpc>
+      <a:lvl1pPr marL="285750" indent="-285750" algn="r" defTabSz="457200" rtl="1" eaLnBrk="1" latinLnBrk="0" hangingPunct="1">
         <a:spcBef>
-          <a:spcPts val="1000"/>
+          <a:spcPct val="20000"/>
         </a:spcBef>
-        <a:buFont typeface="Arial" panose="020B0604020202020204" pitchFamily="34" charset="0"/>
+        <a:spcAft>
+          <a:spcPts val="600"/>
+        </a:spcAft>
+        <a:buClr>
+          <a:schemeClr val="accent1"/>
+        </a:buClr>
+        <a:buSzPct val="115000"/>
+        <a:buFont typeface="Arial"/>
         <a:buChar char="•"/>
-        <a:defRPr sz="2800" kern="1200">
+        <a:defRPr sz="2400" kern="1200" cap="none">
+          <a:solidFill>
+            <a:schemeClr val="tx1">
+              <a:lumMod val="85000"/>
+              <a:lumOff val="15000"/>
+            </a:schemeClr>
+          </a:solidFill>
+          <a:effectLst/>
+          <a:latin typeface="+mn-lt"/>
+          <a:ea typeface="+mn-ea"/>
+          <a:cs typeface="+mn-cs"/>
+        </a:defRPr>
+      </a:lvl1pPr>
+      <a:lvl2pPr marL="742950" indent="-285750" algn="r" defTabSz="457200" rtl="1" eaLnBrk="1" latinLnBrk="0" hangingPunct="1">
+        <a:spcBef>
+          <a:spcPct val="20000"/>
+        </a:spcBef>
+        <a:spcAft>
+          <a:spcPts val="600"/>
+        </a:spcAft>
+        <a:buClr>
+          <a:schemeClr val="accent1"/>
+        </a:buClr>
+        <a:buSzPct val="115000"/>
+        <a:buFont typeface="Arial"/>
+        <a:buChar char="•"/>
+        <a:defRPr sz="2000" kern="1200" cap="none">
+          <a:solidFill>
+            <a:schemeClr val="tx1">
+              <a:lumMod val="85000"/>
+              <a:lumOff val="15000"/>
+            </a:schemeClr>
+          </a:solidFill>
+          <a:effectLst/>
+          <a:latin typeface="+mn-lt"/>
+          <a:ea typeface="+mn-ea"/>
+          <a:cs typeface="+mn-cs"/>
+        </a:defRPr>
+      </a:lvl2pPr>
+      <a:lvl3pPr marL="1200150" indent="-285750" algn="r" defTabSz="457200" rtl="1" eaLnBrk="1" latinLnBrk="0" hangingPunct="1">
+        <a:spcBef>
+          <a:spcPct val="20000"/>
+        </a:spcBef>
+        <a:spcAft>
+          <a:spcPts val="600"/>
+        </a:spcAft>
+        <a:buClr>
+          <a:schemeClr val="accent1"/>
+        </a:buClr>
+        <a:buSzPct val="115000"/>
+        <a:buFont typeface="Arial"/>
+        <a:buChar char="•"/>
+        <a:defRPr sz="1800" kern="1200" cap="none">
+          <a:solidFill>
+            <a:schemeClr val="tx1">
+              <a:lumMod val="85000"/>
+              <a:lumOff val="15000"/>
+            </a:schemeClr>
+          </a:solidFill>
+          <a:effectLst/>
+          <a:latin typeface="+mn-lt"/>
+          <a:ea typeface="+mn-ea"/>
+          <a:cs typeface="+mn-cs"/>
+        </a:defRPr>
+      </a:lvl3pPr>
+      <a:lvl4pPr marL="1543050" indent="-171450" algn="r" defTabSz="457200" rtl="1" eaLnBrk="1" latinLnBrk="0" hangingPunct="1">
+        <a:spcBef>
+          <a:spcPct val="20000"/>
+        </a:spcBef>
+        <a:spcAft>
+          <a:spcPts val="600"/>
+        </a:spcAft>
+        <a:buClr>
+          <a:schemeClr val="accent1"/>
+        </a:buClr>
+        <a:buSzPct val="115000"/>
+        <a:buFont typeface="Arial"/>
+        <a:buChar char="•"/>
+        <a:defRPr sz="1600" kern="1200" cap="none">
+          <a:solidFill>
+            <a:schemeClr val="tx1">
+              <a:lumMod val="85000"/>
+              <a:lumOff val="15000"/>
+            </a:schemeClr>
+          </a:solidFill>
+          <a:effectLst/>
+          <a:latin typeface="+mn-lt"/>
+          <a:ea typeface="+mn-ea"/>
+          <a:cs typeface="+mn-cs"/>
+        </a:defRPr>
+      </a:lvl4pPr>
+      <a:lvl5pPr marL="2000250" indent="-171450" algn="r" defTabSz="457200" rtl="1" eaLnBrk="1" latinLnBrk="0" hangingPunct="1">
+        <a:spcBef>
+          <a:spcPct val="20000"/>
+        </a:spcBef>
+        <a:spcAft>
+          <a:spcPts val="600"/>
+        </a:spcAft>
+        <a:buClr>
+          <a:schemeClr val="accent1"/>
+        </a:buClr>
+        <a:buSzPct val="115000"/>
+        <a:buFont typeface="Arial"/>
+        <a:buChar char="•"/>
+        <a:defRPr sz="1400" kern="1200" cap="none">
+          <a:solidFill>
+            <a:schemeClr val="tx1">
+              <a:lumMod val="85000"/>
+              <a:lumOff val="15000"/>
+            </a:schemeClr>
+          </a:solidFill>
+          <a:effectLst/>
+          <a:latin typeface="+mn-lt"/>
+          <a:ea typeface="+mn-ea"/>
+          <a:cs typeface="+mn-cs"/>
+        </a:defRPr>
+      </a:lvl5pPr>
+      <a:lvl6pPr marL="2514600" indent="-228600" algn="r" defTabSz="457200" rtl="1" eaLnBrk="1" latinLnBrk="0" hangingPunct="1">
+        <a:spcBef>
+          <a:spcPct val="20000"/>
+        </a:spcBef>
+        <a:spcAft>
+          <a:spcPts val="600"/>
+        </a:spcAft>
+        <a:buClr>
+          <a:schemeClr val="accent1"/>
+        </a:buClr>
+        <a:buSzPct val="115000"/>
+        <a:buFont typeface="Arial"/>
+        <a:buChar char="•"/>
+        <a:defRPr sz="1400" kern="1200" cap="none">
+          <a:solidFill>
+            <a:schemeClr val="tx1">
+              <a:lumMod val="85000"/>
+              <a:lumOff val="15000"/>
+            </a:schemeClr>
+          </a:solidFill>
+          <a:effectLst/>
+          <a:latin typeface="+mn-lt"/>
+          <a:ea typeface="+mn-ea"/>
+          <a:cs typeface="+mn-cs"/>
+        </a:defRPr>
+      </a:lvl6pPr>
+      <a:lvl7pPr marL="2971800" indent="-228600" algn="r" defTabSz="457200" rtl="1" eaLnBrk="1" latinLnBrk="0" hangingPunct="1">
+        <a:spcBef>
+          <a:spcPct val="20000"/>
+        </a:spcBef>
+        <a:spcAft>
+          <a:spcPts val="600"/>
+        </a:spcAft>
+        <a:buClr>
+          <a:schemeClr val="accent1"/>
+        </a:buClr>
+        <a:buSzPct val="115000"/>
+        <a:buFont typeface="Arial"/>
+        <a:buChar char="•"/>
+        <a:defRPr sz="1400" kern="1200" cap="none">
+          <a:solidFill>
+            <a:schemeClr val="tx1">
+              <a:lumMod val="85000"/>
+              <a:lumOff val="15000"/>
+            </a:schemeClr>
+          </a:solidFill>
+          <a:effectLst/>
+          <a:latin typeface="+mn-lt"/>
+          <a:ea typeface="+mn-ea"/>
+          <a:cs typeface="+mn-cs"/>
+        </a:defRPr>
+      </a:lvl7pPr>
+      <a:lvl8pPr marL="3429000" indent="-228600" algn="r" defTabSz="457200" rtl="1" eaLnBrk="1" latinLnBrk="0" hangingPunct="1">
+        <a:spcBef>
+          <a:spcPct val="20000"/>
+        </a:spcBef>
+        <a:spcAft>
+          <a:spcPts val="600"/>
+        </a:spcAft>
+        <a:buClr>
+          <a:schemeClr val="accent1"/>
+        </a:buClr>
+        <a:buSzPct val="115000"/>
+        <a:buFont typeface="Arial"/>
+        <a:buChar char="•"/>
+        <a:defRPr sz="1400" kern="1200" cap="none">
+          <a:solidFill>
+            <a:schemeClr val="tx1">
+              <a:lumMod val="85000"/>
+              <a:lumOff val="15000"/>
+            </a:schemeClr>
+          </a:solidFill>
+          <a:effectLst/>
+          <a:latin typeface="+mn-lt"/>
+          <a:ea typeface="+mn-ea"/>
+          <a:cs typeface="+mn-cs"/>
+        </a:defRPr>
+      </a:lvl8pPr>
+      <a:lvl9pPr marL="3886200" indent="-228600" algn="r" defTabSz="457200" rtl="1" eaLnBrk="1" latinLnBrk="0" hangingPunct="1">
+        <a:spcBef>
+          <a:spcPct val="20000"/>
+        </a:spcBef>
+        <a:spcAft>
+          <a:spcPts val="600"/>
+        </a:spcAft>
+        <a:buClr>
+          <a:schemeClr val="accent1"/>
+        </a:buClr>
+        <a:buSzPct val="115000"/>
+        <a:buFont typeface="Arial"/>
+        <a:buChar char="•"/>
+        <a:defRPr sz="1400" kern="1200" cap="none">
+          <a:solidFill>
+            <a:schemeClr val="tx1">
+              <a:lumMod val="85000"/>
+              <a:lumOff val="15000"/>
+            </a:schemeClr>
+          </a:solidFill>
+          <a:effectLst/>
+          <a:latin typeface="+mn-lt"/>
+          <a:ea typeface="+mn-ea"/>
+          <a:cs typeface="+mn-cs"/>
+        </a:defRPr>
+      </a:lvl9pPr>
+    </p:bodyStyle>
+    <p:otherStyle>
+      <a:defPPr>
+        <a:defRPr lang="en-US"/>
+      </a:defPPr>
+      <a:lvl1pPr marL="0" algn="r" defTabSz="457200" rtl="1" eaLnBrk="1" latinLnBrk="0" hangingPunct="1">
+        <a:defRPr sz="1800" kern="1200">
           <a:solidFill>
             <a:schemeClr val="tx1"/>
           </a:solidFill>
@@ -3060,16 +5774,8 @@
           <a:cs typeface="+mn-cs"/>
         </a:defRPr>
       </a:lvl1pPr>
-      <a:lvl2pPr marL="685800" indent="-228600" algn="r" defTabSz="914400" rtl="1" eaLnBrk="1" latinLnBrk="0" hangingPunct="1">
-        <a:lnSpc>
-          <a:spcPct val="90000"/>
-        </a:lnSpc>
-        <a:spcBef>
-          <a:spcPts val="500"/>
-        </a:spcBef>
-        <a:buFont typeface="Arial" panose="020B0604020202020204" pitchFamily="34" charset="0"/>
-        <a:buChar char="•"/>
-        <a:defRPr sz="2400" kern="1200">
+      <a:lvl2pPr marL="457200" algn="r" defTabSz="457200" rtl="1" eaLnBrk="1" latinLnBrk="0" hangingPunct="1">
+        <a:defRPr sz="1800" kern="1200">
           <a:solidFill>
             <a:schemeClr val="tx1"/>
           </a:solidFill>
@@ -3078,16 +5784,8 @@
           <a:cs typeface="+mn-cs"/>
         </a:defRPr>
       </a:lvl2pPr>
-      <a:lvl3pPr marL="1143000" indent="-228600" algn="r" defTabSz="914400" rtl="1" eaLnBrk="1" latinLnBrk="0" hangingPunct="1">
-        <a:lnSpc>
-          <a:spcPct val="90000"/>
-        </a:lnSpc>
-        <a:spcBef>
-          <a:spcPts val="500"/>
-        </a:spcBef>
-        <a:buFont typeface="Arial" panose="020B0604020202020204" pitchFamily="34" charset="0"/>
-        <a:buChar char="•"/>
-        <a:defRPr sz="2000" kern="1200">
+      <a:lvl3pPr marL="914400" algn="r" defTabSz="457200" rtl="1" eaLnBrk="1" latinLnBrk="0" hangingPunct="1">
+        <a:defRPr sz="1800" kern="1200">
           <a:solidFill>
             <a:schemeClr val="tx1"/>
           </a:solidFill>
@@ -3096,15 +5794,7 @@
           <a:cs typeface="+mn-cs"/>
         </a:defRPr>
       </a:lvl3pPr>
-      <a:lvl4pPr marL="1600200" indent="-228600" algn="r" defTabSz="914400" rtl="1" eaLnBrk="1" latinLnBrk="0" hangingPunct="1">
-        <a:lnSpc>
-          <a:spcPct val="90000"/>
-        </a:lnSpc>
-        <a:spcBef>
-          <a:spcPts val="500"/>
-        </a:spcBef>
-        <a:buFont typeface="Arial" panose="020B0604020202020204" pitchFamily="34" charset="0"/>
-        <a:buChar char="•"/>
+      <a:lvl4pPr marL="1371600" algn="r" defTabSz="457200" rtl="1" eaLnBrk="1" latinLnBrk="0" hangingPunct="1">
         <a:defRPr sz="1800" kern="1200">
           <a:solidFill>
             <a:schemeClr val="tx1"/>
@@ -3114,15 +5804,7 @@
           <a:cs typeface="+mn-cs"/>
         </a:defRPr>
       </a:lvl4pPr>
-      <a:lvl5pPr marL="2057400" indent="-228600" algn="r" defTabSz="914400" rtl="1" eaLnBrk="1" latinLnBrk="0" hangingPunct="1">
-        <a:lnSpc>
-          <a:spcPct val="90000"/>
-        </a:lnSpc>
-        <a:spcBef>
-          <a:spcPts val="500"/>
-        </a:spcBef>
-        <a:buFont typeface="Arial" panose="020B0604020202020204" pitchFamily="34" charset="0"/>
-        <a:buChar char="•"/>
+      <a:lvl5pPr marL="1828800" algn="r" defTabSz="457200" rtl="1" eaLnBrk="1" latinLnBrk="0" hangingPunct="1">
         <a:defRPr sz="1800" kern="1200">
           <a:solidFill>
             <a:schemeClr val="tx1"/>
@@ -3132,15 +5814,7 @@
           <a:cs typeface="+mn-cs"/>
         </a:defRPr>
       </a:lvl5pPr>
-      <a:lvl6pPr marL="2514600" indent="-228600" algn="r" defTabSz="914400" rtl="1" eaLnBrk="1" latinLnBrk="0" hangingPunct="1">
-        <a:lnSpc>
-          <a:spcPct val="90000"/>
-        </a:lnSpc>
-        <a:spcBef>
-          <a:spcPts val="500"/>
-        </a:spcBef>
-        <a:buFont typeface="Arial" panose="020B0604020202020204" pitchFamily="34" charset="0"/>
-        <a:buChar char="•"/>
+      <a:lvl6pPr marL="2286000" algn="r" defTabSz="457200" rtl="1" eaLnBrk="1" latinLnBrk="0" hangingPunct="1">
         <a:defRPr sz="1800" kern="1200">
           <a:solidFill>
             <a:schemeClr val="tx1"/>
@@ -3150,15 +5824,7 @@
           <a:cs typeface="+mn-cs"/>
         </a:defRPr>
       </a:lvl6pPr>
-      <a:lvl7pPr marL="2971800" indent="-228600" algn="r" defTabSz="914400" rtl="1" eaLnBrk="1" latinLnBrk="0" hangingPunct="1">
-        <a:lnSpc>
-          <a:spcPct val="90000"/>
-        </a:lnSpc>
-        <a:spcBef>
-          <a:spcPts val="500"/>
-        </a:spcBef>
-        <a:buFont typeface="Arial" panose="020B0604020202020204" pitchFamily="34" charset="0"/>
-        <a:buChar char="•"/>
+      <a:lvl7pPr marL="2743200" algn="r" defTabSz="457200" rtl="1" eaLnBrk="1" latinLnBrk="0" hangingPunct="1">
         <a:defRPr sz="1800" kern="1200">
           <a:solidFill>
             <a:schemeClr val="tx1"/>
@@ -3168,15 +5834,7 @@
           <a:cs typeface="+mn-cs"/>
         </a:defRPr>
       </a:lvl7pPr>
-      <a:lvl8pPr marL="3429000" indent="-228600" algn="r" defTabSz="914400" rtl="1" eaLnBrk="1" latinLnBrk="0" hangingPunct="1">
-        <a:lnSpc>
-          <a:spcPct val="90000"/>
-        </a:lnSpc>
-        <a:spcBef>
-          <a:spcPts val="500"/>
-        </a:spcBef>
-        <a:buFont typeface="Arial" panose="020B0604020202020204" pitchFamily="34" charset="0"/>
-        <a:buChar char="•"/>
+      <a:lvl8pPr marL="3200400" algn="r" defTabSz="457200" rtl="1" eaLnBrk="1" latinLnBrk="0" hangingPunct="1">
         <a:defRPr sz="1800" kern="1200">
           <a:solidFill>
             <a:schemeClr val="tx1"/>
@@ -3186,110 +5844,7 @@
           <a:cs typeface="+mn-cs"/>
         </a:defRPr>
       </a:lvl8pPr>
-      <a:lvl9pPr marL="3886200" indent="-228600" algn="r" defTabSz="914400" rtl="1" eaLnBrk="1" latinLnBrk="0" hangingPunct="1">
-        <a:lnSpc>
-          <a:spcPct val="90000"/>
-        </a:lnSpc>
-        <a:spcBef>
-          <a:spcPts val="500"/>
-        </a:spcBef>
-        <a:buFont typeface="Arial" panose="020B0604020202020204" pitchFamily="34" charset="0"/>
-        <a:buChar char="•"/>
-        <a:defRPr sz="1800" kern="1200">
-          <a:solidFill>
-            <a:schemeClr val="tx1"/>
-          </a:solidFill>
-          <a:latin typeface="+mn-lt"/>
-          <a:ea typeface="+mn-ea"/>
-          <a:cs typeface="+mn-cs"/>
-        </a:defRPr>
-      </a:lvl9pPr>
-    </p:bodyStyle>
-    <p:otherStyle>
-      <a:defPPr>
-        <a:defRPr lang="he-IL"/>
-      </a:defPPr>
-      <a:lvl1pPr marL="0" algn="r" defTabSz="914400" rtl="1" eaLnBrk="1" latinLnBrk="0" hangingPunct="1">
-        <a:defRPr sz="1800" kern="1200">
-          <a:solidFill>
-            <a:schemeClr val="tx1"/>
-          </a:solidFill>
-          <a:latin typeface="+mn-lt"/>
-          <a:ea typeface="+mn-ea"/>
-          <a:cs typeface="+mn-cs"/>
-        </a:defRPr>
-      </a:lvl1pPr>
-      <a:lvl2pPr marL="457200" algn="r" defTabSz="914400" rtl="1" eaLnBrk="1" latinLnBrk="0" hangingPunct="1">
-        <a:defRPr sz="1800" kern="1200">
-          <a:solidFill>
-            <a:schemeClr val="tx1"/>
-          </a:solidFill>
-          <a:latin typeface="+mn-lt"/>
-          <a:ea typeface="+mn-ea"/>
-          <a:cs typeface="+mn-cs"/>
-        </a:defRPr>
-      </a:lvl2pPr>
-      <a:lvl3pPr marL="914400" algn="r" defTabSz="914400" rtl="1" eaLnBrk="1" latinLnBrk="0" hangingPunct="1">
-        <a:defRPr sz="1800" kern="1200">
-          <a:solidFill>
-            <a:schemeClr val="tx1"/>
-          </a:solidFill>
-          <a:latin typeface="+mn-lt"/>
-          <a:ea typeface="+mn-ea"/>
-          <a:cs typeface="+mn-cs"/>
-        </a:defRPr>
-      </a:lvl3pPr>
-      <a:lvl4pPr marL="1371600" algn="r" defTabSz="914400" rtl="1" eaLnBrk="1" latinLnBrk="0" hangingPunct="1">
-        <a:defRPr sz="1800" kern="1200">
-          <a:solidFill>
-            <a:schemeClr val="tx1"/>
-          </a:solidFill>
-          <a:latin typeface="+mn-lt"/>
-          <a:ea typeface="+mn-ea"/>
-          <a:cs typeface="+mn-cs"/>
-        </a:defRPr>
-      </a:lvl4pPr>
-      <a:lvl5pPr marL="1828800" algn="r" defTabSz="914400" rtl="1" eaLnBrk="1" latinLnBrk="0" hangingPunct="1">
-        <a:defRPr sz="1800" kern="1200">
-          <a:solidFill>
-            <a:schemeClr val="tx1"/>
-          </a:solidFill>
-          <a:latin typeface="+mn-lt"/>
-          <a:ea typeface="+mn-ea"/>
-          <a:cs typeface="+mn-cs"/>
-        </a:defRPr>
-      </a:lvl5pPr>
-      <a:lvl6pPr marL="2286000" algn="r" defTabSz="914400" rtl="1" eaLnBrk="1" latinLnBrk="0" hangingPunct="1">
-        <a:defRPr sz="1800" kern="1200">
-          <a:solidFill>
-            <a:schemeClr val="tx1"/>
-          </a:solidFill>
-          <a:latin typeface="+mn-lt"/>
-          <a:ea typeface="+mn-ea"/>
-          <a:cs typeface="+mn-cs"/>
-        </a:defRPr>
-      </a:lvl6pPr>
-      <a:lvl7pPr marL="2743200" algn="r" defTabSz="914400" rtl="1" eaLnBrk="1" latinLnBrk="0" hangingPunct="1">
-        <a:defRPr sz="1800" kern="1200">
-          <a:solidFill>
-            <a:schemeClr val="tx1"/>
-          </a:solidFill>
-          <a:latin typeface="+mn-lt"/>
-          <a:ea typeface="+mn-ea"/>
-          <a:cs typeface="+mn-cs"/>
-        </a:defRPr>
-      </a:lvl7pPr>
-      <a:lvl8pPr marL="3200400" algn="r" defTabSz="914400" rtl="1" eaLnBrk="1" latinLnBrk="0" hangingPunct="1">
-        <a:defRPr sz="1800" kern="1200">
-          <a:solidFill>
-            <a:schemeClr val="tx1"/>
-          </a:solidFill>
-          <a:latin typeface="+mn-lt"/>
-          <a:ea typeface="+mn-ea"/>
-          <a:cs typeface="+mn-cs"/>
-        </a:defRPr>
-      </a:lvl8pPr>
-      <a:lvl9pPr marL="3657600" algn="r" defTabSz="914400" rtl="1" eaLnBrk="1" latinLnBrk="0" hangingPunct="1">
+      <a:lvl9pPr marL="3657600" algn="r" defTabSz="457200" rtl="1" eaLnBrk="1" latinLnBrk="0" hangingPunct="1">
         <a:defRPr sz="1800" kern="1200">
           <a:solidFill>
             <a:schemeClr val="tx1"/>
@@ -3356,6 +5911,95 @@
           </a:p>
         </p:txBody>
       </p:sp>
+      <p:sp>
+        <p:nvSpPr>
+          <p:cNvPr id="2" name="תיבת טקסט 1">
+            <a:extLst>
+              <a:ext uri="{FF2B5EF4-FFF2-40B4-BE49-F238E27FC236}">
+                <a16:creationId xmlns:a16="http://schemas.microsoft.com/office/drawing/2014/main" id="{EB051A38-BA0C-B704-50E9-60256E31F54A}"/>
+              </a:ext>
+            </a:extLst>
+          </p:cNvPr>
+          <p:cNvSpPr txBox="1"/>
+          <p:nvPr/>
+        </p:nvSpPr>
+        <p:spPr>
+          <a:xfrm>
+            <a:off x="1901952" y="2213734"/>
+            <a:ext cx="7260336" cy="2031325"/>
+          </a:xfrm>
+          <a:prstGeom prst="rect">
+            <a:avLst/>
+          </a:prstGeom>
+          <a:noFill/>
+        </p:spPr>
+        <p:txBody>
+          <a:bodyPr wrap="square" rtlCol="1">
+            <a:spAutoFit/>
+          </a:bodyPr>
+          <a:lstStyle/>
+          <a:p>
+            <a:pPr algn="r"/>
+            <a:r>
+              <a:rPr lang="he-IL" dirty="0">
+                <a:latin typeface="CabinSketch" panose="020B0503050202020004" pitchFamily="34" charset="0"/>
+              </a:rPr>
+              <a:t>לקוח חדש?</a:t>
+            </a:r>
+          </a:p>
+          <a:p>
+            <a:pPr algn="r"/>
+            <a:r>
+              <a:rPr lang="he-IL" dirty="0">
+                <a:latin typeface="CabinSketch" panose="020B0503050202020004" pitchFamily="34" charset="0"/>
+              </a:rPr>
+              <a:t>	רישום: ת.ז. שם משפחה מייל טלפון כתובת בחר סיסמא</a:t>
+            </a:r>
+          </a:p>
+          <a:p>
+            <a:pPr algn="r"/>
+            <a:r>
+              <a:rPr lang="he-IL" dirty="0">
+                <a:latin typeface="CabinSketch" panose="020B0503050202020004" pitchFamily="34" charset="0"/>
+              </a:rPr>
+              <a:t>אחרת:</a:t>
+            </a:r>
+          </a:p>
+          <a:p>
+            <a:pPr algn="r"/>
+            <a:r>
+              <a:rPr lang="he-IL" dirty="0">
+                <a:latin typeface="CabinSketch" panose="020B0503050202020004" pitchFamily="34" charset="0"/>
+              </a:rPr>
+              <a:t>	ת.ז. סיסמא</a:t>
+            </a:r>
+          </a:p>
+          <a:p>
+            <a:pPr algn="r"/>
+            <a:endParaRPr lang="he-IL" dirty="0">
+              <a:latin typeface="CabinSketch" panose="020B0503050202020004" pitchFamily="34" charset="0"/>
+            </a:endParaRPr>
+          </a:p>
+          <a:p>
+            <a:pPr algn="r"/>
+            <a:r>
+              <a:rPr lang="he-IL" dirty="0">
+                <a:latin typeface="CabinSketch" panose="020B0503050202020004" pitchFamily="34" charset="0"/>
+              </a:rPr>
+              <a:t>מנהל:</a:t>
+            </a:r>
+          </a:p>
+          <a:p>
+            <a:pPr algn="r"/>
+            <a:r>
+              <a:rPr lang="he-IL" dirty="0">
+                <a:latin typeface="CabinSketch" panose="020B0503050202020004" pitchFamily="34" charset="0"/>
+              </a:rPr>
+              <a:t>	נכנס עם ת.ז סיסמא</a:t>
+            </a:r>
+          </a:p>
+        </p:txBody>
+      </p:sp>
     </p:spTree>
     <p:extLst>
       <p:ext uri="{BB962C8B-B14F-4D97-AF65-F5344CB8AC3E}">
@@ -3369,10 +6013,413 @@
 </p:sld>
 </file>
 
+<file path=ppt/slides/slide2.xml><?xml version="1.0" encoding="utf-8"?>
+<p:sld xmlns:a="http://schemas.openxmlformats.org/drawingml/2006/main" xmlns:r="http://schemas.openxmlformats.org/officeDocument/2006/relationships" xmlns:p="http://schemas.openxmlformats.org/presentationml/2006/main">
+  <p:cSld>
+    <p:spTree>
+      <p:nvGrpSpPr>
+        <p:cNvPr id="1" name=""/>
+        <p:cNvGrpSpPr/>
+        <p:nvPr/>
+      </p:nvGrpSpPr>
+      <p:grpSpPr>
+        <a:xfrm>
+          <a:off x="0" y="0"/>
+          <a:ext cx="0" cy="0"/>
+          <a:chOff x="0" y="0"/>
+          <a:chExt cx="0" cy="0"/>
+        </a:xfrm>
+      </p:grpSpPr>
+      <p:sp>
+        <p:nvSpPr>
+          <p:cNvPr id="2" name="כותרת 1">
+            <a:extLst>
+              <a:ext uri="{FF2B5EF4-FFF2-40B4-BE49-F238E27FC236}">
+                <a16:creationId xmlns:a16="http://schemas.microsoft.com/office/drawing/2014/main" id="{7BBB3194-9AAF-F588-337B-CD7CE7033F13}"/>
+              </a:ext>
+            </a:extLst>
+          </p:cNvPr>
+          <p:cNvSpPr>
+            <a:spLocks noGrp="1"/>
+          </p:cNvSpPr>
+          <p:nvPr>
+            <p:ph type="title"/>
+          </p:nvPr>
+        </p:nvSpPr>
+        <p:spPr/>
+        <p:txBody>
+          <a:bodyPr/>
+          <a:lstStyle/>
+          <a:p>
+            <a:r>
+              <a:rPr lang="he-IL" dirty="0"/>
+              <a:t>פתיחת תיק</a:t>
+            </a:r>
+          </a:p>
+        </p:txBody>
+      </p:sp>
+      <p:sp>
+        <p:nvSpPr>
+          <p:cNvPr id="3" name="מציין מיקום תוכן 2">
+            <a:extLst>
+              <a:ext uri="{FF2B5EF4-FFF2-40B4-BE49-F238E27FC236}">
+                <a16:creationId xmlns:a16="http://schemas.microsoft.com/office/drawing/2014/main" id="{4BCCF513-CFB9-8FF6-2FAC-9781BF80A771}"/>
+              </a:ext>
+            </a:extLst>
+          </p:cNvPr>
+          <p:cNvSpPr>
+            <a:spLocks noGrp="1"/>
+          </p:cNvSpPr>
+          <p:nvPr>
+            <p:ph idx="1"/>
+          </p:nvPr>
+        </p:nvSpPr>
+        <p:spPr/>
+        <p:txBody>
+          <a:bodyPr/>
+          <a:lstStyle/>
+          <a:p>
+            <a:r>
+              <a:rPr lang="he-IL" dirty="0"/>
+              <a:t>סוג בקשה</a:t>
+            </a:r>
+          </a:p>
+          <a:p>
+            <a:r>
+              <a:rPr lang="he-IL" dirty="0"/>
+              <a:t>הכנסה חודשית</a:t>
+            </a:r>
+          </a:p>
+          <a:p>
+            <a:endParaRPr lang="he-IL" dirty="0"/>
+          </a:p>
+        </p:txBody>
+      </p:sp>
+    </p:spTree>
+    <p:extLst>
+      <p:ext uri="{BB962C8B-B14F-4D97-AF65-F5344CB8AC3E}">
+        <p14:creationId xmlns:p14="http://schemas.microsoft.com/office/powerpoint/2010/main" val="1519771804"/>
+      </p:ext>
+    </p:extLst>
+  </p:cSld>
+  <p:clrMapOvr>
+    <a:masterClrMapping/>
+  </p:clrMapOvr>
+</p:sld>
+</file>
+
+<file path=ppt/slides/slide3.xml><?xml version="1.0" encoding="utf-8"?>
+<p:sld xmlns:a="http://schemas.openxmlformats.org/drawingml/2006/main" xmlns:r="http://schemas.openxmlformats.org/officeDocument/2006/relationships" xmlns:p="http://schemas.openxmlformats.org/presentationml/2006/main">
+  <p:cSld>
+    <p:spTree>
+      <p:nvGrpSpPr>
+        <p:cNvPr id="1" name=""/>
+        <p:cNvGrpSpPr/>
+        <p:nvPr/>
+      </p:nvGrpSpPr>
+      <p:grpSpPr>
+        <a:xfrm>
+          <a:off x="0" y="0"/>
+          <a:ext cx="0" cy="0"/>
+          <a:chOff x="0" y="0"/>
+          <a:chExt cx="0" cy="0"/>
+        </a:xfrm>
+      </p:grpSpPr>
+      <p:sp>
+        <p:nvSpPr>
+          <p:cNvPr id="2" name="כותרת 1">
+            <a:extLst>
+              <a:ext uri="{FF2B5EF4-FFF2-40B4-BE49-F238E27FC236}">
+                <a16:creationId xmlns:a16="http://schemas.microsoft.com/office/drawing/2014/main" id="{E7AC0F0C-D2CA-C396-101C-CFC6B88A435E}"/>
+              </a:ext>
+            </a:extLst>
+          </p:cNvPr>
+          <p:cNvSpPr>
+            <a:spLocks noGrp="1"/>
+          </p:cNvSpPr>
+          <p:nvPr>
+            <p:ph type="ctrTitle"/>
+          </p:nvPr>
+        </p:nvSpPr>
+        <p:spPr/>
+        <p:txBody>
+          <a:bodyPr/>
+          <a:lstStyle/>
+          <a:p>
+            <a:r>
+              <a:rPr lang="he-IL" sz="1800" dirty="0"/>
+              <a:t>סטטוס</a:t>
+            </a:r>
+            <a:br>
+              <a:rPr lang="he-IL" sz="1800" dirty="0"/>
+            </a:br>
+            <a:r>
+              <a:rPr lang="he-IL" sz="1800" dirty="0"/>
+              <a:t>לכל תיק יש:</a:t>
+            </a:r>
+            <a:br>
+              <a:rPr lang="he-IL" sz="1800" dirty="0"/>
+            </a:br>
+            <a:r>
+              <a:rPr lang="he-IL" sz="1800" dirty="0"/>
+              <a:t>טפסים להעלאה</a:t>
+            </a:r>
+            <a:br>
+              <a:rPr lang="he-IL" sz="1800" dirty="0"/>
+            </a:br>
+            <a:r>
+              <a:rPr lang="he-IL" sz="1800" dirty="0"/>
+              <a:t>משימות</a:t>
+            </a:r>
+            <a:br>
+              <a:rPr lang="he-IL" sz="1800" dirty="0"/>
+            </a:br>
+            <a:r>
+              <a:rPr lang="he-IL" sz="1800" dirty="0"/>
+              <a:t>פגישות</a:t>
+            </a:r>
+          </a:p>
+        </p:txBody>
+      </p:sp>
+      <p:sp>
+        <p:nvSpPr>
+          <p:cNvPr id="3" name="כותרת משנה 2">
+            <a:extLst>
+              <a:ext uri="{FF2B5EF4-FFF2-40B4-BE49-F238E27FC236}">
+                <a16:creationId xmlns:a16="http://schemas.microsoft.com/office/drawing/2014/main" id="{BAE138E8-91AC-1926-E921-99E0DCCF8183}"/>
+              </a:ext>
+            </a:extLst>
+          </p:cNvPr>
+          <p:cNvSpPr>
+            <a:spLocks noGrp="1"/>
+          </p:cNvSpPr>
+          <p:nvPr>
+            <p:ph type="subTitle" idx="1"/>
+          </p:nvPr>
+        </p:nvSpPr>
+        <p:spPr/>
+        <p:txBody>
+          <a:bodyPr/>
+          <a:lstStyle/>
+          <a:p>
+            <a:endParaRPr lang="he-IL" dirty="0"/>
+          </a:p>
+        </p:txBody>
+      </p:sp>
+    </p:spTree>
+    <p:extLst>
+      <p:ext uri="{BB962C8B-B14F-4D97-AF65-F5344CB8AC3E}">
+        <p14:creationId xmlns:p14="http://schemas.microsoft.com/office/powerpoint/2010/main" val="1792918028"/>
+      </p:ext>
+    </p:extLst>
+  </p:cSld>
+  <p:clrMapOvr>
+    <a:masterClrMapping/>
+  </p:clrMapOvr>
+</p:sld>
+</file>
+
+<file path=ppt/slides/slide4.xml><?xml version="1.0" encoding="utf-8"?>
+<p:sld xmlns:a="http://schemas.openxmlformats.org/drawingml/2006/main" xmlns:r="http://schemas.openxmlformats.org/officeDocument/2006/relationships" xmlns:p="http://schemas.openxmlformats.org/presentationml/2006/main">
+  <p:cSld>
+    <p:spTree>
+      <p:nvGrpSpPr>
+        <p:cNvPr id="1" name=""/>
+        <p:cNvGrpSpPr/>
+        <p:nvPr/>
+      </p:nvGrpSpPr>
+      <p:grpSpPr>
+        <a:xfrm>
+          <a:off x="0" y="0"/>
+          <a:ext cx="0" cy="0"/>
+          <a:chOff x="0" y="0"/>
+          <a:chExt cx="0" cy="0"/>
+        </a:xfrm>
+      </p:grpSpPr>
+      <p:sp>
+        <p:nvSpPr>
+          <p:cNvPr id="2" name="כותרת 1">
+            <a:extLst>
+              <a:ext uri="{FF2B5EF4-FFF2-40B4-BE49-F238E27FC236}">
+                <a16:creationId xmlns:a16="http://schemas.microsoft.com/office/drawing/2014/main" id="{F596A1D1-5945-2EA1-A3EF-3694D7F6B3FD}"/>
+              </a:ext>
+            </a:extLst>
+          </p:cNvPr>
+          <p:cNvSpPr>
+            <a:spLocks noGrp="1"/>
+          </p:cNvSpPr>
+          <p:nvPr>
+            <p:ph type="title"/>
+          </p:nvPr>
+        </p:nvSpPr>
+        <p:spPr/>
+        <p:txBody>
+          <a:bodyPr/>
+          <a:lstStyle/>
+          <a:p>
+            <a:r>
+              <a:rPr lang="he-IL" dirty="0"/>
+              <a:t>יועץ </a:t>
+            </a:r>
+            <a:r>
+              <a:rPr lang="he-IL" dirty="0" err="1"/>
+              <a:t>משכנאות</a:t>
+            </a:r>
+            <a:endParaRPr lang="he-IL" dirty="0"/>
+          </a:p>
+        </p:txBody>
+      </p:sp>
+      <p:sp>
+        <p:nvSpPr>
+          <p:cNvPr id="3" name="מציין מיקום תוכן 2">
+            <a:extLst>
+              <a:ext uri="{FF2B5EF4-FFF2-40B4-BE49-F238E27FC236}">
+                <a16:creationId xmlns:a16="http://schemas.microsoft.com/office/drawing/2014/main" id="{6873F9F7-39A3-4652-EB7B-57508E5CBF02}"/>
+              </a:ext>
+            </a:extLst>
+          </p:cNvPr>
+          <p:cNvSpPr>
+            <a:spLocks noGrp="1"/>
+          </p:cNvSpPr>
+          <p:nvPr>
+            <p:ph idx="1"/>
+          </p:nvPr>
+        </p:nvSpPr>
+        <p:spPr/>
+        <p:txBody>
+          <a:bodyPr/>
+          <a:lstStyle/>
+          <a:p>
+            <a:pPr marL="0" indent="0">
+              <a:buNone/>
+            </a:pPr>
+            <a:r>
+              <a:rPr lang="he-IL" dirty="0"/>
+              <a:t>סינון מיון</a:t>
+            </a:r>
+          </a:p>
+          <a:p>
+            <a:pPr marL="0" indent="0">
+              <a:buNone/>
+            </a:pPr>
+            <a:r>
+              <a:rPr lang="he-IL" dirty="0"/>
+              <a:t>סינון: ת.ז. פגישות להיום משימות דחופות </a:t>
+            </a:r>
+          </a:p>
+          <a:p>
+            <a:pPr marL="0" indent="0">
+              <a:buNone/>
+            </a:pPr>
+            <a:r>
+              <a:rPr lang="he-IL" dirty="0"/>
+              <a:t>מיון: תאריך </a:t>
+            </a:r>
+            <a:r>
+              <a:rPr lang="he-IL" dirty="0" err="1"/>
+              <a:t>הכל</a:t>
+            </a:r>
+            <a:endParaRPr lang="he-IL" dirty="0"/>
+          </a:p>
+        </p:txBody>
+      </p:sp>
+    </p:spTree>
+    <p:extLst>
+      <p:ext uri="{BB962C8B-B14F-4D97-AF65-F5344CB8AC3E}">
+        <p14:creationId xmlns:p14="http://schemas.microsoft.com/office/powerpoint/2010/main" val="3879950387"/>
+      </p:ext>
+    </p:extLst>
+  </p:cSld>
+  <p:clrMapOvr>
+    <a:masterClrMapping/>
+  </p:clrMapOvr>
+</p:sld>
+</file>
+
+<file path=ppt/slides/slide5.xml><?xml version="1.0" encoding="utf-8"?>
+<p:sld xmlns:a="http://schemas.openxmlformats.org/drawingml/2006/main" xmlns:r="http://schemas.openxmlformats.org/officeDocument/2006/relationships" xmlns:p="http://schemas.openxmlformats.org/presentationml/2006/main">
+  <p:cSld>
+    <p:spTree>
+      <p:nvGrpSpPr>
+        <p:cNvPr id="1" name=""/>
+        <p:cNvGrpSpPr/>
+        <p:nvPr/>
+      </p:nvGrpSpPr>
+      <p:grpSpPr>
+        <a:xfrm>
+          <a:off x="0" y="0"/>
+          <a:ext cx="0" cy="0"/>
+          <a:chOff x="0" y="0"/>
+          <a:chExt cx="0" cy="0"/>
+        </a:xfrm>
+      </p:grpSpPr>
+      <p:sp>
+        <p:nvSpPr>
+          <p:cNvPr id="2" name="כותרת 1">
+            <a:extLst>
+              <a:ext uri="{FF2B5EF4-FFF2-40B4-BE49-F238E27FC236}">
+                <a16:creationId xmlns:a16="http://schemas.microsoft.com/office/drawing/2014/main" id="{6793CF92-CD73-0842-7B08-7A4CC3BCE335}"/>
+              </a:ext>
+            </a:extLst>
+          </p:cNvPr>
+          <p:cNvSpPr>
+            <a:spLocks noGrp="1"/>
+          </p:cNvSpPr>
+          <p:nvPr>
+            <p:ph type="title"/>
+          </p:nvPr>
+        </p:nvSpPr>
+        <p:spPr/>
+        <p:txBody>
+          <a:bodyPr/>
+          <a:lstStyle/>
+          <a:p>
+            <a:endParaRPr lang="he-IL"/>
+          </a:p>
+        </p:txBody>
+      </p:sp>
+      <p:sp>
+        <p:nvSpPr>
+          <p:cNvPr id="3" name="מציין מיקום תוכן 2">
+            <a:extLst>
+              <a:ext uri="{FF2B5EF4-FFF2-40B4-BE49-F238E27FC236}">
+                <a16:creationId xmlns:a16="http://schemas.microsoft.com/office/drawing/2014/main" id="{E30FA40B-BD1D-1355-42AC-E44A39E8FE54}"/>
+              </a:ext>
+            </a:extLst>
+          </p:cNvPr>
+          <p:cNvSpPr>
+            <a:spLocks noGrp="1"/>
+          </p:cNvSpPr>
+          <p:nvPr>
+            <p:ph idx="1"/>
+          </p:nvPr>
+        </p:nvSpPr>
+        <p:spPr/>
+        <p:txBody>
+          <a:bodyPr/>
+          <a:lstStyle/>
+          <a:p>
+            <a:endParaRPr lang="he-IL"/>
+          </a:p>
+        </p:txBody>
+      </p:sp>
+    </p:spTree>
+    <p:extLst>
+      <p:ext uri="{BB962C8B-B14F-4D97-AF65-F5344CB8AC3E}">
+        <p14:creationId xmlns:p14="http://schemas.microsoft.com/office/powerpoint/2010/main" val="2936869613"/>
+      </p:ext>
+    </p:extLst>
+  </p:cSld>
+  <p:clrMapOvr>
+    <a:masterClrMapping/>
+  </p:clrMapOvr>
+</p:sld>
+</file>
+
 <file path=ppt/theme/theme1.xml><?xml version="1.0" encoding="utf-8"?>
-<a:theme xmlns:a="http://schemas.openxmlformats.org/drawingml/2006/main" name="ערכת נושא Office">
+<a:theme xmlns:a="http://schemas.openxmlformats.org/drawingml/2006/main" name="אורגני">
   <a:themeElements>
-    <a:clrScheme name="Office">
+    <a:clrScheme name="אורגני">
       <a:dk1>
         <a:sysClr val="windowText" lastClr="000000"/>
       </a:dk1>
@@ -3380,44 +6427,79 @@
         <a:sysClr val="window" lastClr="FFFFFF"/>
       </a:lt1>
       <a:dk2>
-        <a:srgbClr val="44546A"/>
+        <a:srgbClr val="212121"/>
       </a:dk2>
       <a:lt2>
-        <a:srgbClr val="E7E6E6"/>
+        <a:srgbClr val="DADADA"/>
       </a:lt2>
       <a:accent1>
-        <a:srgbClr val="4472C4"/>
+        <a:srgbClr val="83992A"/>
       </a:accent1>
       <a:accent2>
-        <a:srgbClr val="ED7D31"/>
+        <a:srgbClr val="3C9770"/>
       </a:accent2>
       <a:accent3>
-        <a:srgbClr val="A5A5A5"/>
+        <a:srgbClr val="44709D"/>
       </a:accent3>
       <a:accent4>
-        <a:srgbClr val="FFC000"/>
+        <a:srgbClr val="A23C33"/>
       </a:accent4>
       <a:accent5>
-        <a:srgbClr val="5B9BD5"/>
+        <a:srgbClr val="D97828"/>
       </a:accent5>
       <a:accent6>
-        <a:srgbClr val="70AD47"/>
+        <a:srgbClr val="DEB340"/>
       </a:accent6>
       <a:hlink>
-        <a:srgbClr val="0563C1"/>
+        <a:srgbClr val="A8BF4D"/>
       </a:hlink>
       <a:folHlink>
-        <a:srgbClr val="954F72"/>
+        <a:srgbClr val="B4CA80"/>
       </a:folHlink>
     </a:clrScheme>
-    <a:fontScheme name="Office">
+    <a:fontScheme name="אורגני">
       <a:majorFont>
-        <a:latin typeface="Calibri Light" panose="020F0302020204030204"/>
+        <a:latin typeface="Garamond" panose="02020404030301010803"/>
         <a:ea typeface=""/>
         <a:cs typeface=""/>
-        <a:font script="Jpan" typeface="游ゴシック Light"/>
-        <a:font script="Hang" typeface="맑은 고딕"/>
-        <a:font script="Hans" typeface="等线 Light"/>
+        <a:font script="Jpan" typeface="ＭＳ Ｐゴシック"/>
+        <a:font script="Hang" typeface="돋움"/>
+        <a:font script="Hans" typeface="方正舒体"/>
+        <a:font script="Hant" typeface="微軟正黑體"/>
+        <a:font script="Arab" typeface="Arial"/>
+        <a:font script="Hebr" typeface="Arial"/>
+        <a:font script="Thai" typeface="Cordia New"/>
+        <a:font script="Ethi" typeface="Nyala"/>
+        <a:font script="Beng" typeface="Vrinda"/>
+        <a:font script="Gujr" typeface="Shruti"/>
+        <a:font script="Khmr" typeface="DaunPenh"/>
+        <a:font script="Knda" typeface="Tunga"/>
+        <a:font script="Guru" typeface="Raavi"/>
+        <a:font script="Cans" typeface="Euphemia"/>
+        <a:font script="Cher" typeface="Plantagenet Cherokee"/>
+        <a:font script="Yiii" typeface="Microsoft Yi Baiti"/>
+        <a:font script="Tibt" typeface="Microsoft Himalaya"/>
+        <a:font script="Thaa" typeface="MV Boli"/>
+        <a:font script="Deva" typeface="Mangal"/>
+        <a:font script="Telu" typeface="Gautami"/>
+        <a:font script="Taml" typeface="Latha"/>
+        <a:font script="Syrc" typeface="Estrangelo Edessa"/>
+        <a:font script="Orya" typeface="Kalinga"/>
+        <a:font script="Mlym" typeface="Kartika"/>
+        <a:font script="Laoo" typeface="DokChampa"/>
+        <a:font script="Sinh" typeface="Iskoola Pota"/>
+        <a:font script="Mong" typeface="Mongolian Baiti"/>
+        <a:font script="Viet" typeface="Arial"/>
+        <a:font script="Uigh" typeface="Microsoft Uighur"/>
+        <a:font script="Geor" typeface="Sylfaen"/>
+      </a:majorFont>
+      <a:minorFont>
+        <a:latin typeface="Garamond" panose="02020404030301010803"/>
+        <a:ea typeface=""/>
+        <a:cs typeface=""/>
+        <a:font script="Jpan" typeface="ＭＳ Ｐ明朝"/>
+        <a:font script="Hang" typeface="바탕"/>
+        <a:font script="Hans" typeface="方正舒体"/>
         <a:font script="Hant" typeface="新細明體"/>
         <a:font script="Arab" typeface="Times New Roman"/>
         <a:font script="Hebr" typeface="Times New Roman"/>
@@ -3445,78 +6527,9 @@
         <a:font script="Viet" typeface="Times New Roman"/>
         <a:font script="Uigh" typeface="Microsoft Uighur"/>
         <a:font script="Geor" typeface="Sylfaen"/>
-        <a:font script="Armn" typeface="Arial"/>
-        <a:font script="Bugi" typeface="Leelawadee UI"/>
-        <a:font script="Bopo" typeface="Microsoft JhengHei"/>
-        <a:font script="Java" typeface="Javanese Text"/>
-        <a:font script="Lisu" typeface="Segoe UI"/>
-        <a:font script="Mymr" typeface="Myanmar Text"/>
-        <a:font script="Nkoo" typeface="Ebrima"/>
-        <a:font script="Olck" typeface="Nirmala UI"/>
-        <a:font script="Osma" typeface="Ebrima"/>
-        <a:font script="Phag" typeface="Phagspa"/>
-        <a:font script="Syrn" typeface="Estrangelo Edessa"/>
-        <a:font script="Syrj" typeface="Estrangelo Edessa"/>
-        <a:font script="Syre" typeface="Estrangelo Edessa"/>
-        <a:font script="Sora" typeface="Nirmala UI"/>
-        <a:font script="Tale" typeface="Microsoft Tai Le"/>
-        <a:font script="Talu" typeface="Microsoft New Tai Lue"/>
-        <a:font script="Tfng" typeface="Ebrima"/>
-      </a:majorFont>
-      <a:minorFont>
-        <a:latin typeface="Calibri" panose="020F0502020204030204"/>
-        <a:ea typeface=""/>
-        <a:cs typeface=""/>
-        <a:font script="Jpan" typeface="游ゴシック"/>
-        <a:font script="Hang" typeface="맑은 고딕"/>
-        <a:font script="Hans" typeface="等线"/>
-        <a:font script="Hant" typeface="新細明體"/>
-        <a:font script="Arab" typeface="Arial"/>
-        <a:font script="Hebr" typeface="Arial"/>
-        <a:font script="Thai" typeface="Cordia New"/>
-        <a:font script="Ethi" typeface="Nyala"/>
-        <a:font script="Beng" typeface="Vrinda"/>
-        <a:font script="Gujr" typeface="Shruti"/>
-        <a:font script="Khmr" typeface="DaunPenh"/>
-        <a:font script="Knda" typeface="Tunga"/>
-        <a:font script="Guru" typeface="Raavi"/>
-        <a:font script="Cans" typeface="Euphemia"/>
-        <a:font script="Cher" typeface="Plantagenet Cherokee"/>
-        <a:font script="Yiii" typeface="Microsoft Yi Baiti"/>
-        <a:font script="Tibt" typeface="Microsoft Himalaya"/>
-        <a:font script="Thaa" typeface="MV Boli"/>
-        <a:font script="Deva" typeface="Mangal"/>
-        <a:font script="Telu" typeface="Gautami"/>
-        <a:font script="Taml" typeface="Latha"/>
-        <a:font script="Syrc" typeface="Estrangelo Edessa"/>
-        <a:font script="Orya" typeface="Kalinga"/>
-        <a:font script="Mlym" typeface="Kartika"/>
-        <a:font script="Laoo" typeface="DokChampa"/>
-        <a:font script="Sinh" typeface="Iskoola Pota"/>
-        <a:font script="Mong" typeface="Mongolian Baiti"/>
-        <a:font script="Viet" typeface="Arial"/>
-        <a:font script="Uigh" typeface="Microsoft Uighur"/>
-        <a:font script="Geor" typeface="Sylfaen"/>
-        <a:font script="Armn" typeface="Arial"/>
-        <a:font script="Bugi" typeface="Leelawadee UI"/>
-        <a:font script="Bopo" typeface="Microsoft JhengHei"/>
-        <a:font script="Java" typeface="Javanese Text"/>
-        <a:font script="Lisu" typeface="Segoe UI"/>
-        <a:font script="Mymr" typeface="Myanmar Text"/>
-        <a:font script="Nkoo" typeface="Ebrima"/>
-        <a:font script="Olck" typeface="Nirmala UI"/>
-        <a:font script="Osma" typeface="Ebrima"/>
-        <a:font script="Phag" typeface="Phagspa"/>
-        <a:font script="Syrn" typeface="Estrangelo Edessa"/>
-        <a:font script="Syrj" typeface="Estrangelo Edessa"/>
-        <a:font script="Syre" typeface="Estrangelo Edessa"/>
-        <a:font script="Sora" typeface="Nirmala UI"/>
-        <a:font script="Tale" typeface="Microsoft Tai Le"/>
-        <a:font script="Talu" typeface="Microsoft New Tai Lue"/>
-        <a:font script="Tfng" typeface="Ebrima"/>
       </a:minorFont>
     </a:fontScheme>
-    <a:fmtScheme name="Office">
+    <a:fmtScheme name="אורגני">
       <a:fillStyleLst>
         <a:solidFill>
           <a:schemeClr val="phClr"/>
@@ -3525,76 +6538,54 @@
           <a:gsLst>
             <a:gs pos="0">
               <a:schemeClr val="phClr">
+                <a:tint val="60000"/>
                 <a:lumMod val="110000"/>
-                <a:satMod val="105000"/>
-                <a:tint val="67000"/>
-              </a:schemeClr>
-            </a:gs>
-            <a:gs pos="50000">
-              <a:schemeClr val="phClr">
-                <a:lumMod val="105000"/>
-                <a:satMod val="103000"/>
-                <a:tint val="73000"/>
               </a:schemeClr>
             </a:gs>
             <a:gs pos="100000">
               <a:schemeClr val="phClr">
-                <a:lumMod val="105000"/>
-                <a:satMod val="109000"/>
-                <a:tint val="81000"/>
+                <a:tint val="82000"/>
               </a:schemeClr>
             </a:gs>
           </a:gsLst>
           <a:lin ang="5400000" scaled="0"/>
         </a:gradFill>
-        <a:gradFill rotWithShape="1">
-          <a:gsLst>
-            <a:gs pos="0">
+        <a:blipFill>
+          <a:blip xmlns:r="http://schemas.openxmlformats.org/officeDocument/2006/relationships" r:embed="rId1">
+            <a:duotone>
               <a:schemeClr val="phClr">
-                <a:satMod val="103000"/>
-                <a:lumMod val="102000"/>
+                <a:shade val="74000"/>
+                <a:satMod val="130000"/>
+                <a:lumMod val="90000"/>
+              </a:schemeClr>
+              <a:schemeClr val="phClr">
                 <a:tint val="94000"/>
+                <a:satMod val="120000"/>
+                <a:lumMod val="104000"/>
               </a:schemeClr>
-            </a:gs>
-            <a:gs pos="50000">
-              <a:schemeClr val="phClr">
-                <a:satMod val="110000"/>
-                <a:lumMod val="100000"/>
-                <a:shade val="100000"/>
-              </a:schemeClr>
-            </a:gs>
-            <a:gs pos="100000">
-              <a:schemeClr val="phClr">
-                <a:lumMod val="99000"/>
-                <a:satMod val="120000"/>
-                <a:shade val="78000"/>
-              </a:schemeClr>
-            </a:gs>
-          </a:gsLst>
-          <a:lin ang="5400000" scaled="0"/>
-        </a:gradFill>
+            </a:duotone>
+          </a:blip>
+          <a:tile tx="0" ty="0" sx="100000" sy="100000" flip="none" algn="tl"/>
+        </a:blipFill>
       </a:fillStyleLst>
       <a:lnStyleLst>
-        <a:ln w="6350" cap="flat" cmpd="sng" algn="ctr">
+        <a:ln w="9525" cap="flat" cmpd="sng" algn="ctr">
           <a:solidFill>
             <a:schemeClr val="phClr"/>
           </a:solidFill>
           <a:prstDash val="solid"/>
-          <a:miter lim="800000"/>
         </a:ln>
-        <a:ln w="12700" cap="flat" cmpd="sng" algn="ctr">
+        <a:ln w="15875" cap="flat" cmpd="sng" algn="ctr">
           <a:solidFill>
             <a:schemeClr val="phClr"/>
           </a:solidFill>
           <a:prstDash val="solid"/>
-          <a:miter lim="800000"/>
         </a:ln>
-        <a:ln w="19050" cap="flat" cmpd="sng" algn="ctr">
+        <a:ln w="25400" cap="flat" cmpd="sng" algn="ctr">
           <a:solidFill>
             <a:schemeClr val="phClr"/>
           </a:solidFill>
           <a:prstDash val="solid"/>
-          <a:miter lim="800000"/>
         </a:ln>
       </a:lnStyleLst>
       <a:effectStyleLst>
@@ -3602,13 +6593,19 @@
           <a:effectLst/>
         </a:effectStyle>
         <a:effectStyle>
-          <a:effectLst/>
+          <a:effectLst>
+            <a:innerShdw blurRad="25400" dist="12700" dir="13500000">
+              <a:srgbClr val="000000">
+                <a:alpha val="45000"/>
+              </a:srgbClr>
+            </a:innerShdw>
+          </a:effectLst>
         </a:effectStyle>
         <a:effectStyle>
           <a:effectLst>
-            <a:outerShdw blurRad="57150" dist="19050" dir="5400000" algn="ctr" rotWithShape="0">
+            <a:outerShdw blurRad="38100" dist="25400" dir="5400000" rotWithShape="0">
               <a:srgbClr val="000000">
-                <a:alpha val="63000"/>
+                <a:alpha val="60000"/>
               </a:srgbClr>
             </a:outerShdw>
           </a:effectLst>
@@ -3618,39 +6615,27 @@
         <a:solidFill>
           <a:schemeClr val="phClr"/>
         </a:solidFill>
-        <a:solidFill>
-          <a:schemeClr val="phClr">
-            <a:tint val="95000"/>
-            <a:satMod val="170000"/>
-          </a:schemeClr>
-        </a:solidFill>
         <a:gradFill rotWithShape="1">
           <a:gsLst>
             <a:gs pos="0">
               <a:schemeClr val="phClr">
-                <a:tint val="93000"/>
-                <a:satMod val="150000"/>
-                <a:shade val="98000"/>
-                <a:lumMod val="102000"/>
-              </a:schemeClr>
-            </a:gs>
-            <a:gs pos="50000">
-              <a:schemeClr val="phClr">
-                <a:tint val="98000"/>
-                <a:satMod val="130000"/>
-                <a:shade val="90000"/>
-                <a:lumMod val="103000"/>
+                <a:tint val="90000"/>
+                <a:lumMod val="110000"/>
               </a:schemeClr>
             </a:gs>
             <a:gs pos="100000">
               <a:schemeClr val="phClr">
-                <a:shade val="63000"/>
-                <a:satMod val="120000"/>
+                <a:shade val="88000"/>
+                <a:lumMod val="98000"/>
               </a:schemeClr>
             </a:gs>
           </a:gsLst>
           <a:lin ang="5400000" scaled="0"/>
         </a:gradFill>
+        <a:blipFill>
+          <a:blip xmlns:r="http://schemas.openxmlformats.org/officeDocument/2006/relationships" r:embed="rId2"/>
+          <a:stretch/>
+        </a:blipFill>
       </a:bgFillStyleLst>
     </a:fmtScheme>
   </a:themeElements>
@@ -3658,7 +6643,7 @@
   <a:extraClrSchemeLst/>
   <a:extLst>
     <a:ext uri="{05A4C25C-085E-4340-85A3-A5531E510DB2}">
-      <thm15:themeFamily xmlns:thm15="http://schemas.microsoft.com/office/thememl/2012/main" name="Office Theme" id="{62F939B6-93AF-4DB8-9C6B-D6C7DFDC589F}" vid="{4A3C46E8-61CC-4603-A589-7422A47A8E4A}"/>
+      <thm15:themeFamily xmlns:thm15="http://schemas.microsoft.com/office/thememl/2012/main" name="Organic" id="{28CDC826-8792-45C0-861B-85EB3ADEDA33}" vid="{7DAC20F1-423D-49E2-BD0B-50532748BAD0}"/>
     </a:ext>
   </a:extLst>
 </a:theme>
